--- a/ppts/CHAPTER 4 Using LangGraph to Add Memory to Your Chatbot.pptx
+++ b/ppts/CHAPTER 4 Using LangGraph to Add Memory to Your Chatbot.pptx
@@ -270,7 +270,7 @@
                 <a:latin typeface="맑은 고딕" panose="020B0503020000020004" pitchFamily="50" charset="-127"/>
                 <a:ea typeface="맑은 고딕" panose="020B0503020000020004" pitchFamily="50" charset="-127"/>
               </a:rPr>
-              <a:t>2026-08-20</a:t>
+              <a:t>2026-10-02</a:t>
             </a:fld>
             <a:endParaRPr lang="ko-KR" altLang="en-US">
               <a:latin typeface="맑은 고딕" panose="020B0503020000020004" pitchFamily="50" charset="-127"/>
@@ -456,7 +456,7 @@
           <a:p>
             <a:fld id="{43E1C3DD-4A19-441D-907C-380838DB51C4}" type="datetime1">
               <a:rPr lang="ko-KR" altLang="en-US" noProof="0" smtClean="0"/>
-              <a:t>2026-08-20</a:t>
+              <a:t>2026-10-02</a:t>
             </a:fld>
             <a:endParaRPr lang="ko-KR" altLang="en-US" noProof="0"/>
           </a:p>
@@ -1304,7 +1304,7 @@
           <a:p>
             <a:fld id="{990475B5-67CA-4281-BDCA-DA943C3C8EB3}" type="datetime1">
               <a:rPr lang="ko-KR" altLang="en-US" noProof="0" smtClean="0"/>
-              <a:t>2026-08-20</a:t>
+              <a:t>2026-10-02</a:t>
             </a:fld>
             <a:endParaRPr lang="ko-KR" altLang="en-US" noProof="0"/>
           </a:p>
@@ -1958,7 +1958,7 @@
           <a:p>
             <a:fld id="{48A87A34-81AB-432B-8DAE-1953F412C126}" type="datetimeFigureOut">
               <a:rPr lang="en-US" smtClean="0"/>
-              <a:t>8/20/2026</a:t>
+              <a:t>10/2/2026</a:t>
             </a:fld>
             <a:endParaRPr lang="en-US" dirty="0"/>
           </a:p>
@@ -2254,7 +2254,7 @@
           <a:p>
             <a:fld id="{C655C81E-72E7-4D05-94B5-F45B321A525D}" type="datetime1">
               <a:rPr lang="ko-KR" altLang="en-US" noProof="0" smtClean="0"/>
-              <a:t>2026-08-20</a:t>
+              <a:t>2026-10-02</a:t>
             </a:fld>
             <a:endParaRPr lang="ko-KR" altLang="en-US" noProof="0" dirty="0">
               <a:latin typeface="맑은 고딕" panose="020B0503020000020004" pitchFamily="50" charset="-127"/>
@@ -3211,8 +3211,8 @@
         </p:nvSpPr>
         <p:spPr>
           <a:xfrm>
-            <a:off x="609599" y="1328481"/>
-            <a:ext cx="10991851" cy="5016758"/>
+            <a:off x="609599" y="1233231"/>
+            <a:ext cx="10991851" cy="5262979"/>
           </a:xfrm>
           <a:prstGeom prst="rect">
             <a:avLst/>
@@ -3227,741 +3227,938 @@
           </a:bodyPr>
           <a:lstStyle/>
           <a:p>
-            <a:r>
-              <a:rPr lang="en-US" altLang="ko-KR" sz="1600" dirty="0">
-                <a:latin typeface="D2Coding" panose="020B0609020101020101" pitchFamily="49" charset="-127"/>
-                <a:ea typeface="D2Coding" panose="020B0609020101020101" pitchFamily="49" charset="-127"/>
-              </a:rPr>
-              <a:t># 2. </a:t>
-            </a:r>
-            <a:r>
-              <a:rPr lang="ko-KR" altLang="en-US" sz="1600" dirty="0">
-                <a:latin typeface="D2Coding" panose="020B0609020101020101" pitchFamily="49" charset="-127"/>
-                <a:ea typeface="D2Coding" panose="020B0609020101020101" pitchFamily="49" charset="-127"/>
-              </a:rPr>
-              <a:t>그래프 </a:t>
-            </a:r>
-            <a:r>
-              <a:rPr lang="ko-KR" altLang="en-US" sz="1600" dirty="0" err="1">
-                <a:latin typeface="D2Coding" panose="020B0609020101020101" pitchFamily="49" charset="-127"/>
-                <a:ea typeface="D2Coding" panose="020B0609020101020101" pitchFamily="49" charset="-127"/>
-              </a:rPr>
-              <a:t>빌더</a:t>
-            </a:r>
-            <a:r>
-              <a:rPr lang="ko-KR" altLang="en-US" sz="1600" dirty="0">
-                <a:latin typeface="D2Coding" panose="020B0609020101020101" pitchFamily="49" charset="-127"/>
-                <a:ea typeface="D2Coding" panose="020B0609020101020101" pitchFamily="49" charset="-127"/>
-              </a:rPr>
-              <a:t> </a:t>
-            </a:r>
-            <a:r>
-              <a:rPr lang="en-US" altLang="ko-KR" sz="1600" dirty="0">
-                <a:latin typeface="D2Coding" panose="020B0609020101020101" pitchFamily="49" charset="-127"/>
-                <a:ea typeface="D2Coding" panose="020B0609020101020101" pitchFamily="49" charset="-127"/>
-              </a:rPr>
-              <a:t>&amp; </a:t>
-            </a:r>
-            <a:r>
-              <a:rPr lang="ko-KR" altLang="en-US" sz="1600" dirty="0">
-                <a:latin typeface="D2Coding" panose="020B0609020101020101" pitchFamily="49" charset="-127"/>
-                <a:ea typeface="D2Coding" panose="020B0609020101020101" pitchFamily="49" charset="-127"/>
-              </a:rPr>
-              <a:t>모델</a:t>
-            </a:r>
-            <a:endParaRPr lang="en-US" altLang="ko-KR" sz="1600" dirty="0">
+            <a:pPr>
+              <a:buNone/>
+            </a:pPr>
+            <a:r>
+              <a:rPr lang="en-US" altLang="ko-KR" sz="1400" dirty="0">
+                <a:latin typeface="D2Coding" panose="020B0609020101020101" pitchFamily="49" charset="-127"/>
+                <a:ea typeface="D2Coding" panose="020B0609020101020101" pitchFamily="49" charset="-127"/>
+              </a:rPr>
+              <a:t># </a:t>
+            </a:r>
+            <a:r>
+              <a:rPr lang="en-US" altLang="ko-KR" sz="1400" dirty="0"/>
+              <a:t>1. State </a:t>
+            </a:r>
+            <a:r>
+              <a:rPr lang="ko-KR" altLang="en-US" sz="1400" dirty="0"/>
+              <a:t>정의</a:t>
+            </a:r>
+            <a:endParaRPr lang="en-US" altLang="ko-KR" sz="1400" dirty="0">
               <a:latin typeface="D2Coding" panose="020B0609020101020101" pitchFamily="49" charset="-127"/>
               <a:ea typeface="D2Coding" panose="020B0609020101020101" pitchFamily="49" charset="-127"/>
             </a:endParaRPr>
           </a:p>
           <a:p>
             <a:r>
-              <a:rPr lang="en-US" altLang="ko-KR" sz="1600" dirty="0">
-                <a:latin typeface="D2Coding" panose="020B0609020101020101" pitchFamily="49" charset="-127"/>
-                <a:ea typeface="D2Coding" panose="020B0609020101020101" pitchFamily="49" charset="-127"/>
-              </a:rPr>
-              <a:t>workflow</a:t>
-            </a:r>
-            <a:r>
-              <a:rPr lang="ko-KR" altLang="en-US" sz="1600" dirty="0">
-                <a:latin typeface="D2Coding" panose="020B0609020101020101" pitchFamily="49" charset="-127"/>
-                <a:ea typeface="D2Coding" panose="020B0609020101020101" pitchFamily="49" charset="-127"/>
-              </a:rPr>
-              <a:t> = </a:t>
-            </a:r>
-            <a:r>
-              <a:rPr lang="ko-KR" altLang="en-US" sz="1600" dirty="0" err="1">
-                <a:latin typeface="D2Coding" panose="020B0609020101020101" pitchFamily="49" charset="-127"/>
-                <a:ea typeface="D2Coding" panose="020B0609020101020101" pitchFamily="49" charset="-127"/>
-              </a:rPr>
-              <a:t>StateGraph</a:t>
-            </a:r>
-            <a:r>
-              <a:rPr lang="ko-KR" altLang="en-US" sz="1600" dirty="0">
-                <a:latin typeface="D2Coding" panose="020B0609020101020101" pitchFamily="49" charset="-127"/>
-                <a:ea typeface="D2Coding" panose="020B0609020101020101" pitchFamily="49" charset="-127"/>
-              </a:rPr>
-              <a:t>(State)</a:t>
-            </a:r>
-          </a:p>
-          <a:p>
-            <a:r>
-              <a:rPr lang="ko-KR" altLang="en-US" sz="1600" dirty="0" err="1">
-                <a:latin typeface="D2Coding" panose="020B0609020101020101" pitchFamily="49" charset="-127"/>
-                <a:ea typeface="D2Coding" panose="020B0609020101020101" pitchFamily="49" charset="-127"/>
-              </a:rPr>
-              <a:t>model</a:t>
-            </a:r>
-            <a:r>
-              <a:rPr lang="ko-KR" altLang="en-US" sz="1600" dirty="0">
-                <a:latin typeface="D2Coding" panose="020B0609020101020101" pitchFamily="49" charset="-127"/>
-                <a:ea typeface="D2Coding" panose="020B0609020101020101" pitchFamily="49" charset="-127"/>
-              </a:rPr>
-              <a:t> = </a:t>
-            </a:r>
-            <a:r>
-              <a:rPr lang="ko-KR" altLang="en-US" sz="1600" dirty="0" err="1">
-                <a:latin typeface="D2Coding" panose="020B0609020101020101" pitchFamily="49" charset="-127"/>
-                <a:ea typeface="D2Coding" panose="020B0609020101020101" pitchFamily="49" charset="-127"/>
-              </a:rPr>
-              <a:t>ChatGroq</a:t>
-            </a:r>
-            <a:r>
-              <a:rPr lang="ko-KR" altLang="en-US" sz="1600" dirty="0">
+              <a:rPr lang="ko-KR" altLang="en-US" sz="1400" dirty="0" err="1">
+                <a:latin typeface="D2Coding" panose="020B0609020101020101" pitchFamily="49" charset="-127"/>
+                <a:ea typeface="D2Coding" panose="020B0609020101020101" pitchFamily="49" charset="-127"/>
+              </a:rPr>
+              <a:t>class</a:t>
+            </a:r>
+            <a:r>
+              <a:rPr lang="ko-KR" altLang="en-US" sz="1400" dirty="0">
+                <a:latin typeface="D2Coding" panose="020B0609020101020101" pitchFamily="49" charset="-127"/>
+                <a:ea typeface="D2Coding" panose="020B0609020101020101" pitchFamily="49" charset="-127"/>
+              </a:rPr>
+              <a:t> </a:t>
+            </a:r>
+            <a:r>
+              <a:rPr lang="ko-KR" altLang="en-US" sz="1400" b="1" dirty="0">
+                <a:solidFill>
+                  <a:srgbClr val="FF0000"/>
+                </a:solidFill>
+                <a:latin typeface="D2Coding" panose="020B0609020101020101" pitchFamily="49" charset="-127"/>
+                <a:ea typeface="D2Coding" panose="020B0609020101020101" pitchFamily="49" charset="-127"/>
+              </a:rPr>
+              <a:t>State</a:t>
+            </a:r>
+            <a:r>
+              <a:rPr lang="ko-KR" altLang="en-US" sz="1400" dirty="0">
                 <a:latin typeface="D2Coding" panose="020B0609020101020101" pitchFamily="49" charset="-127"/>
                 <a:ea typeface="D2Coding" panose="020B0609020101020101" pitchFamily="49" charset="-127"/>
               </a:rPr>
               <a:t>(</a:t>
             </a:r>
             <a:r>
-              <a:rPr lang="ko-KR" altLang="en-US" sz="1600" dirty="0" err="1">
-                <a:latin typeface="D2Coding" panose="020B0609020101020101" pitchFamily="49" charset="-127"/>
-                <a:ea typeface="D2Coding" panose="020B0609020101020101" pitchFamily="49" charset="-127"/>
-              </a:rPr>
-              <a:t>model_name</a:t>
-            </a:r>
-            <a:r>
-              <a:rPr lang="ko-KR" altLang="en-US" sz="1600" dirty="0">
-                <a:latin typeface="D2Coding" panose="020B0609020101020101" pitchFamily="49" charset="-127"/>
-                <a:ea typeface="D2Coding" panose="020B0609020101020101" pitchFamily="49" charset="-127"/>
-              </a:rPr>
-              <a:t>="llama-3.1-8b-instant", </a:t>
-            </a:r>
-            <a:r>
-              <a:rPr lang="ko-KR" altLang="en-US" sz="1600" dirty="0" err="1">
-                <a:latin typeface="D2Coding" panose="020B0609020101020101" pitchFamily="49" charset="-127"/>
-                <a:ea typeface="D2Coding" panose="020B0609020101020101" pitchFamily="49" charset="-127"/>
-              </a:rPr>
-              <a:t>temperature</a:t>
-            </a:r>
-            <a:r>
-              <a:rPr lang="ko-KR" altLang="en-US" sz="1600" dirty="0">
-                <a:latin typeface="D2Coding" panose="020B0609020101020101" pitchFamily="49" charset="-127"/>
-                <a:ea typeface="D2Coding" panose="020B0609020101020101" pitchFamily="49" charset="-127"/>
-              </a:rPr>
-              <a:t>=0)</a:t>
-            </a:r>
-          </a:p>
-          <a:p>
-            <a:endParaRPr lang="en-US" altLang="ko-KR" sz="1600" dirty="0">
+              <a:rPr lang="ko-KR" altLang="en-US" sz="1400" dirty="0" err="1">
+                <a:latin typeface="D2Coding" panose="020B0609020101020101" pitchFamily="49" charset="-127"/>
+                <a:ea typeface="D2Coding" panose="020B0609020101020101" pitchFamily="49" charset="-127"/>
+              </a:rPr>
+              <a:t>TypedDict</a:t>
+            </a:r>
+            <a:r>
+              <a:rPr lang="ko-KR" altLang="en-US" sz="1400" dirty="0">
+                <a:latin typeface="D2Coding" panose="020B0609020101020101" pitchFamily="49" charset="-127"/>
+                <a:ea typeface="D2Coding" panose="020B0609020101020101" pitchFamily="49" charset="-127"/>
+              </a:rPr>
+              <a:t>):</a:t>
+            </a:r>
+          </a:p>
+          <a:p>
+            <a:r>
+              <a:rPr lang="ko-KR" altLang="en-US" sz="1400" dirty="0">
+                <a:latin typeface="D2Coding" panose="020B0609020101020101" pitchFamily="49" charset="-127"/>
+                <a:ea typeface="D2Coding" panose="020B0609020101020101" pitchFamily="49" charset="-127"/>
+              </a:rPr>
+              <a:t>    </a:t>
+            </a:r>
+            <a:r>
+              <a:rPr lang="ko-KR" altLang="en-US" sz="1400" dirty="0" err="1">
+                <a:latin typeface="D2Coding" panose="020B0609020101020101" pitchFamily="49" charset="-127"/>
+                <a:ea typeface="D2Coding" panose="020B0609020101020101" pitchFamily="49" charset="-127"/>
+              </a:rPr>
+              <a:t>messages</a:t>
+            </a:r>
+            <a:r>
+              <a:rPr lang="ko-KR" altLang="en-US" sz="1400" dirty="0">
+                <a:latin typeface="D2Coding" panose="020B0609020101020101" pitchFamily="49" charset="-127"/>
+                <a:ea typeface="D2Coding" panose="020B0609020101020101" pitchFamily="49" charset="-127"/>
+              </a:rPr>
+              <a:t>: </a:t>
+            </a:r>
+            <a:r>
+              <a:rPr lang="ko-KR" altLang="en-US" sz="1400" dirty="0" err="1">
+                <a:latin typeface="D2Coding" panose="020B0609020101020101" pitchFamily="49" charset="-127"/>
+                <a:ea typeface="D2Coding" panose="020B0609020101020101" pitchFamily="49" charset="-127"/>
+              </a:rPr>
+              <a:t>Annotated</a:t>
+            </a:r>
+            <a:r>
+              <a:rPr lang="ko-KR" altLang="en-US" sz="1400" dirty="0">
+                <a:latin typeface="D2Coding" panose="020B0609020101020101" pitchFamily="49" charset="-127"/>
+                <a:ea typeface="D2Coding" panose="020B0609020101020101" pitchFamily="49" charset="-127"/>
+              </a:rPr>
+              <a:t>[</a:t>
+            </a:r>
+            <a:r>
+              <a:rPr lang="ko-KR" altLang="en-US" sz="1400" dirty="0" err="1">
+                <a:latin typeface="D2Coding" panose="020B0609020101020101" pitchFamily="49" charset="-127"/>
+                <a:ea typeface="D2Coding" panose="020B0609020101020101" pitchFamily="49" charset="-127"/>
+              </a:rPr>
+              <a:t>list</a:t>
+            </a:r>
+            <a:r>
+              <a:rPr lang="ko-KR" altLang="en-US" sz="1400" dirty="0">
+                <a:latin typeface="D2Coding" panose="020B0609020101020101" pitchFamily="49" charset="-127"/>
+                <a:ea typeface="D2Coding" panose="020B0609020101020101" pitchFamily="49" charset="-127"/>
+              </a:rPr>
+              <a:t>, </a:t>
+            </a:r>
+            <a:r>
+              <a:rPr lang="ko-KR" altLang="en-US" sz="1400" dirty="0" err="1">
+                <a:latin typeface="D2Coding" panose="020B0609020101020101" pitchFamily="49" charset="-127"/>
+                <a:ea typeface="D2Coding" panose="020B0609020101020101" pitchFamily="49" charset="-127"/>
+              </a:rPr>
+              <a:t>add_messages</a:t>
+            </a:r>
+            <a:r>
+              <a:rPr lang="ko-KR" altLang="en-US" sz="1400" dirty="0">
+                <a:latin typeface="D2Coding" panose="020B0609020101020101" pitchFamily="49" charset="-127"/>
+                <a:ea typeface="D2Coding" panose="020B0609020101020101" pitchFamily="49" charset="-127"/>
+              </a:rPr>
+              <a:t>] # </a:t>
+            </a:r>
+            <a:r>
+              <a:rPr lang="ko-KR" altLang="en-US" sz="1400" dirty="0" err="1">
+                <a:latin typeface="D2Coding" panose="020B0609020101020101" pitchFamily="49" charset="-127"/>
+                <a:ea typeface="D2Coding" panose="020B0609020101020101" pitchFamily="49" charset="-127"/>
+              </a:rPr>
+              <a:t>리듀서</a:t>
+            </a:r>
+            <a:r>
+              <a:rPr lang="ko-KR" altLang="en-US" sz="1400" dirty="0">
+                <a:latin typeface="D2Coding" panose="020B0609020101020101" pitchFamily="49" charset="-127"/>
+                <a:ea typeface="D2Coding" panose="020B0609020101020101" pitchFamily="49" charset="-127"/>
+              </a:rPr>
+              <a:t>(</a:t>
+            </a:r>
+            <a:r>
+              <a:rPr lang="ko-KR" altLang="en-US" sz="1400" dirty="0" err="1">
+                <a:latin typeface="D2Coding" panose="020B0609020101020101" pitchFamily="49" charset="-127"/>
+                <a:ea typeface="D2Coding" panose="020B0609020101020101" pitchFamily="49" charset="-127"/>
+              </a:rPr>
+              <a:t>add_messages</a:t>
+            </a:r>
+            <a:r>
+              <a:rPr lang="ko-KR" altLang="en-US" sz="1400" dirty="0">
+                <a:latin typeface="D2Coding" panose="020B0609020101020101" pitchFamily="49" charset="-127"/>
+                <a:ea typeface="D2Coding" panose="020B0609020101020101" pitchFamily="49" charset="-127"/>
+              </a:rPr>
+              <a:t>)</a:t>
+            </a:r>
+            <a:endParaRPr lang="en-US" altLang="ko-KR" sz="1400" dirty="0">
               <a:latin typeface="D2Coding" panose="020B0609020101020101" pitchFamily="49" charset="-127"/>
               <a:ea typeface="D2Coding" panose="020B0609020101020101" pitchFamily="49" charset="-127"/>
             </a:endParaRPr>
           </a:p>
           <a:p>
-            <a:r>
-              <a:rPr lang="en-US" altLang="ko-KR" sz="1600" dirty="0">
-                <a:latin typeface="D2Coding" panose="020B0609020101020101" pitchFamily="49" charset="-127"/>
-                <a:ea typeface="D2Coding" panose="020B0609020101020101" pitchFamily="49" charset="-127"/>
-              </a:rPr>
-              <a:t># 3. </a:t>
-            </a:r>
-            <a:r>
-              <a:rPr lang="ko-KR" altLang="en-US" sz="1600" dirty="0">
-                <a:latin typeface="D2Coding" panose="020B0609020101020101" pitchFamily="49" charset="-127"/>
-                <a:ea typeface="D2Coding" panose="020B0609020101020101" pitchFamily="49" charset="-127"/>
-              </a:rPr>
-              <a:t>노드 함수</a:t>
-            </a:r>
-          </a:p>
-          <a:p>
-            <a:r>
-              <a:rPr lang="ko-KR" altLang="en-US" sz="1600" dirty="0" err="1">
-                <a:latin typeface="D2Coding" panose="020B0609020101020101" pitchFamily="49" charset="-127"/>
-                <a:ea typeface="D2Coding" panose="020B0609020101020101" pitchFamily="49" charset="-127"/>
-              </a:rPr>
-              <a:t>def</a:t>
-            </a:r>
-            <a:r>
-              <a:rPr lang="ko-KR" altLang="en-US" sz="1600" dirty="0">
-                <a:latin typeface="D2Coding" panose="020B0609020101020101" pitchFamily="49" charset="-127"/>
-                <a:ea typeface="D2Coding" panose="020B0609020101020101" pitchFamily="49" charset="-127"/>
-              </a:rPr>
-              <a:t> </a:t>
-            </a:r>
-            <a:r>
-              <a:rPr lang="ko-KR" altLang="en-US" sz="1600" dirty="0" err="1">
-                <a:latin typeface="D2Coding" panose="020B0609020101020101" pitchFamily="49" charset="-127"/>
-                <a:ea typeface="D2Coding" panose="020B0609020101020101" pitchFamily="49" charset="-127"/>
-              </a:rPr>
-              <a:t>chatbot</a:t>
-            </a:r>
-            <a:r>
-              <a:rPr lang="ko-KR" altLang="en-US" sz="1600" dirty="0">
-                <a:latin typeface="D2Coding" panose="020B0609020101020101" pitchFamily="49" charset="-127"/>
-                <a:ea typeface="D2Coding" panose="020B0609020101020101" pitchFamily="49" charset="-127"/>
-              </a:rPr>
-              <a:t>(</a:t>
-            </a:r>
-            <a:r>
-              <a:rPr lang="ko-KR" altLang="en-US" sz="1600" dirty="0" err="1">
-                <a:latin typeface="D2Coding" panose="020B0609020101020101" pitchFamily="49" charset="-127"/>
-                <a:ea typeface="D2Coding" panose="020B0609020101020101" pitchFamily="49" charset="-127"/>
-              </a:rPr>
-              <a:t>state</a:t>
-            </a:r>
-            <a:r>
-              <a:rPr lang="ko-KR" altLang="en-US" sz="1600" dirty="0">
-                <a:latin typeface="D2Coding" panose="020B0609020101020101" pitchFamily="49" charset="-127"/>
-                <a:ea typeface="D2Coding" panose="020B0609020101020101" pitchFamily="49" charset="-127"/>
-              </a:rPr>
-              <a:t>: State):   </a:t>
-            </a:r>
-            <a:r>
-              <a:rPr lang="en-US" altLang="ko-KR" sz="1600" dirty="0">
-                <a:latin typeface="D2Coding" panose="020B0609020101020101" pitchFamily="49" charset="-127"/>
-                <a:ea typeface="D2Coding" panose="020B0609020101020101" pitchFamily="49" charset="-127"/>
-              </a:rPr>
-              <a:t># Node</a:t>
-            </a:r>
-            <a:endParaRPr lang="ko-KR" altLang="en-US" sz="1600" dirty="0">
+            <a:endParaRPr lang="en-US" altLang="ko-KR" sz="1400" dirty="0">
               <a:latin typeface="D2Coding" panose="020B0609020101020101" pitchFamily="49" charset="-127"/>
               <a:ea typeface="D2Coding" panose="020B0609020101020101" pitchFamily="49" charset="-127"/>
             </a:endParaRPr>
           </a:p>
           <a:p>
             <a:r>
-              <a:rPr lang="ko-KR" altLang="en-US" sz="1600" dirty="0">
-                <a:latin typeface="D2Coding" panose="020B0609020101020101" pitchFamily="49" charset="-127"/>
-                <a:ea typeface="D2Coding" panose="020B0609020101020101" pitchFamily="49" charset="-127"/>
-              </a:rPr>
-              <a:t>    # 상태(State) 메모장에 누적된 </a:t>
-            </a:r>
-            <a:r>
-              <a:rPr lang="ko-KR" altLang="en-US" sz="1600" dirty="0" err="1">
-                <a:latin typeface="D2Coding" panose="020B0609020101020101" pitchFamily="49" charset="-127"/>
-                <a:ea typeface="D2Coding" panose="020B0609020101020101" pitchFamily="49" charset="-127"/>
-              </a:rPr>
-              <a:t>messages를</a:t>
-            </a:r>
-            <a:r>
-              <a:rPr lang="ko-KR" altLang="en-US" sz="1600" dirty="0">
-                <a:latin typeface="D2Coding" panose="020B0609020101020101" pitchFamily="49" charset="-127"/>
-                <a:ea typeface="D2Coding" panose="020B0609020101020101" pitchFamily="49" charset="-127"/>
-              </a:rPr>
-              <a:t> 꺼내 </a:t>
-            </a:r>
-            <a:r>
-              <a:rPr lang="ko-KR" altLang="en-US" sz="1600" dirty="0" err="1">
-                <a:latin typeface="D2Coding" panose="020B0609020101020101" pitchFamily="49" charset="-127"/>
-                <a:ea typeface="D2Coding" panose="020B0609020101020101" pitchFamily="49" charset="-127"/>
-              </a:rPr>
-              <a:t>LLM에</a:t>
-            </a:r>
-            <a:r>
-              <a:rPr lang="ko-KR" altLang="en-US" sz="1600" dirty="0">
-                <a:latin typeface="D2Coding" panose="020B0609020101020101" pitchFamily="49" charset="-127"/>
-                <a:ea typeface="D2Coding" panose="020B0609020101020101" pitchFamily="49" charset="-127"/>
-              </a:rPr>
-              <a:t> 전달</a:t>
-            </a:r>
-          </a:p>
-          <a:p>
-            <a:r>
-              <a:rPr lang="ko-KR" altLang="en-US" sz="1600" dirty="0">
-                <a:latin typeface="D2Coding" panose="020B0609020101020101" pitchFamily="49" charset="-127"/>
-                <a:ea typeface="D2Coding" panose="020B0609020101020101" pitchFamily="49" charset="-127"/>
-              </a:rPr>
-              <a:t>    </a:t>
-            </a:r>
-            <a:r>
-              <a:rPr lang="ko-KR" altLang="en-US" sz="1600" dirty="0" err="1">
-                <a:latin typeface="D2Coding" panose="020B0609020101020101" pitchFamily="49" charset="-127"/>
-                <a:ea typeface="D2Coding" panose="020B0609020101020101" pitchFamily="49" charset="-127"/>
-              </a:rPr>
-              <a:t>answer</a:t>
-            </a:r>
-            <a:r>
-              <a:rPr lang="ko-KR" altLang="en-US" sz="1600" dirty="0">
-                <a:latin typeface="D2Coding" panose="020B0609020101020101" pitchFamily="49" charset="-127"/>
-                <a:ea typeface="D2Coding" panose="020B0609020101020101" pitchFamily="49" charset="-127"/>
-              </a:rPr>
-              <a:t> = </a:t>
-            </a:r>
-            <a:r>
-              <a:rPr lang="ko-KR" altLang="en-US" sz="1600" dirty="0" err="1">
-                <a:latin typeface="D2Coding" panose="020B0609020101020101" pitchFamily="49" charset="-127"/>
-                <a:ea typeface="D2Coding" panose="020B0609020101020101" pitchFamily="49" charset="-127"/>
-              </a:rPr>
-              <a:t>model.invoke</a:t>
-            </a:r>
-            <a:r>
-              <a:rPr lang="ko-KR" altLang="en-US" sz="1600" dirty="0">
-                <a:latin typeface="D2Coding" panose="020B0609020101020101" pitchFamily="49" charset="-127"/>
-                <a:ea typeface="D2Coding" panose="020B0609020101020101" pitchFamily="49" charset="-127"/>
-              </a:rPr>
-              <a:t>(</a:t>
-            </a:r>
-            <a:r>
-              <a:rPr lang="ko-KR" altLang="en-US" sz="1600" dirty="0" err="1">
-                <a:latin typeface="D2Coding" panose="020B0609020101020101" pitchFamily="49" charset="-127"/>
-                <a:ea typeface="D2Coding" panose="020B0609020101020101" pitchFamily="49" charset="-127"/>
-              </a:rPr>
-              <a:t>state</a:t>
-            </a:r>
-            <a:r>
-              <a:rPr lang="ko-KR" altLang="en-US" sz="1600" dirty="0">
-                <a:latin typeface="D2Coding" panose="020B0609020101020101" pitchFamily="49" charset="-127"/>
-                <a:ea typeface="D2Coding" panose="020B0609020101020101" pitchFamily="49" charset="-127"/>
-              </a:rPr>
-              <a:t>["</a:t>
-            </a:r>
-            <a:r>
-              <a:rPr lang="ko-KR" altLang="en-US" sz="1600" dirty="0" err="1">
-                <a:latin typeface="D2Coding" panose="020B0609020101020101" pitchFamily="49" charset="-127"/>
-                <a:ea typeface="D2Coding" panose="020B0609020101020101" pitchFamily="49" charset="-127"/>
-              </a:rPr>
-              <a:t>messages</a:t>
-            </a:r>
-            <a:r>
-              <a:rPr lang="ko-KR" altLang="en-US" sz="1600" dirty="0">
-                <a:latin typeface="D2Coding" panose="020B0609020101020101" pitchFamily="49" charset="-127"/>
-                <a:ea typeface="D2Coding" panose="020B0609020101020101" pitchFamily="49" charset="-127"/>
-              </a:rPr>
-              <a:t>"])</a:t>
-            </a:r>
-          </a:p>
-          <a:p>
-            <a:r>
-              <a:rPr lang="ko-KR" altLang="en-US" sz="1600" dirty="0">
-                <a:latin typeface="D2Coding" panose="020B0609020101020101" pitchFamily="49" charset="-127"/>
-                <a:ea typeface="D2Coding" panose="020B0609020101020101" pitchFamily="49" charset="-127"/>
-              </a:rPr>
-              <a:t>    </a:t>
-            </a:r>
-            <a:r>
-              <a:rPr lang="ko-KR" altLang="en-US" sz="1600" dirty="0" err="1">
-                <a:latin typeface="D2Coding" panose="020B0609020101020101" pitchFamily="49" charset="-127"/>
-                <a:ea typeface="D2Coding" panose="020B0609020101020101" pitchFamily="49" charset="-127"/>
-              </a:rPr>
-              <a:t>return</a:t>
-            </a:r>
-            <a:r>
-              <a:rPr lang="ko-KR" altLang="en-US" sz="1600" dirty="0">
-                <a:latin typeface="D2Coding" panose="020B0609020101020101" pitchFamily="49" charset="-127"/>
-                <a:ea typeface="D2Coding" panose="020B0609020101020101" pitchFamily="49" charset="-127"/>
-              </a:rPr>
-              <a:t> {"</a:t>
-            </a:r>
-            <a:r>
-              <a:rPr lang="ko-KR" altLang="en-US" sz="1600" dirty="0" err="1">
-                <a:latin typeface="D2Coding" panose="020B0609020101020101" pitchFamily="49" charset="-127"/>
-                <a:ea typeface="D2Coding" panose="020B0609020101020101" pitchFamily="49" charset="-127"/>
-              </a:rPr>
-              <a:t>messages</a:t>
-            </a:r>
-            <a:r>
-              <a:rPr lang="ko-KR" altLang="en-US" sz="1600" dirty="0">
-                <a:latin typeface="D2Coding" panose="020B0609020101020101" pitchFamily="49" charset="-127"/>
-                <a:ea typeface="D2Coding" panose="020B0609020101020101" pitchFamily="49" charset="-127"/>
-              </a:rPr>
-              <a:t>": [</a:t>
-            </a:r>
-            <a:r>
-              <a:rPr lang="ko-KR" altLang="en-US" sz="1600" dirty="0" err="1">
-                <a:latin typeface="D2Coding" panose="020B0609020101020101" pitchFamily="49" charset="-127"/>
-                <a:ea typeface="D2Coding" panose="020B0609020101020101" pitchFamily="49" charset="-127"/>
-              </a:rPr>
-              <a:t>answer</a:t>
-            </a:r>
-            <a:r>
-              <a:rPr lang="ko-KR" altLang="en-US" sz="1600" dirty="0">
-                <a:latin typeface="D2Coding" panose="020B0609020101020101" pitchFamily="49" charset="-127"/>
-                <a:ea typeface="D2Coding" panose="020B0609020101020101" pitchFamily="49" charset="-127"/>
-              </a:rPr>
-              <a:t>]}</a:t>
-            </a:r>
-          </a:p>
-          <a:p>
-            <a:endParaRPr lang="en-US" altLang="ko-KR" sz="1600" dirty="0">
+              <a:rPr lang="en-US" altLang="ko-KR" sz="1400" dirty="0">
+                <a:latin typeface="D2Coding" panose="020B0609020101020101" pitchFamily="49" charset="-127"/>
+                <a:ea typeface="D2Coding" panose="020B0609020101020101" pitchFamily="49" charset="-127"/>
+              </a:rPr>
+              <a:t># 2. </a:t>
+            </a:r>
+            <a:r>
+              <a:rPr lang="ko-KR" altLang="en-US" sz="1400" dirty="0">
+                <a:latin typeface="D2Coding" panose="020B0609020101020101" pitchFamily="49" charset="-127"/>
+                <a:ea typeface="D2Coding" panose="020B0609020101020101" pitchFamily="49" charset="-127"/>
+              </a:rPr>
+              <a:t>그래프 </a:t>
+            </a:r>
+            <a:r>
+              <a:rPr lang="ko-KR" altLang="en-US" sz="1400" dirty="0" err="1">
+                <a:latin typeface="D2Coding" panose="020B0609020101020101" pitchFamily="49" charset="-127"/>
+                <a:ea typeface="D2Coding" panose="020B0609020101020101" pitchFamily="49" charset="-127"/>
+              </a:rPr>
+              <a:t>빌더</a:t>
+            </a:r>
+            <a:r>
+              <a:rPr lang="ko-KR" altLang="en-US" sz="1400" dirty="0">
+                <a:latin typeface="D2Coding" panose="020B0609020101020101" pitchFamily="49" charset="-127"/>
+                <a:ea typeface="D2Coding" panose="020B0609020101020101" pitchFamily="49" charset="-127"/>
+              </a:rPr>
+              <a:t> </a:t>
+            </a:r>
+            <a:r>
+              <a:rPr lang="en-US" altLang="ko-KR" sz="1400" dirty="0">
+                <a:latin typeface="D2Coding" panose="020B0609020101020101" pitchFamily="49" charset="-127"/>
+                <a:ea typeface="D2Coding" panose="020B0609020101020101" pitchFamily="49" charset="-127"/>
+              </a:rPr>
+              <a:t>&amp; </a:t>
+            </a:r>
+            <a:r>
+              <a:rPr lang="ko-KR" altLang="en-US" sz="1400" dirty="0">
+                <a:latin typeface="D2Coding" panose="020B0609020101020101" pitchFamily="49" charset="-127"/>
+                <a:ea typeface="D2Coding" panose="020B0609020101020101" pitchFamily="49" charset="-127"/>
+              </a:rPr>
+              <a:t>모델</a:t>
+            </a:r>
+            <a:endParaRPr lang="en-US" altLang="ko-KR" sz="1400" dirty="0">
               <a:latin typeface="D2Coding" panose="020B0609020101020101" pitchFamily="49" charset="-127"/>
               <a:ea typeface="D2Coding" panose="020B0609020101020101" pitchFamily="49" charset="-127"/>
             </a:endParaRPr>
           </a:p>
           <a:p>
             <a:r>
-              <a:rPr lang="en-US" altLang="ko-KR" sz="1600" dirty="0">
-                <a:latin typeface="D2Coding" panose="020B0609020101020101" pitchFamily="49" charset="-127"/>
-                <a:ea typeface="D2Coding" panose="020B0609020101020101" pitchFamily="49" charset="-127"/>
-              </a:rPr>
-              <a:t># 4. </a:t>
-            </a:r>
-            <a:r>
-              <a:rPr lang="ko-KR" altLang="en-US" sz="1600" dirty="0">
-                <a:latin typeface="D2Coding" panose="020B0609020101020101" pitchFamily="49" charset="-127"/>
-                <a:ea typeface="D2Coding" panose="020B0609020101020101" pitchFamily="49" charset="-127"/>
-              </a:rPr>
-              <a:t>노드</a:t>
-            </a:r>
-            <a:r>
-              <a:rPr lang="en-US" altLang="ko-KR" sz="1600" dirty="0">
-                <a:latin typeface="D2Coding" panose="020B0609020101020101" pitchFamily="49" charset="-127"/>
-                <a:ea typeface="D2Coding" panose="020B0609020101020101" pitchFamily="49" charset="-127"/>
-              </a:rPr>
-              <a:t>/</a:t>
-            </a:r>
-            <a:r>
-              <a:rPr lang="ko-KR" altLang="en-US" sz="1600" dirty="0" err="1">
-                <a:latin typeface="D2Coding" panose="020B0609020101020101" pitchFamily="49" charset="-127"/>
-                <a:ea typeface="D2Coding" panose="020B0609020101020101" pitchFamily="49" charset="-127"/>
-              </a:rPr>
-              <a:t>엣지</a:t>
-            </a:r>
-            <a:r>
-              <a:rPr lang="ko-KR" altLang="en-US" sz="1600" dirty="0">
-                <a:latin typeface="D2Coding" panose="020B0609020101020101" pitchFamily="49" charset="-127"/>
-                <a:ea typeface="D2Coding" panose="020B0609020101020101" pitchFamily="49" charset="-127"/>
-              </a:rPr>
-              <a:t> 연결</a:t>
-            </a:r>
-            <a:endParaRPr lang="en-US" altLang="ko-KR" sz="1600" dirty="0">
+              <a:rPr lang="en-US" altLang="ko-KR" sz="1400" dirty="0">
+                <a:latin typeface="D2Coding" panose="020B0609020101020101" pitchFamily="49" charset="-127"/>
+                <a:ea typeface="D2Coding" panose="020B0609020101020101" pitchFamily="49" charset="-127"/>
+              </a:rPr>
+              <a:t>workflow</a:t>
+            </a:r>
+            <a:r>
+              <a:rPr lang="ko-KR" altLang="en-US" sz="1400" dirty="0">
+                <a:latin typeface="D2Coding" panose="020B0609020101020101" pitchFamily="49" charset="-127"/>
+                <a:ea typeface="D2Coding" panose="020B0609020101020101" pitchFamily="49" charset="-127"/>
+              </a:rPr>
+              <a:t> = </a:t>
+            </a:r>
+            <a:r>
+              <a:rPr lang="ko-KR" altLang="en-US" sz="1400" dirty="0" err="1">
+                <a:latin typeface="D2Coding" panose="020B0609020101020101" pitchFamily="49" charset="-127"/>
+                <a:ea typeface="D2Coding" panose="020B0609020101020101" pitchFamily="49" charset="-127"/>
+              </a:rPr>
+              <a:t>StateGraph</a:t>
+            </a:r>
+            <a:r>
+              <a:rPr lang="ko-KR" altLang="en-US" sz="1400" dirty="0">
+                <a:latin typeface="D2Coding" panose="020B0609020101020101" pitchFamily="49" charset="-127"/>
+                <a:ea typeface="D2Coding" panose="020B0609020101020101" pitchFamily="49" charset="-127"/>
+              </a:rPr>
+              <a:t>(</a:t>
+            </a:r>
+            <a:r>
+              <a:rPr lang="ko-KR" altLang="en-US" sz="1400" b="1" dirty="0">
+                <a:solidFill>
+                  <a:srgbClr val="FF0000"/>
+                </a:solidFill>
+                <a:latin typeface="D2Coding" panose="020B0609020101020101" pitchFamily="49" charset="-127"/>
+                <a:ea typeface="D2Coding" panose="020B0609020101020101" pitchFamily="49" charset="-127"/>
+              </a:rPr>
+              <a:t>State</a:t>
+            </a:r>
+            <a:r>
+              <a:rPr lang="ko-KR" altLang="en-US" sz="1400" dirty="0">
+                <a:latin typeface="D2Coding" panose="020B0609020101020101" pitchFamily="49" charset="-127"/>
+                <a:ea typeface="D2Coding" panose="020B0609020101020101" pitchFamily="49" charset="-127"/>
+              </a:rPr>
+              <a:t>)</a:t>
+            </a:r>
+          </a:p>
+          <a:p>
+            <a:r>
+              <a:rPr lang="ko-KR" altLang="en-US" sz="1400" dirty="0" err="1">
+                <a:latin typeface="D2Coding" panose="020B0609020101020101" pitchFamily="49" charset="-127"/>
+                <a:ea typeface="D2Coding" panose="020B0609020101020101" pitchFamily="49" charset="-127"/>
+              </a:rPr>
+              <a:t>model</a:t>
+            </a:r>
+            <a:r>
+              <a:rPr lang="ko-KR" altLang="en-US" sz="1400" dirty="0">
+                <a:latin typeface="D2Coding" panose="020B0609020101020101" pitchFamily="49" charset="-127"/>
+                <a:ea typeface="D2Coding" panose="020B0609020101020101" pitchFamily="49" charset="-127"/>
+              </a:rPr>
+              <a:t> = </a:t>
+            </a:r>
+            <a:r>
+              <a:rPr lang="ko-KR" altLang="en-US" sz="1400" dirty="0" err="1">
+                <a:latin typeface="D2Coding" panose="020B0609020101020101" pitchFamily="49" charset="-127"/>
+                <a:ea typeface="D2Coding" panose="020B0609020101020101" pitchFamily="49" charset="-127"/>
+              </a:rPr>
+              <a:t>ChatGroq</a:t>
+            </a:r>
+            <a:r>
+              <a:rPr lang="ko-KR" altLang="en-US" sz="1400" dirty="0">
+                <a:latin typeface="D2Coding" panose="020B0609020101020101" pitchFamily="49" charset="-127"/>
+                <a:ea typeface="D2Coding" panose="020B0609020101020101" pitchFamily="49" charset="-127"/>
+              </a:rPr>
+              <a:t>(</a:t>
+            </a:r>
+            <a:r>
+              <a:rPr lang="ko-KR" altLang="en-US" sz="1400" dirty="0" err="1">
+                <a:latin typeface="D2Coding" panose="020B0609020101020101" pitchFamily="49" charset="-127"/>
+                <a:ea typeface="D2Coding" panose="020B0609020101020101" pitchFamily="49" charset="-127"/>
+              </a:rPr>
+              <a:t>model_name</a:t>
+            </a:r>
+            <a:r>
+              <a:rPr lang="ko-KR" altLang="en-US" sz="1400" dirty="0">
+                <a:latin typeface="D2Coding" panose="020B0609020101020101" pitchFamily="49" charset="-127"/>
+                <a:ea typeface="D2Coding" panose="020B0609020101020101" pitchFamily="49" charset="-127"/>
+              </a:rPr>
+              <a:t>="llama-3.1-8b-instant", </a:t>
+            </a:r>
+            <a:r>
+              <a:rPr lang="ko-KR" altLang="en-US" sz="1400" dirty="0" err="1">
+                <a:latin typeface="D2Coding" panose="020B0609020101020101" pitchFamily="49" charset="-127"/>
+                <a:ea typeface="D2Coding" panose="020B0609020101020101" pitchFamily="49" charset="-127"/>
+              </a:rPr>
+              <a:t>temperature</a:t>
+            </a:r>
+            <a:r>
+              <a:rPr lang="ko-KR" altLang="en-US" sz="1400" dirty="0">
+                <a:latin typeface="D2Coding" panose="020B0609020101020101" pitchFamily="49" charset="-127"/>
+                <a:ea typeface="D2Coding" panose="020B0609020101020101" pitchFamily="49" charset="-127"/>
+              </a:rPr>
+              <a:t>=0)</a:t>
+            </a:r>
+          </a:p>
+          <a:p>
+            <a:endParaRPr lang="en-US" altLang="ko-KR" sz="1400" dirty="0">
               <a:latin typeface="D2Coding" panose="020B0609020101020101" pitchFamily="49" charset="-127"/>
               <a:ea typeface="D2Coding" panose="020B0609020101020101" pitchFamily="49" charset="-127"/>
             </a:endParaRPr>
           </a:p>
           <a:p>
             <a:r>
-              <a:rPr lang="en-US" altLang="ko-KR" sz="1600" dirty="0">
-                <a:latin typeface="D2Coding" panose="020B0609020101020101" pitchFamily="49" charset="-127"/>
-                <a:ea typeface="D2Coding" panose="020B0609020101020101" pitchFamily="49" charset="-127"/>
-              </a:rPr>
-              <a:t>workflow</a:t>
-            </a:r>
-            <a:r>
-              <a:rPr lang="ko-KR" altLang="en-US" sz="1600" dirty="0">
-                <a:latin typeface="D2Coding" panose="020B0609020101020101" pitchFamily="49" charset="-127"/>
-                <a:ea typeface="D2Coding" panose="020B0609020101020101" pitchFamily="49" charset="-127"/>
-              </a:rPr>
-              <a:t>.</a:t>
-            </a:r>
-            <a:r>
-              <a:rPr lang="ko-KR" altLang="en-US" sz="1600" dirty="0" err="1">
-                <a:latin typeface="D2Coding" panose="020B0609020101020101" pitchFamily="49" charset="-127"/>
-                <a:ea typeface="D2Coding" panose="020B0609020101020101" pitchFamily="49" charset="-127"/>
-              </a:rPr>
-              <a:t>add_node</a:t>
-            </a:r>
-            <a:r>
-              <a:rPr lang="ko-KR" altLang="en-US" sz="1600" dirty="0">
-                <a:latin typeface="D2Coding" panose="020B0609020101020101" pitchFamily="49" charset="-127"/>
-                <a:ea typeface="D2Coding" panose="020B0609020101020101" pitchFamily="49" charset="-127"/>
-              </a:rPr>
-              <a:t>("</a:t>
-            </a:r>
-            <a:r>
-              <a:rPr lang="ko-KR" altLang="en-US" sz="1600" dirty="0" err="1">
+              <a:rPr lang="en-US" altLang="ko-KR" sz="1400" dirty="0">
+                <a:latin typeface="D2Coding" panose="020B0609020101020101" pitchFamily="49" charset="-127"/>
+                <a:ea typeface="D2Coding" panose="020B0609020101020101" pitchFamily="49" charset="-127"/>
+              </a:rPr>
+              <a:t># 3. </a:t>
+            </a:r>
+            <a:r>
+              <a:rPr lang="ko-KR" altLang="en-US" sz="1400" dirty="0">
+                <a:latin typeface="D2Coding" panose="020B0609020101020101" pitchFamily="49" charset="-127"/>
+                <a:ea typeface="D2Coding" panose="020B0609020101020101" pitchFamily="49" charset="-127"/>
+              </a:rPr>
+              <a:t>노드 함수</a:t>
+            </a:r>
+          </a:p>
+          <a:p>
+            <a:r>
+              <a:rPr lang="ko-KR" altLang="en-US" sz="1400" dirty="0" err="1">
+                <a:latin typeface="D2Coding" panose="020B0609020101020101" pitchFamily="49" charset="-127"/>
+                <a:ea typeface="D2Coding" panose="020B0609020101020101" pitchFamily="49" charset="-127"/>
+              </a:rPr>
+              <a:t>def</a:t>
+            </a:r>
+            <a:r>
+              <a:rPr lang="ko-KR" altLang="en-US" sz="1400" dirty="0">
+                <a:latin typeface="D2Coding" panose="020B0609020101020101" pitchFamily="49" charset="-127"/>
+                <a:ea typeface="D2Coding" panose="020B0609020101020101" pitchFamily="49" charset="-127"/>
+              </a:rPr>
+              <a:t> </a:t>
+            </a:r>
+            <a:r>
+              <a:rPr lang="ko-KR" altLang="en-US" sz="1400" b="1" dirty="0" err="1">
+                <a:solidFill>
+                  <a:srgbClr val="00B050"/>
+                </a:solidFill>
                 <a:latin typeface="D2Coding" panose="020B0609020101020101" pitchFamily="49" charset="-127"/>
                 <a:ea typeface="D2Coding" panose="020B0609020101020101" pitchFamily="49" charset="-127"/>
               </a:rPr>
               <a:t>chatbot</a:t>
             </a:r>
             <a:r>
-              <a:rPr lang="ko-KR" altLang="en-US" sz="1600" dirty="0">
-                <a:latin typeface="D2Coding" panose="020B0609020101020101" pitchFamily="49" charset="-127"/>
-                <a:ea typeface="D2Coding" panose="020B0609020101020101" pitchFamily="49" charset="-127"/>
-              </a:rPr>
-              <a:t>", </a:t>
-            </a:r>
-            <a:r>
-              <a:rPr lang="ko-KR" altLang="en-US" sz="1600" dirty="0" err="1">
-                <a:latin typeface="D2Coding" panose="020B0609020101020101" pitchFamily="49" charset="-127"/>
-                <a:ea typeface="D2Coding" panose="020B0609020101020101" pitchFamily="49" charset="-127"/>
-              </a:rPr>
-              <a:t>chatbot</a:t>
-            </a:r>
-            <a:r>
-              <a:rPr lang="ko-KR" altLang="en-US" sz="1600" dirty="0">
-                <a:latin typeface="D2Coding" panose="020B0609020101020101" pitchFamily="49" charset="-127"/>
-                <a:ea typeface="D2Coding" panose="020B0609020101020101" pitchFamily="49" charset="-127"/>
-              </a:rPr>
-              <a:t>)</a:t>
-            </a:r>
-          </a:p>
-          <a:p>
-            <a:r>
-              <a:rPr lang="en-US" altLang="ko-KR" sz="1600" dirty="0">
-                <a:latin typeface="D2Coding" panose="020B0609020101020101" pitchFamily="49" charset="-127"/>
-                <a:ea typeface="D2Coding" panose="020B0609020101020101" pitchFamily="49" charset="-127"/>
-              </a:rPr>
-              <a:t>workflow</a:t>
-            </a:r>
-            <a:r>
-              <a:rPr lang="ko-KR" altLang="en-US" sz="1600" dirty="0">
-                <a:latin typeface="D2Coding" panose="020B0609020101020101" pitchFamily="49" charset="-127"/>
-                <a:ea typeface="D2Coding" panose="020B0609020101020101" pitchFamily="49" charset="-127"/>
-              </a:rPr>
-              <a:t>.</a:t>
-            </a:r>
-            <a:r>
-              <a:rPr lang="ko-KR" altLang="en-US" sz="1600" dirty="0" err="1">
-                <a:latin typeface="D2Coding" panose="020B0609020101020101" pitchFamily="49" charset="-127"/>
-                <a:ea typeface="D2Coding" panose="020B0609020101020101" pitchFamily="49" charset="-127"/>
-              </a:rPr>
-              <a:t>add_edge</a:t>
-            </a:r>
-            <a:r>
-              <a:rPr lang="ko-KR" altLang="en-US" sz="1600" dirty="0">
-                <a:latin typeface="D2Coding" panose="020B0609020101020101" pitchFamily="49" charset="-127"/>
-                <a:ea typeface="D2Coding" panose="020B0609020101020101" pitchFamily="49" charset="-127"/>
-              </a:rPr>
-              <a:t>(START, "</a:t>
-            </a:r>
-            <a:r>
-              <a:rPr lang="ko-KR" altLang="en-US" sz="1600" dirty="0" err="1">
-                <a:latin typeface="D2Coding" panose="020B0609020101020101" pitchFamily="49" charset="-127"/>
-                <a:ea typeface="D2Coding" panose="020B0609020101020101" pitchFamily="49" charset="-127"/>
-              </a:rPr>
-              <a:t>chatbot</a:t>
-            </a:r>
-            <a:r>
-              <a:rPr lang="ko-KR" altLang="en-US" sz="1600" dirty="0">
-                <a:latin typeface="D2Coding" panose="020B0609020101020101" pitchFamily="49" charset="-127"/>
-                <a:ea typeface="D2Coding" panose="020B0609020101020101" pitchFamily="49" charset="-127"/>
-              </a:rPr>
-              <a:t>")</a:t>
-            </a:r>
-          </a:p>
-          <a:p>
-            <a:r>
-              <a:rPr lang="en-US" altLang="ko-KR" sz="1600" dirty="0">
-                <a:latin typeface="D2Coding" panose="020B0609020101020101" pitchFamily="49" charset="-127"/>
-                <a:ea typeface="D2Coding" panose="020B0609020101020101" pitchFamily="49" charset="-127"/>
-              </a:rPr>
-              <a:t>workflow</a:t>
-            </a:r>
-            <a:r>
-              <a:rPr lang="ko-KR" altLang="en-US" sz="1600" dirty="0">
-                <a:latin typeface="D2Coding" panose="020B0609020101020101" pitchFamily="49" charset="-127"/>
-                <a:ea typeface="D2Coding" panose="020B0609020101020101" pitchFamily="49" charset="-127"/>
-              </a:rPr>
-              <a:t>.</a:t>
-            </a:r>
-            <a:r>
-              <a:rPr lang="ko-KR" altLang="en-US" sz="1600" dirty="0" err="1">
-                <a:latin typeface="D2Coding" panose="020B0609020101020101" pitchFamily="49" charset="-127"/>
-                <a:ea typeface="D2Coding" panose="020B0609020101020101" pitchFamily="49" charset="-127"/>
-              </a:rPr>
-              <a:t>add_edge</a:t>
-            </a:r>
-            <a:r>
-              <a:rPr lang="ko-KR" altLang="en-US" sz="1600" dirty="0">
-                <a:latin typeface="D2Coding" panose="020B0609020101020101" pitchFamily="49" charset="-127"/>
-                <a:ea typeface="D2Coding" panose="020B0609020101020101" pitchFamily="49" charset="-127"/>
-              </a:rPr>
-              <a:t>("</a:t>
-            </a:r>
-            <a:r>
-              <a:rPr lang="ko-KR" altLang="en-US" sz="1600" dirty="0" err="1">
-                <a:latin typeface="D2Coding" panose="020B0609020101020101" pitchFamily="49" charset="-127"/>
-                <a:ea typeface="D2Coding" panose="020B0609020101020101" pitchFamily="49" charset="-127"/>
-              </a:rPr>
-              <a:t>chatbot</a:t>
-            </a:r>
-            <a:r>
-              <a:rPr lang="ko-KR" altLang="en-US" sz="1600" dirty="0">
-                <a:latin typeface="D2Coding" panose="020B0609020101020101" pitchFamily="49" charset="-127"/>
-                <a:ea typeface="D2Coding" panose="020B0609020101020101" pitchFamily="49" charset="-127"/>
-              </a:rPr>
-              <a:t>", END)</a:t>
-            </a:r>
-          </a:p>
-          <a:p>
-            <a:endParaRPr lang="en-US" altLang="ko-KR" sz="1600" dirty="0">
+              <a:rPr lang="ko-KR" altLang="en-US" sz="1400" dirty="0">
+                <a:latin typeface="D2Coding" panose="020B0609020101020101" pitchFamily="49" charset="-127"/>
+                <a:ea typeface="D2Coding" panose="020B0609020101020101" pitchFamily="49" charset="-127"/>
+              </a:rPr>
+              <a:t>(</a:t>
+            </a:r>
+            <a:r>
+              <a:rPr lang="ko-KR" altLang="en-US" sz="1400" dirty="0" err="1">
+                <a:latin typeface="D2Coding" panose="020B0609020101020101" pitchFamily="49" charset="-127"/>
+                <a:ea typeface="D2Coding" panose="020B0609020101020101" pitchFamily="49" charset="-127"/>
+              </a:rPr>
+              <a:t>state</a:t>
+            </a:r>
+            <a:r>
+              <a:rPr lang="ko-KR" altLang="en-US" sz="1400" dirty="0">
+                <a:latin typeface="D2Coding" panose="020B0609020101020101" pitchFamily="49" charset="-127"/>
+                <a:ea typeface="D2Coding" panose="020B0609020101020101" pitchFamily="49" charset="-127"/>
+              </a:rPr>
+              <a:t>: State):   </a:t>
+            </a:r>
+            <a:r>
+              <a:rPr lang="en-US" altLang="ko-KR" sz="1400" dirty="0">
+                <a:latin typeface="D2Coding" panose="020B0609020101020101" pitchFamily="49" charset="-127"/>
+                <a:ea typeface="D2Coding" panose="020B0609020101020101" pitchFamily="49" charset="-127"/>
+              </a:rPr>
+              <a:t># Node</a:t>
+            </a:r>
+            <a:endParaRPr lang="ko-KR" altLang="en-US" sz="1400" dirty="0">
               <a:latin typeface="D2Coding" panose="020B0609020101020101" pitchFamily="49" charset="-127"/>
               <a:ea typeface="D2Coding" panose="020B0609020101020101" pitchFamily="49" charset="-127"/>
             </a:endParaRPr>
           </a:p>
           <a:p>
             <a:r>
-              <a:rPr lang="en-US" altLang="ko-KR" sz="1600" dirty="0">
-                <a:latin typeface="D2Coding" panose="020B0609020101020101" pitchFamily="49" charset="-127"/>
-                <a:ea typeface="D2Coding" panose="020B0609020101020101" pitchFamily="49" charset="-127"/>
-              </a:rPr>
-              <a:t># 5. </a:t>
-            </a:r>
-            <a:r>
-              <a:rPr lang="ko-KR" altLang="en-US" sz="1600" dirty="0">
-                <a:latin typeface="D2Coding" panose="020B0609020101020101" pitchFamily="49" charset="-127"/>
-                <a:ea typeface="D2Coding" panose="020B0609020101020101" pitchFamily="49" charset="-127"/>
-              </a:rPr>
-              <a:t>컴파일 </a:t>
-            </a:r>
-            <a:r>
-              <a:rPr lang="en-US" altLang="ko-KR" sz="1600" dirty="0">
-                <a:latin typeface="D2Coding" panose="020B0609020101020101" pitchFamily="49" charset="-127"/>
-                <a:ea typeface="D2Coding" panose="020B0609020101020101" pitchFamily="49" charset="-127"/>
-              </a:rPr>
-              <a:t>&amp; </a:t>
-            </a:r>
-            <a:r>
-              <a:rPr lang="ko-KR" altLang="en-US" sz="1600" dirty="0">
-                <a:latin typeface="D2Coding" panose="020B0609020101020101" pitchFamily="49" charset="-127"/>
-                <a:ea typeface="D2Coding" panose="020B0609020101020101" pitchFamily="49" charset="-127"/>
-              </a:rPr>
-              <a:t>실행</a:t>
-            </a:r>
-            <a:endParaRPr lang="en-US" altLang="ko-KR" sz="1600" dirty="0">
+              <a:rPr lang="ko-KR" altLang="en-US" sz="1400" dirty="0">
+                <a:latin typeface="D2Coding" panose="020B0609020101020101" pitchFamily="49" charset="-127"/>
+                <a:ea typeface="D2Coding" panose="020B0609020101020101" pitchFamily="49" charset="-127"/>
+              </a:rPr>
+              <a:t>    # 상태(State) 메모장에 누적된 </a:t>
+            </a:r>
+            <a:r>
+              <a:rPr lang="ko-KR" altLang="en-US" sz="1400" dirty="0" err="1">
+                <a:latin typeface="D2Coding" panose="020B0609020101020101" pitchFamily="49" charset="-127"/>
+                <a:ea typeface="D2Coding" panose="020B0609020101020101" pitchFamily="49" charset="-127"/>
+              </a:rPr>
+              <a:t>messages를</a:t>
+            </a:r>
+            <a:r>
+              <a:rPr lang="ko-KR" altLang="en-US" sz="1400" dirty="0">
+                <a:latin typeface="D2Coding" panose="020B0609020101020101" pitchFamily="49" charset="-127"/>
+                <a:ea typeface="D2Coding" panose="020B0609020101020101" pitchFamily="49" charset="-127"/>
+              </a:rPr>
+              <a:t> 꺼내 </a:t>
+            </a:r>
+            <a:r>
+              <a:rPr lang="ko-KR" altLang="en-US" sz="1400" dirty="0" err="1">
+                <a:latin typeface="D2Coding" panose="020B0609020101020101" pitchFamily="49" charset="-127"/>
+                <a:ea typeface="D2Coding" panose="020B0609020101020101" pitchFamily="49" charset="-127"/>
+              </a:rPr>
+              <a:t>LLM에</a:t>
+            </a:r>
+            <a:r>
+              <a:rPr lang="ko-KR" altLang="en-US" sz="1400" dirty="0">
+                <a:latin typeface="D2Coding" panose="020B0609020101020101" pitchFamily="49" charset="-127"/>
+                <a:ea typeface="D2Coding" panose="020B0609020101020101" pitchFamily="49" charset="-127"/>
+              </a:rPr>
+              <a:t> 전달</a:t>
+            </a:r>
+          </a:p>
+          <a:p>
+            <a:r>
+              <a:rPr lang="ko-KR" altLang="en-US" sz="1400" dirty="0">
+                <a:latin typeface="D2Coding" panose="020B0609020101020101" pitchFamily="49" charset="-127"/>
+                <a:ea typeface="D2Coding" panose="020B0609020101020101" pitchFamily="49" charset="-127"/>
+              </a:rPr>
+              <a:t>    </a:t>
+            </a:r>
+            <a:r>
+              <a:rPr lang="ko-KR" altLang="en-US" sz="1400" dirty="0" err="1">
+                <a:latin typeface="D2Coding" panose="020B0609020101020101" pitchFamily="49" charset="-127"/>
+                <a:ea typeface="D2Coding" panose="020B0609020101020101" pitchFamily="49" charset="-127"/>
+              </a:rPr>
+              <a:t>answer</a:t>
+            </a:r>
+            <a:r>
+              <a:rPr lang="ko-KR" altLang="en-US" sz="1400" dirty="0">
+                <a:latin typeface="D2Coding" panose="020B0609020101020101" pitchFamily="49" charset="-127"/>
+                <a:ea typeface="D2Coding" panose="020B0609020101020101" pitchFamily="49" charset="-127"/>
+              </a:rPr>
+              <a:t> = </a:t>
+            </a:r>
+            <a:r>
+              <a:rPr lang="ko-KR" altLang="en-US" sz="1400" dirty="0" err="1">
+                <a:latin typeface="D2Coding" panose="020B0609020101020101" pitchFamily="49" charset="-127"/>
+                <a:ea typeface="D2Coding" panose="020B0609020101020101" pitchFamily="49" charset="-127"/>
+              </a:rPr>
+              <a:t>model.invoke</a:t>
+            </a:r>
+            <a:r>
+              <a:rPr lang="ko-KR" altLang="en-US" sz="1400" dirty="0">
+                <a:latin typeface="D2Coding" panose="020B0609020101020101" pitchFamily="49" charset="-127"/>
+                <a:ea typeface="D2Coding" panose="020B0609020101020101" pitchFamily="49" charset="-127"/>
+              </a:rPr>
+              <a:t>(</a:t>
+            </a:r>
+            <a:r>
+              <a:rPr lang="ko-KR" altLang="en-US" sz="1400" dirty="0" err="1">
+                <a:latin typeface="D2Coding" panose="020B0609020101020101" pitchFamily="49" charset="-127"/>
+                <a:ea typeface="D2Coding" panose="020B0609020101020101" pitchFamily="49" charset="-127"/>
+              </a:rPr>
+              <a:t>state</a:t>
+            </a:r>
+            <a:r>
+              <a:rPr lang="ko-KR" altLang="en-US" sz="1400" dirty="0">
+                <a:latin typeface="D2Coding" panose="020B0609020101020101" pitchFamily="49" charset="-127"/>
+                <a:ea typeface="D2Coding" panose="020B0609020101020101" pitchFamily="49" charset="-127"/>
+              </a:rPr>
+              <a:t>["</a:t>
+            </a:r>
+            <a:r>
+              <a:rPr lang="ko-KR" altLang="en-US" sz="1400" dirty="0" err="1">
+                <a:latin typeface="D2Coding" panose="020B0609020101020101" pitchFamily="49" charset="-127"/>
+                <a:ea typeface="D2Coding" panose="020B0609020101020101" pitchFamily="49" charset="-127"/>
+              </a:rPr>
+              <a:t>messages</a:t>
+            </a:r>
+            <a:r>
+              <a:rPr lang="ko-KR" altLang="en-US" sz="1400" dirty="0">
+                <a:latin typeface="D2Coding" panose="020B0609020101020101" pitchFamily="49" charset="-127"/>
+                <a:ea typeface="D2Coding" panose="020B0609020101020101" pitchFamily="49" charset="-127"/>
+              </a:rPr>
+              <a:t>"])</a:t>
+            </a:r>
+          </a:p>
+          <a:p>
+            <a:r>
+              <a:rPr lang="ko-KR" altLang="en-US" sz="1400" dirty="0">
+                <a:latin typeface="D2Coding" panose="020B0609020101020101" pitchFamily="49" charset="-127"/>
+                <a:ea typeface="D2Coding" panose="020B0609020101020101" pitchFamily="49" charset="-127"/>
+              </a:rPr>
+              <a:t>    </a:t>
+            </a:r>
+            <a:r>
+              <a:rPr lang="ko-KR" altLang="en-US" sz="1400" dirty="0" err="1">
+                <a:latin typeface="D2Coding" panose="020B0609020101020101" pitchFamily="49" charset="-127"/>
+                <a:ea typeface="D2Coding" panose="020B0609020101020101" pitchFamily="49" charset="-127"/>
+              </a:rPr>
+              <a:t>return</a:t>
+            </a:r>
+            <a:r>
+              <a:rPr lang="ko-KR" altLang="en-US" sz="1400" dirty="0">
+                <a:latin typeface="D2Coding" panose="020B0609020101020101" pitchFamily="49" charset="-127"/>
+                <a:ea typeface="D2Coding" panose="020B0609020101020101" pitchFamily="49" charset="-127"/>
+              </a:rPr>
+              <a:t> {"</a:t>
+            </a:r>
+            <a:r>
+              <a:rPr lang="ko-KR" altLang="en-US" sz="1400" dirty="0" err="1">
+                <a:latin typeface="D2Coding" panose="020B0609020101020101" pitchFamily="49" charset="-127"/>
+                <a:ea typeface="D2Coding" panose="020B0609020101020101" pitchFamily="49" charset="-127"/>
+              </a:rPr>
+              <a:t>messages</a:t>
+            </a:r>
+            <a:r>
+              <a:rPr lang="ko-KR" altLang="en-US" sz="1400" dirty="0">
+                <a:latin typeface="D2Coding" panose="020B0609020101020101" pitchFamily="49" charset="-127"/>
+                <a:ea typeface="D2Coding" panose="020B0609020101020101" pitchFamily="49" charset="-127"/>
+              </a:rPr>
+              <a:t>": [</a:t>
+            </a:r>
+            <a:r>
+              <a:rPr lang="ko-KR" altLang="en-US" sz="1400" dirty="0" err="1">
+                <a:latin typeface="D2Coding" panose="020B0609020101020101" pitchFamily="49" charset="-127"/>
+                <a:ea typeface="D2Coding" panose="020B0609020101020101" pitchFamily="49" charset="-127"/>
+              </a:rPr>
+              <a:t>answer</a:t>
+            </a:r>
+            <a:r>
+              <a:rPr lang="ko-KR" altLang="en-US" sz="1400" dirty="0">
+                <a:latin typeface="D2Coding" panose="020B0609020101020101" pitchFamily="49" charset="-127"/>
+                <a:ea typeface="D2Coding" panose="020B0609020101020101" pitchFamily="49" charset="-127"/>
+              </a:rPr>
+              <a:t>]}</a:t>
+            </a:r>
+          </a:p>
+          <a:p>
+            <a:endParaRPr lang="en-US" altLang="ko-KR" sz="1400" dirty="0">
               <a:latin typeface="D2Coding" panose="020B0609020101020101" pitchFamily="49" charset="-127"/>
               <a:ea typeface="D2Coding" panose="020B0609020101020101" pitchFamily="49" charset="-127"/>
             </a:endParaRPr>
           </a:p>
           <a:p>
             <a:r>
-              <a:rPr lang="en-US" altLang="ko-KR" sz="1600" dirty="0">
-                <a:latin typeface="D2Coding" panose="020B0609020101020101" pitchFamily="49" charset="-127"/>
-                <a:ea typeface="D2Coding" panose="020B0609020101020101" pitchFamily="49" charset="-127"/>
-              </a:rPr>
-              <a:t>app</a:t>
-            </a:r>
-            <a:r>
-              <a:rPr lang="ko-KR" altLang="en-US" sz="1600" dirty="0">
-                <a:latin typeface="D2Coding" panose="020B0609020101020101" pitchFamily="49" charset="-127"/>
-                <a:ea typeface="D2Coding" panose="020B0609020101020101" pitchFamily="49" charset="-127"/>
-              </a:rPr>
-              <a:t> = </a:t>
-            </a:r>
-            <a:r>
-              <a:rPr lang="en-US" altLang="ko-KR" sz="1600" dirty="0">
-                <a:latin typeface="D2Coding" panose="020B0609020101020101" pitchFamily="49" charset="-127"/>
-                <a:ea typeface="D2Coding" panose="020B0609020101020101" pitchFamily="49" charset="-127"/>
-              </a:rPr>
-              <a:t>workflow</a:t>
-            </a:r>
-            <a:r>
-              <a:rPr lang="ko-KR" altLang="en-US" sz="1600" dirty="0">
-                <a:latin typeface="D2Coding" panose="020B0609020101020101" pitchFamily="49" charset="-127"/>
-                <a:ea typeface="D2Coding" panose="020B0609020101020101" pitchFamily="49" charset="-127"/>
-              </a:rPr>
-              <a:t>.</a:t>
-            </a:r>
-            <a:r>
-              <a:rPr lang="ko-KR" altLang="en-US" sz="1600" dirty="0" err="1">
-                <a:latin typeface="D2Coding" panose="020B0609020101020101" pitchFamily="49" charset="-127"/>
-                <a:ea typeface="D2Coding" panose="020B0609020101020101" pitchFamily="49" charset="-127"/>
-              </a:rPr>
-              <a:t>compile</a:t>
-            </a:r>
-            <a:r>
-              <a:rPr lang="ko-KR" altLang="en-US" sz="1600" dirty="0">
-                <a:latin typeface="D2Coding" panose="020B0609020101020101" pitchFamily="49" charset="-127"/>
-                <a:ea typeface="D2Coding" panose="020B0609020101020101" pitchFamily="49" charset="-127"/>
-              </a:rPr>
-              <a:t>()</a:t>
-            </a:r>
-          </a:p>
-          <a:p>
-            <a:r>
-              <a:rPr lang="ko-KR" altLang="en-US" sz="1600" dirty="0" err="1">
-                <a:latin typeface="D2Coding" panose="020B0609020101020101" pitchFamily="49" charset="-127"/>
-                <a:ea typeface="D2Coding" panose="020B0609020101020101" pitchFamily="49" charset="-127"/>
-              </a:rPr>
-              <a:t>input_data</a:t>
-            </a:r>
-            <a:r>
-              <a:rPr lang="ko-KR" altLang="en-US" sz="1600" dirty="0">
-                <a:latin typeface="D2Coding" panose="020B0609020101020101" pitchFamily="49" charset="-127"/>
-                <a:ea typeface="D2Coding" panose="020B0609020101020101" pitchFamily="49" charset="-127"/>
-              </a:rPr>
-              <a:t> = {"</a:t>
-            </a:r>
-            <a:r>
-              <a:rPr lang="ko-KR" altLang="en-US" sz="1600" dirty="0" err="1">
-                <a:latin typeface="D2Coding" panose="020B0609020101020101" pitchFamily="49" charset="-127"/>
-                <a:ea typeface="D2Coding" panose="020B0609020101020101" pitchFamily="49" charset="-127"/>
-              </a:rPr>
-              <a:t>messages</a:t>
-            </a:r>
-            <a:r>
-              <a:rPr lang="ko-KR" altLang="en-US" sz="1600" dirty="0">
-                <a:latin typeface="D2Coding" panose="020B0609020101020101" pitchFamily="49" charset="-127"/>
-                <a:ea typeface="D2Coding" panose="020B0609020101020101" pitchFamily="49" charset="-127"/>
-              </a:rPr>
-              <a:t>": [</a:t>
-            </a:r>
-            <a:r>
-              <a:rPr lang="ko-KR" altLang="en-US" sz="1600" dirty="0" err="1">
-                <a:latin typeface="D2Coding" panose="020B0609020101020101" pitchFamily="49" charset="-127"/>
-                <a:ea typeface="D2Coding" panose="020B0609020101020101" pitchFamily="49" charset="-127"/>
-              </a:rPr>
-              <a:t>HumanMessage</a:t>
-            </a:r>
-            <a:r>
-              <a:rPr lang="ko-KR" altLang="en-US" sz="1600" dirty="0">
-                <a:latin typeface="D2Coding" panose="020B0609020101020101" pitchFamily="49" charset="-127"/>
-                <a:ea typeface="D2Coding" panose="020B0609020101020101" pitchFamily="49" charset="-127"/>
-              </a:rPr>
-              <a:t>("</a:t>
-            </a:r>
-            <a:r>
-              <a:rPr lang="ko-KR" altLang="en-US" sz="1600" dirty="0" err="1">
-                <a:latin typeface="D2Coding" panose="020B0609020101020101" pitchFamily="49" charset="-127"/>
-                <a:ea typeface="D2Coding" panose="020B0609020101020101" pitchFamily="49" charset="-127"/>
-              </a:rPr>
-              <a:t>hi</a:t>
-            </a:r>
-            <a:r>
-              <a:rPr lang="ko-KR" altLang="en-US" sz="1600" dirty="0">
-                <a:latin typeface="D2Coding" panose="020B0609020101020101" pitchFamily="49" charset="-127"/>
-                <a:ea typeface="D2Coding" panose="020B0609020101020101" pitchFamily="49" charset="-127"/>
-              </a:rPr>
-              <a:t>!")]}</a:t>
-            </a:r>
-            <a:endParaRPr lang="en-US" altLang="ko-KR" sz="1600" dirty="0">
+              <a:rPr lang="en-US" altLang="ko-KR" sz="1400" dirty="0">
+                <a:latin typeface="D2Coding" panose="020B0609020101020101" pitchFamily="49" charset="-127"/>
+                <a:ea typeface="D2Coding" panose="020B0609020101020101" pitchFamily="49" charset="-127"/>
+              </a:rPr>
+              <a:t># 4. </a:t>
+            </a:r>
+            <a:r>
+              <a:rPr lang="ko-KR" altLang="en-US" sz="1400" dirty="0">
+                <a:latin typeface="D2Coding" panose="020B0609020101020101" pitchFamily="49" charset="-127"/>
+                <a:ea typeface="D2Coding" panose="020B0609020101020101" pitchFamily="49" charset="-127"/>
+              </a:rPr>
+              <a:t>노드</a:t>
+            </a:r>
+            <a:r>
+              <a:rPr lang="en-US" altLang="ko-KR" sz="1400" dirty="0">
+                <a:latin typeface="D2Coding" panose="020B0609020101020101" pitchFamily="49" charset="-127"/>
+                <a:ea typeface="D2Coding" panose="020B0609020101020101" pitchFamily="49" charset="-127"/>
+              </a:rPr>
+              <a:t>/</a:t>
+            </a:r>
+            <a:r>
+              <a:rPr lang="ko-KR" altLang="en-US" sz="1400" dirty="0" err="1">
+                <a:latin typeface="D2Coding" panose="020B0609020101020101" pitchFamily="49" charset="-127"/>
+                <a:ea typeface="D2Coding" panose="020B0609020101020101" pitchFamily="49" charset="-127"/>
+              </a:rPr>
+              <a:t>엣지</a:t>
+            </a:r>
+            <a:r>
+              <a:rPr lang="ko-KR" altLang="en-US" sz="1400" dirty="0">
+                <a:latin typeface="D2Coding" panose="020B0609020101020101" pitchFamily="49" charset="-127"/>
+                <a:ea typeface="D2Coding" panose="020B0609020101020101" pitchFamily="49" charset="-127"/>
+              </a:rPr>
+              <a:t> 연결</a:t>
+            </a:r>
+            <a:endParaRPr lang="en-US" altLang="ko-KR" sz="1400" dirty="0">
               <a:latin typeface="D2Coding" panose="020B0609020101020101" pitchFamily="49" charset="-127"/>
               <a:ea typeface="D2Coding" panose="020B0609020101020101" pitchFamily="49" charset="-127"/>
             </a:endParaRPr>
           </a:p>
           <a:p>
             <a:r>
-              <a:rPr lang="en-US" altLang="ko-KR" sz="1600" dirty="0">
+              <a:rPr lang="en-US" altLang="ko-KR" sz="1400" dirty="0">
+                <a:latin typeface="D2Coding" panose="020B0609020101020101" pitchFamily="49" charset="-127"/>
+                <a:ea typeface="D2Coding" panose="020B0609020101020101" pitchFamily="49" charset="-127"/>
+              </a:rPr>
+              <a:t>workflow</a:t>
+            </a:r>
+            <a:r>
+              <a:rPr lang="ko-KR" altLang="en-US" sz="1400" dirty="0">
+                <a:latin typeface="D2Coding" panose="020B0609020101020101" pitchFamily="49" charset="-127"/>
+                <a:ea typeface="D2Coding" panose="020B0609020101020101" pitchFamily="49" charset="-127"/>
+              </a:rPr>
+              <a:t>.</a:t>
+            </a:r>
+            <a:r>
+              <a:rPr lang="ko-KR" altLang="en-US" sz="1400" dirty="0" err="1">
+                <a:latin typeface="D2Coding" panose="020B0609020101020101" pitchFamily="49" charset="-127"/>
+                <a:ea typeface="D2Coding" panose="020B0609020101020101" pitchFamily="49" charset="-127"/>
+              </a:rPr>
+              <a:t>add_node</a:t>
+            </a:r>
+            <a:r>
+              <a:rPr lang="ko-KR" altLang="en-US" sz="1400" dirty="0">
+                <a:latin typeface="D2Coding" panose="020B0609020101020101" pitchFamily="49" charset="-127"/>
+                <a:ea typeface="D2Coding" panose="020B0609020101020101" pitchFamily="49" charset="-127"/>
+              </a:rPr>
+              <a:t>("</a:t>
+            </a:r>
+            <a:r>
+              <a:rPr lang="ko-KR" altLang="en-US" sz="1400" dirty="0" err="1">
+                <a:latin typeface="D2Coding" panose="020B0609020101020101" pitchFamily="49" charset="-127"/>
+                <a:ea typeface="D2Coding" panose="020B0609020101020101" pitchFamily="49" charset="-127"/>
+              </a:rPr>
+              <a:t>chatbot</a:t>
+            </a:r>
+            <a:r>
+              <a:rPr lang="ko-KR" altLang="en-US" sz="1400" dirty="0">
+                <a:latin typeface="D2Coding" panose="020B0609020101020101" pitchFamily="49" charset="-127"/>
+                <a:ea typeface="D2Coding" panose="020B0609020101020101" pitchFamily="49" charset="-127"/>
+              </a:rPr>
+              <a:t>", </a:t>
+            </a:r>
+            <a:r>
+              <a:rPr lang="ko-KR" altLang="en-US" sz="1400" b="1" dirty="0" err="1">
+                <a:solidFill>
+                  <a:srgbClr val="00B050"/>
+                </a:solidFill>
+                <a:latin typeface="D2Coding" panose="020B0609020101020101" pitchFamily="49" charset="-127"/>
+                <a:ea typeface="D2Coding" panose="020B0609020101020101" pitchFamily="49" charset="-127"/>
+              </a:rPr>
+              <a:t>chatbot</a:t>
+            </a:r>
+            <a:r>
+              <a:rPr lang="ko-KR" altLang="en-US" sz="1400" dirty="0">
+                <a:latin typeface="D2Coding" panose="020B0609020101020101" pitchFamily="49" charset="-127"/>
+                <a:ea typeface="D2Coding" panose="020B0609020101020101" pitchFamily="49" charset="-127"/>
+              </a:rPr>
+              <a:t>)</a:t>
+            </a:r>
+          </a:p>
+          <a:p>
+            <a:r>
+              <a:rPr lang="en-US" altLang="ko-KR" sz="1400" dirty="0">
+                <a:latin typeface="D2Coding" panose="020B0609020101020101" pitchFamily="49" charset="-127"/>
+                <a:ea typeface="D2Coding" panose="020B0609020101020101" pitchFamily="49" charset="-127"/>
+              </a:rPr>
+              <a:t>workflow</a:t>
+            </a:r>
+            <a:r>
+              <a:rPr lang="ko-KR" altLang="en-US" sz="1400" dirty="0">
+                <a:latin typeface="D2Coding" panose="020B0609020101020101" pitchFamily="49" charset="-127"/>
+                <a:ea typeface="D2Coding" panose="020B0609020101020101" pitchFamily="49" charset="-127"/>
+              </a:rPr>
+              <a:t>.</a:t>
+            </a:r>
+            <a:r>
+              <a:rPr lang="ko-KR" altLang="en-US" sz="1400" dirty="0" err="1">
+                <a:latin typeface="D2Coding" panose="020B0609020101020101" pitchFamily="49" charset="-127"/>
+                <a:ea typeface="D2Coding" panose="020B0609020101020101" pitchFamily="49" charset="-127"/>
+              </a:rPr>
+              <a:t>add_edge</a:t>
+            </a:r>
+            <a:r>
+              <a:rPr lang="ko-KR" altLang="en-US" sz="1400" dirty="0">
+                <a:latin typeface="D2Coding" panose="020B0609020101020101" pitchFamily="49" charset="-127"/>
+                <a:ea typeface="D2Coding" panose="020B0609020101020101" pitchFamily="49" charset="-127"/>
+              </a:rPr>
+              <a:t>(START, "</a:t>
+            </a:r>
+            <a:r>
+              <a:rPr lang="ko-KR" altLang="en-US" sz="1400" dirty="0" err="1">
+                <a:latin typeface="D2Coding" panose="020B0609020101020101" pitchFamily="49" charset="-127"/>
+                <a:ea typeface="D2Coding" panose="020B0609020101020101" pitchFamily="49" charset="-127"/>
+              </a:rPr>
+              <a:t>chatbot</a:t>
+            </a:r>
+            <a:r>
+              <a:rPr lang="ko-KR" altLang="en-US" sz="1400" dirty="0">
+                <a:latin typeface="D2Coding" panose="020B0609020101020101" pitchFamily="49" charset="-127"/>
+                <a:ea typeface="D2Coding" panose="020B0609020101020101" pitchFamily="49" charset="-127"/>
+              </a:rPr>
+              <a:t>")</a:t>
+            </a:r>
+          </a:p>
+          <a:p>
+            <a:r>
+              <a:rPr lang="en-US" altLang="ko-KR" sz="1400" dirty="0">
+                <a:latin typeface="D2Coding" panose="020B0609020101020101" pitchFamily="49" charset="-127"/>
+                <a:ea typeface="D2Coding" panose="020B0609020101020101" pitchFamily="49" charset="-127"/>
+              </a:rPr>
+              <a:t>workflow</a:t>
+            </a:r>
+            <a:r>
+              <a:rPr lang="ko-KR" altLang="en-US" sz="1400" dirty="0">
+                <a:latin typeface="D2Coding" panose="020B0609020101020101" pitchFamily="49" charset="-127"/>
+                <a:ea typeface="D2Coding" panose="020B0609020101020101" pitchFamily="49" charset="-127"/>
+              </a:rPr>
+              <a:t>.</a:t>
+            </a:r>
+            <a:r>
+              <a:rPr lang="ko-KR" altLang="en-US" sz="1400" dirty="0" err="1">
+                <a:latin typeface="D2Coding" panose="020B0609020101020101" pitchFamily="49" charset="-127"/>
+                <a:ea typeface="D2Coding" panose="020B0609020101020101" pitchFamily="49" charset="-127"/>
+              </a:rPr>
+              <a:t>add_edge</a:t>
+            </a:r>
+            <a:r>
+              <a:rPr lang="ko-KR" altLang="en-US" sz="1400" dirty="0">
+                <a:latin typeface="D2Coding" panose="020B0609020101020101" pitchFamily="49" charset="-127"/>
+                <a:ea typeface="D2Coding" panose="020B0609020101020101" pitchFamily="49" charset="-127"/>
+              </a:rPr>
+              <a:t>("</a:t>
+            </a:r>
+            <a:r>
+              <a:rPr lang="ko-KR" altLang="en-US" sz="1400" dirty="0" err="1">
+                <a:latin typeface="D2Coding" panose="020B0609020101020101" pitchFamily="49" charset="-127"/>
+                <a:ea typeface="D2Coding" panose="020B0609020101020101" pitchFamily="49" charset="-127"/>
+              </a:rPr>
+              <a:t>chatbot</a:t>
+            </a:r>
+            <a:r>
+              <a:rPr lang="ko-KR" altLang="en-US" sz="1400" dirty="0">
+                <a:latin typeface="D2Coding" panose="020B0609020101020101" pitchFamily="49" charset="-127"/>
+                <a:ea typeface="D2Coding" panose="020B0609020101020101" pitchFamily="49" charset="-127"/>
+              </a:rPr>
+              <a:t>", END)</a:t>
+            </a:r>
+          </a:p>
+          <a:p>
+            <a:endParaRPr lang="en-US" altLang="ko-KR" sz="1400" dirty="0">
+              <a:latin typeface="D2Coding" panose="020B0609020101020101" pitchFamily="49" charset="-127"/>
+              <a:ea typeface="D2Coding" panose="020B0609020101020101" pitchFamily="49" charset="-127"/>
+            </a:endParaRPr>
+          </a:p>
+          <a:p>
+            <a:r>
+              <a:rPr lang="en-US" altLang="ko-KR" sz="1400" dirty="0">
+                <a:latin typeface="D2Coding" panose="020B0609020101020101" pitchFamily="49" charset="-127"/>
+                <a:ea typeface="D2Coding" panose="020B0609020101020101" pitchFamily="49" charset="-127"/>
+              </a:rPr>
+              <a:t># 5. </a:t>
+            </a:r>
+            <a:r>
+              <a:rPr lang="ko-KR" altLang="en-US" sz="1400" dirty="0">
+                <a:latin typeface="D2Coding" panose="020B0609020101020101" pitchFamily="49" charset="-127"/>
+                <a:ea typeface="D2Coding" panose="020B0609020101020101" pitchFamily="49" charset="-127"/>
+              </a:rPr>
+              <a:t>컴파일 </a:t>
+            </a:r>
+            <a:r>
+              <a:rPr lang="en-US" altLang="ko-KR" sz="1400" dirty="0">
+                <a:latin typeface="D2Coding" panose="020B0609020101020101" pitchFamily="49" charset="-127"/>
+                <a:ea typeface="D2Coding" panose="020B0609020101020101" pitchFamily="49" charset="-127"/>
+              </a:rPr>
+              <a:t>&amp; </a:t>
+            </a:r>
+            <a:r>
+              <a:rPr lang="ko-KR" altLang="en-US" sz="1400" dirty="0">
+                <a:latin typeface="D2Coding" panose="020B0609020101020101" pitchFamily="49" charset="-127"/>
+                <a:ea typeface="D2Coding" panose="020B0609020101020101" pitchFamily="49" charset="-127"/>
+              </a:rPr>
+              <a:t>실행</a:t>
+            </a:r>
+            <a:endParaRPr lang="en-US" altLang="ko-KR" sz="1400" dirty="0">
+              <a:latin typeface="D2Coding" panose="020B0609020101020101" pitchFamily="49" charset="-127"/>
+              <a:ea typeface="D2Coding" panose="020B0609020101020101" pitchFamily="49" charset="-127"/>
+            </a:endParaRPr>
+          </a:p>
+          <a:p>
+            <a:r>
+              <a:rPr lang="en-US" altLang="ko-KR" sz="1400" dirty="0">
+                <a:latin typeface="D2Coding" panose="020B0609020101020101" pitchFamily="49" charset="-127"/>
+                <a:ea typeface="D2Coding" panose="020B0609020101020101" pitchFamily="49" charset="-127"/>
+              </a:rPr>
+              <a:t>app</a:t>
+            </a:r>
+            <a:r>
+              <a:rPr lang="ko-KR" altLang="en-US" sz="1400" dirty="0">
+                <a:latin typeface="D2Coding" panose="020B0609020101020101" pitchFamily="49" charset="-127"/>
+                <a:ea typeface="D2Coding" panose="020B0609020101020101" pitchFamily="49" charset="-127"/>
+              </a:rPr>
+              <a:t> = </a:t>
+            </a:r>
+            <a:r>
+              <a:rPr lang="en-US" altLang="ko-KR" sz="1400" dirty="0">
+                <a:latin typeface="D2Coding" panose="020B0609020101020101" pitchFamily="49" charset="-127"/>
+                <a:ea typeface="D2Coding" panose="020B0609020101020101" pitchFamily="49" charset="-127"/>
+              </a:rPr>
+              <a:t>workflow</a:t>
+            </a:r>
+            <a:r>
+              <a:rPr lang="ko-KR" altLang="en-US" sz="1400" dirty="0">
+                <a:latin typeface="D2Coding" panose="020B0609020101020101" pitchFamily="49" charset="-127"/>
+                <a:ea typeface="D2Coding" panose="020B0609020101020101" pitchFamily="49" charset="-127"/>
+              </a:rPr>
+              <a:t>.</a:t>
+            </a:r>
+            <a:r>
+              <a:rPr lang="ko-KR" altLang="en-US" sz="1400" dirty="0" err="1">
+                <a:latin typeface="D2Coding" panose="020B0609020101020101" pitchFamily="49" charset="-127"/>
+                <a:ea typeface="D2Coding" panose="020B0609020101020101" pitchFamily="49" charset="-127"/>
+              </a:rPr>
+              <a:t>compile</a:t>
+            </a:r>
+            <a:r>
+              <a:rPr lang="ko-KR" altLang="en-US" sz="1400" dirty="0">
+                <a:latin typeface="D2Coding" panose="020B0609020101020101" pitchFamily="49" charset="-127"/>
+                <a:ea typeface="D2Coding" panose="020B0609020101020101" pitchFamily="49" charset="-127"/>
+              </a:rPr>
+              <a:t>()</a:t>
+            </a:r>
+          </a:p>
+          <a:p>
+            <a:r>
+              <a:rPr lang="ko-KR" altLang="en-US" sz="1400" dirty="0" err="1">
+                <a:latin typeface="D2Coding" panose="020B0609020101020101" pitchFamily="49" charset="-127"/>
+                <a:ea typeface="D2Coding" panose="020B0609020101020101" pitchFamily="49" charset="-127"/>
+              </a:rPr>
+              <a:t>input_data</a:t>
+            </a:r>
+            <a:r>
+              <a:rPr lang="ko-KR" altLang="en-US" sz="1400" dirty="0">
+                <a:latin typeface="D2Coding" panose="020B0609020101020101" pitchFamily="49" charset="-127"/>
+                <a:ea typeface="D2Coding" panose="020B0609020101020101" pitchFamily="49" charset="-127"/>
+              </a:rPr>
+              <a:t> = {"</a:t>
+            </a:r>
+            <a:r>
+              <a:rPr lang="ko-KR" altLang="en-US" sz="1400" dirty="0" err="1">
+                <a:latin typeface="D2Coding" panose="020B0609020101020101" pitchFamily="49" charset="-127"/>
+                <a:ea typeface="D2Coding" panose="020B0609020101020101" pitchFamily="49" charset="-127"/>
+              </a:rPr>
+              <a:t>messages</a:t>
+            </a:r>
+            <a:r>
+              <a:rPr lang="ko-KR" altLang="en-US" sz="1400" dirty="0">
+                <a:latin typeface="D2Coding" panose="020B0609020101020101" pitchFamily="49" charset="-127"/>
+                <a:ea typeface="D2Coding" panose="020B0609020101020101" pitchFamily="49" charset="-127"/>
+              </a:rPr>
+              <a:t>": [</a:t>
+            </a:r>
+            <a:r>
+              <a:rPr lang="ko-KR" altLang="en-US" sz="1400" dirty="0" err="1">
+                <a:latin typeface="D2Coding" panose="020B0609020101020101" pitchFamily="49" charset="-127"/>
+                <a:ea typeface="D2Coding" panose="020B0609020101020101" pitchFamily="49" charset="-127"/>
+              </a:rPr>
+              <a:t>HumanMessage</a:t>
+            </a:r>
+            <a:r>
+              <a:rPr lang="ko-KR" altLang="en-US" sz="1400" dirty="0">
+                <a:latin typeface="D2Coding" panose="020B0609020101020101" pitchFamily="49" charset="-127"/>
+                <a:ea typeface="D2Coding" panose="020B0609020101020101" pitchFamily="49" charset="-127"/>
+              </a:rPr>
+              <a:t>("</a:t>
+            </a:r>
+            <a:r>
+              <a:rPr lang="ko-KR" altLang="en-US" sz="1400" dirty="0" err="1">
+                <a:latin typeface="D2Coding" panose="020B0609020101020101" pitchFamily="49" charset="-127"/>
+                <a:ea typeface="D2Coding" panose="020B0609020101020101" pitchFamily="49" charset="-127"/>
+              </a:rPr>
+              <a:t>hi</a:t>
+            </a:r>
+            <a:r>
+              <a:rPr lang="ko-KR" altLang="en-US" sz="1400" dirty="0">
+                <a:latin typeface="D2Coding" panose="020B0609020101020101" pitchFamily="49" charset="-127"/>
+                <a:ea typeface="D2Coding" panose="020B0609020101020101" pitchFamily="49" charset="-127"/>
+              </a:rPr>
+              <a:t>!")]}</a:t>
+            </a:r>
+            <a:endParaRPr lang="en-US" altLang="ko-KR" sz="1400" dirty="0">
+              <a:latin typeface="D2Coding" panose="020B0609020101020101" pitchFamily="49" charset="-127"/>
+              <a:ea typeface="D2Coding" panose="020B0609020101020101" pitchFamily="49" charset="-127"/>
+            </a:endParaRPr>
+          </a:p>
+          <a:p>
+            <a:r>
+              <a:rPr lang="en-US" altLang="ko-KR" sz="1400" dirty="0">
                 <a:latin typeface="D2Coding" panose="020B0609020101020101" pitchFamily="49" charset="-127"/>
                 <a:ea typeface="D2Coding" panose="020B0609020101020101" pitchFamily="49" charset="-127"/>
               </a:rPr>
               <a:t>for chunk in </a:t>
             </a:r>
             <a:r>
-              <a:rPr lang="en-US" altLang="ko-KR" sz="1600" dirty="0" err="1">
+              <a:rPr lang="en-US" altLang="ko-KR" sz="1400" dirty="0" err="1">
                 <a:latin typeface="D2Coding" panose="020B0609020101020101" pitchFamily="49" charset="-127"/>
                 <a:ea typeface="D2Coding" panose="020B0609020101020101" pitchFamily="49" charset="-127"/>
               </a:rPr>
               <a:t>app.stream</a:t>
             </a:r>
             <a:r>
-              <a:rPr lang="en-US" altLang="ko-KR" sz="1600" dirty="0">
+              <a:rPr lang="en-US" altLang="ko-KR" sz="1400" dirty="0">
                 <a:latin typeface="D2Coding" panose="020B0609020101020101" pitchFamily="49" charset="-127"/>
                 <a:ea typeface="D2Coding" panose="020B0609020101020101" pitchFamily="49" charset="-127"/>
               </a:rPr>
               <a:t>(</a:t>
             </a:r>
             <a:r>
-              <a:rPr lang="en-US" altLang="ko-KR" sz="1600" dirty="0" err="1">
+              <a:rPr lang="en-US" altLang="ko-KR" sz="1400" dirty="0" err="1">
                 <a:latin typeface="D2Coding" panose="020B0609020101020101" pitchFamily="49" charset="-127"/>
                 <a:ea typeface="D2Coding" panose="020B0609020101020101" pitchFamily="49" charset="-127"/>
               </a:rPr>
               <a:t>input_data</a:t>
             </a:r>
             <a:r>
-              <a:rPr lang="en-US" altLang="ko-KR" sz="1600" dirty="0">
+              <a:rPr lang="en-US" altLang="ko-KR" sz="1400" dirty="0">
                 <a:latin typeface="D2Coding" panose="020B0609020101020101" pitchFamily="49" charset="-127"/>
                 <a:ea typeface="D2Coding" panose="020B0609020101020101" pitchFamily="49" charset="-127"/>
               </a:rPr>
@@ -3970,7 +4167,7 @@
           </a:p>
           <a:p>
             <a:r>
-              <a:rPr lang="en-US" altLang="ko-KR" sz="1600" dirty="0">
+              <a:rPr lang="en-US" altLang="ko-KR" sz="1400" dirty="0">
                 <a:latin typeface="D2Coding" panose="020B0609020101020101" pitchFamily="49" charset="-127"/>
                 <a:ea typeface="D2Coding" panose="020B0609020101020101" pitchFamily="49" charset="-127"/>
               </a:rPr>
@@ -4091,6 +4288,273 @@
               <a:latin typeface="D2Coding" panose="020B0609020101020101" pitchFamily="49" charset="-127"/>
               <a:ea typeface="D2Coding" panose="020B0609020101020101" pitchFamily="49" charset="-127"/>
             </a:endParaRPr>
+          </a:p>
+        </p:txBody>
+      </p:sp>
+      <p:sp>
+        <p:nvSpPr>
+          <p:cNvPr id="4" name="직사각형 3">
+            <a:extLst>
+              <a:ext uri="{FF2B5EF4-FFF2-40B4-BE49-F238E27FC236}">
+                <a16:creationId xmlns:a16="http://schemas.microsoft.com/office/drawing/2014/main" id="{827FD638-5BBA-56E0-6F96-AEE813CC1713}"/>
+              </a:ext>
+            </a:extLst>
+          </p:cNvPr>
+          <p:cNvSpPr/>
+          <p:nvPr/>
+        </p:nvSpPr>
+        <p:spPr>
+          <a:xfrm>
+            <a:off x="389920" y="4190803"/>
+            <a:ext cx="3801080" cy="1051279"/>
+          </a:xfrm>
+          <a:prstGeom prst="rect">
+            <a:avLst/>
+          </a:prstGeom>
+          <a:noFill/>
+          <a:ln w="19050">
+            <a:solidFill>
+              <a:schemeClr val="tx1">
+                <a:lumMod val="50000"/>
+                <a:lumOff val="50000"/>
+              </a:schemeClr>
+            </a:solidFill>
+          </a:ln>
+        </p:spPr>
+        <p:style>
+          <a:lnRef idx="2">
+            <a:schemeClr val="accent1">
+              <a:shade val="15000"/>
+            </a:schemeClr>
+          </a:lnRef>
+          <a:fillRef idx="1">
+            <a:schemeClr val="accent1"/>
+          </a:fillRef>
+          <a:effectRef idx="0">
+            <a:schemeClr val="accent1"/>
+          </a:effectRef>
+          <a:fontRef idx="minor">
+            <a:schemeClr val="lt1"/>
+          </a:fontRef>
+        </p:style>
+        <p:txBody>
+          <a:bodyPr rtlCol="0" anchor="ctr"/>
+          <a:lstStyle/>
+          <a:p>
+            <a:pPr algn="ctr"/>
+            <a:endParaRPr lang="ko-KR" altLang="en-US" dirty="0"/>
+          </a:p>
+        </p:txBody>
+      </p:sp>
+      <p:sp>
+        <p:nvSpPr>
+          <p:cNvPr id="5" name="직사각형 4">
+            <a:extLst>
+              <a:ext uri="{FF2B5EF4-FFF2-40B4-BE49-F238E27FC236}">
+                <a16:creationId xmlns:a16="http://schemas.microsoft.com/office/drawing/2014/main" id="{A6F12B43-BB66-5D42-1DA3-7F9E5D28D5DF}"/>
+              </a:ext>
+            </a:extLst>
+          </p:cNvPr>
+          <p:cNvSpPr/>
+          <p:nvPr/>
+        </p:nvSpPr>
+        <p:spPr>
+          <a:xfrm>
+            <a:off x="6461942" y="2903360"/>
+            <a:ext cx="4910907" cy="2721409"/>
+          </a:xfrm>
+          <a:prstGeom prst="rect">
+            <a:avLst/>
+          </a:prstGeom>
+          <a:noFill/>
+          <a:ln w="19050">
+            <a:solidFill>
+              <a:schemeClr val="tx1">
+                <a:lumMod val="50000"/>
+                <a:lumOff val="50000"/>
+              </a:schemeClr>
+            </a:solidFill>
+          </a:ln>
+        </p:spPr>
+        <p:style>
+          <a:lnRef idx="2">
+            <a:schemeClr val="accent1">
+              <a:shade val="15000"/>
+            </a:schemeClr>
+          </a:lnRef>
+          <a:fillRef idx="1">
+            <a:schemeClr val="accent1"/>
+          </a:fillRef>
+          <a:effectRef idx="0">
+            <a:schemeClr val="accent1"/>
+          </a:effectRef>
+          <a:fontRef idx="minor">
+            <a:schemeClr val="lt1"/>
+          </a:fontRef>
+        </p:style>
+        <p:txBody>
+          <a:bodyPr rtlCol="0" anchor="ctr"/>
+          <a:lstStyle/>
+          <a:p>
+            <a:pPr algn="ctr"/>
+            <a:endParaRPr lang="ko-KR" altLang="en-US" dirty="0"/>
+          </a:p>
+        </p:txBody>
+      </p:sp>
+      <p:cxnSp>
+        <p:nvCxnSpPr>
+          <p:cNvPr id="7" name="연결선: 꺾임 6">
+            <a:extLst>
+              <a:ext uri="{FF2B5EF4-FFF2-40B4-BE49-F238E27FC236}">
+                <a16:creationId xmlns:a16="http://schemas.microsoft.com/office/drawing/2014/main" id="{8B864F46-DD58-EDD8-F43E-F1E60263F938}"/>
+              </a:ext>
+            </a:extLst>
+          </p:cNvPr>
+          <p:cNvCxnSpPr>
+            <a:endCxn id="5" idx="1"/>
+          </p:cNvCxnSpPr>
+          <p:nvPr/>
+        </p:nvCxnSpPr>
+        <p:spPr>
+          <a:xfrm flipV="1">
+            <a:off x="4276725" y="4264065"/>
+            <a:ext cx="2185217" cy="393660"/>
+          </a:xfrm>
+          <a:prstGeom prst="bentConnector3">
+            <a:avLst/>
+          </a:prstGeom>
+          <a:ln w="19050">
+            <a:solidFill>
+              <a:schemeClr val="tx1">
+                <a:lumMod val="50000"/>
+                <a:lumOff val="50000"/>
+              </a:schemeClr>
+            </a:solidFill>
+            <a:tailEnd type="triangle"/>
+          </a:ln>
+        </p:spPr>
+        <p:style>
+          <a:lnRef idx="1">
+            <a:schemeClr val="dk1"/>
+          </a:lnRef>
+          <a:fillRef idx="0">
+            <a:schemeClr val="dk1"/>
+          </a:fillRef>
+          <a:effectRef idx="0">
+            <a:schemeClr val="dk1"/>
+          </a:effectRef>
+          <a:fontRef idx="minor">
+            <a:schemeClr val="tx1"/>
+          </a:fontRef>
+        </p:style>
+      </p:cxnSp>
+      <p:sp>
+        <p:nvSpPr>
+          <p:cNvPr id="8" name="직사각형 7">
+            <a:extLst>
+              <a:ext uri="{FF2B5EF4-FFF2-40B4-BE49-F238E27FC236}">
+                <a16:creationId xmlns:a16="http://schemas.microsoft.com/office/drawing/2014/main" id="{8BEA670A-0E13-C261-DA06-C297D3E0BF51}"/>
+              </a:ext>
+            </a:extLst>
+          </p:cNvPr>
+          <p:cNvSpPr/>
+          <p:nvPr/>
+        </p:nvSpPr>
+        <p:spPr>
+          <a:xfrm>
+            <a:off x="389920" y="2329542"/>
+            <a:ext cx="3801080" cy="232683"/>
+          </a:xfrm>
+          <a:prstGeom prst="rect">
+            <a:avLst/>
+          </a:prstGeom>
+          <a:noFill/>
+          <a:ln w="19050">
+            <a:solidFill>
+              <a:schemeClr val="tx1">
+                <a:lumMod val="50000"/>
+                <a:lumOff val="50000"/>
+              </a:schemeClr>
+            </a:solidFill>
+          </a:ln>
+        </p:spPr>
+        <p:style>
+          <a:lnRef idx="2">
+            <a:schemeClr val="accent1">
+              <a:shade val="15000"/>
+            </a:schemeClr>
+          </a:lnRef>
+          <a:fillRef idx="1">
+            <a:schemeClr val="accent1"/>
+          </a:fillRef>
+          <a:effectRef idx="0">
+            <a:schemeClr val="accent1"/>
+          </a:effectRef>
+          <a:fontRef idx="minor">
+            <a:schemeClr val="lt1"/>
+          </a:fontRef>
+        </p:style>
+        <p:txBody>
+          <a:bodyPr rtlCol="0" anchor="ctr"/>
+          <a:lstStyle/>
+          <a:p>
+            <a:pPr algn="ctr"/>
+            <a:endParaRPr lang="ko-KR" altLang="en-US" dirty="0"/>
+          </a:p>
+        </p:txBody>
+      </p:sp>
+      <p:sp>
+        <p:nvSpPr>
+          <p:cNvPr id="9" name="직사각형 8">
+            <a:extLst>
+              <a:ext uri="{FF2B5EF4-FFF2-40B4-BE49-F238E27FC236}">
+                <a16:creationId xmlns:a16="http://schemas.microsoft.com/office/drawing/2014/main" id="{09F48886-19D4-92E9-43B0-BB366B0076B9}"/>
+              </a:ext>
+            </a:extLst>
+          </p:cNvPr>
+          <p:cNvSpPr/>
+          <p:nvPr/>
+        </p:nvSpPr>
+        <p:spPr>
+          <a:xfrm>
+            <a:off x="389920" y="5520121"/>
+            <a:ext cx="3801080" cy="232683"/>
+          </a:xfrm>
+          <a:prstGeom prst="rect">
+            <a:avLst/>
+          </a:prstGeom>
+          <a:noFill/>
+          <a:ln w="19050">
+            <a:solidFill>
+              <a:schemeClr val="tx1">
+                <a:lumMod val="50000"/>
+                <a:lumOff val="50000"/>
+              </a:schemeClr>
+            </a:solidFill>
+          </a:ln>
+        </p:spPr>
+        <p:style>
+          <a:lnRef idx="2">
+            <a:schemeClr val="accent1">
+              <a:shade val="15000"/>
+            </a:schemeClr>
+          </a:lnRef>
+          <a:fillRef idx="1">
+            <a:schemeClr val="accent1"/>
+          </a:fillRef>
+          <a:effectRef idx="0">
+            <a:schemeClr val="accent1"/>
+          </a:effectRef>
+          <a:fontRef idx="minor">
+            <a:schemeClr val="lt1"/>
+          </a:fontRef>
+        </p:style>
+        <p:txBody>
+          <a:bodyPr rtlCol="0" anchor="ctr"/>
+          <a:lstStyle/>
+          <a:p>
+            <a:pPr algn="ctr"/>
+            <a:endParaRPr lang="ko-KR" altLang="en-US" dirty="0"/>
           </a:p>
         </p:txBody>
       </p:sp>
@@ -4557,17 +5021,14 @@
         </p:nvSpPr>
         <p:spPr>
           <a:xfrm>
-            <a:off x="1438274" y="3055826"/>
+            <a:off x="1438274" y="3046301"/>
             <a:ext cx="7153275" cy="338554"/>
           </a:xfrm>
           <a:prstGeom prst="rect">
             <a:avLst/>
           </a:prstGeom>
           <a:solidFill>
-            <a:schemeClr val="accent6">
-              <a:lumMod val="20000"/>
-              <a:lumOff val="80000"/>
-            </a:schemeClr>
+            <a:schemeClr val="tx1"/>
           </a:solidFill>
         </p:spPr>
         <p:txBody>
@@ -4579,6 +5040,9 @@
             <a:pPr algn="ctr"/>
             <a:r>
               <a:rPr lang="en-US" altLang="ko-KR" sz="1600" dirty="0" err="1">
+                <a:solidFill>
+                  <a:schemeClr val="bg1"/>
+                </a:solidFill>
                 <a:latin typeface="D2Coding" panose="020B0609020101020101" pitchFamily="49" charset="-127"/>
                 <a:ea typeface="D2Coding" panose="020B0609020101020101" pitchFamily="49" charset="-127"/>
               </a:rPr>
@@ -4586,6 +5050,9 @@
             </a:r>
             <a:r>
               <a:rPr lang="en-US" altLang="ko-KR" sz="1600" dirty="0">
+                <a:solidFill>
+                  <a:schemeClr val="bg1"/>
+                </a:solidFill>
                 <a:latin typeface="D2Coding" panose="020B0609020101020101" pitchFamily="49" charset="-127"/>
                 <a:ea typeface="D2Coding" panose="020B0609020101020101" pitchFamily="49" charset="-127"/>
               </a:rPr>
@@ -4593,6 +5060,9 @@
             </a:r>
             <a:r>
               <a:rPr lang="ko-KR" altLang="en-US" sz="1600" dirty="0">
+                <a:solidFill>
+                  <a:schemeClr val="bg1"/>
+                </a:solidFill>
                 <a:latin typeface="D2Coding" panose="020B0609020101020101" pitchFamily="49" charset="-127"/>
                 <a:ea typeface="D2Coding" panose="020B0609020101020101" pitchFamily="49" charset="-127"/>
               </a:rPr>
@@ -4600,6 +5070,9 @@
             </a:r>
             <a:r>
               <a:rPr lang="en-US" altLang="ko-KR" sz="1600" dirty="0">
+                <a:solidFill>
+                  <a:schemeClr val="bg1"/>
+                </a:solidFill>
                 <a:latin typeface="D2Coding" panose="020B0609020101020101" pitchFamily="49" charset="-127"/>
                 <a:ea typeface="D2Coding" panose="020B0609020101020101" pitchFamily="49" charset="-127"/>
               </a:rPr>
@@ -4607,6 +5080,9 @@
             </a:r>
             <a:r>
               <a:rPr lang="ko-KR" altLang="en-US" sz="1600" dirty="0">
+                <a:solidFill>
+                  <a:schemeClr val="bg1"/>
+                </a:solidFill>
                 <a:latin typeface="D2Coding" panose="020B0609020101020101" pitchFamily="49" charset="-127"/>
                 <a:ea typeface="D2Coding" panose="020B0609020101020101" pitchFamily="49" charset="-127"/>
               </a:rPr>
@@ -4614,6 +5090,9 @@
             </a:r>
             <a:r>
               <a:rPr lang="en-US" altLang="ko-KR" sz="1600" dirty="0">
+                <a:solidFill>
+                  <a:schemeClr val="bg1"/>
+                </a:solidFill>
                 <a:latin typeface="D2Coding" panose="020B0609020101020101" pitchFamily="49" charset="-127"/>
                 <a:ea typeface="D2Coding" panose="020B0609020101020101" pitchFamily="49" charset="-127"/>
               </a:rPr>
@@ -4621,6 +5100,9 @@
             </a:r>
             <a:r>
               <a:rPr lang="ko-KR" altLang="en-US" sz="1600" dirty="0">
+                <a:solidFill>
+                  <a:schemeClr val="bg1"/>
+                </a:solidFill>
                 <a:latin typeface="D2Coding" panose="020B0609020101020101" pitchFamily="49" charset="-127"/>
                 <a:ea typeface="D2Coding" panose="020B0609020101020101" pitchFamily="49" charset="-127"/>
               </a:rPr>
@@ -4854,7 +5336,7 @@
                 <a:latin typeface="D2Coding" panose="020B0609020101020101" pitchFamily="49" charset="-127"/>
                 <a:ea typeface="D2Coding" panose="020B0609020101020101" pitchFamily="49" charset="-127"/>
               </a:rPr>
-              <a:t># 5. Add persistence with </a:t>
+              <a:t># Add persistence with </a:t>
             </a:r>
             <a:r>
               <a:rPr lang="en-US" altLang="ko-KR" sz="1600" dirty="0" err="1">
@@ -4931,7 +5413,7 @@
                 <a:latin typeface="D2Coding" panose="020B0609020101020101" pitchFamily="49" charset="-127"/>
                 <a:ea typeface="D2Coding" panose="020B0609020101020101" pitchFamily="49" charset="-127"/>
               </a:rPr>
-              <a:t># 6. Configure thread</a:t>
+              <a:t># Configure thread</a:t>
             </a:r>
           </a:p>
           <a:p>
@@ -5775,6 +6257,11 @@
             <a:avLst/>
           </a:prstGeom>
           <a:noFill/>
+          <a:ln>
+            <a:solidFill>
+              <a:schemeClr val="tx1"/>
+            </a:solidFill>
+          </a:ln>
         </p:spPr>
         <p:txBody>
           <a:bodyPr wrap="square">
@@ -6186,41 +6673,6 @@
           <a:chExt cx="0" cy="0"/>
         </a:xfrm>
       </p:grpSpPr>
-      <p:sp>
-        <p:nvSpPr>
-          <p:cNvPr id="4" name="슬라이드 번호 개체 틀 3">
-            <a:extLst>
-              <a:ext uri="{FF2B5EF4-FFF2-40B4-BE49-F238E27FC236}">
-                <a16:creationId xmlns:a16="http://schemas.microsoft.com/office/drawing/2014/main" id="{B32F42C0-07C8-1960-872A-C341FE529FB2}"/>
-              </a:ext>
-            </a:extLst>
-          </p:cNvPr>
-          <p:cNvSpPr>
-            <a:spLocks noGrp="1"/>
-          </p:cNvSpPr>
-          <p:nvPr>
-            <p:ph type="sldNum" sz="quarter" idx="12"/>
-          </p:nvPr>
-        </p:nvSpPr>
-        <p:spPr>
-          <a:xfrm>
-            <a:off x="10514011" y="6036261"/>
-            <a:ext cx="753545" cy="365125"/>
-          </a:xfrm>
-        </p:spPr>
-        <p:txBody>
-          <a:bodyPr/>
-          <a:lstStyle/>
-          <a:p>
-            <a:fld id="{D57F1E4F-1CFF-5643-939E-217C01CDF565}" type="slidenum">
-              <a:rPr lang="en-US" smtClean="0"/>
-              <a:pPr/>
-              <a:t>2</a:t>
-            </a:fld>
-            <a:endParaRPr lang="en-US" dirty="0"/>
-          </a:p>
-        </p:txBody>
-      </p:sp>
       <p:sp>
         <p:nvSpPr>
           <p:cNvPr id="3" name="제목 1">
@@ -6281,7 +6733,7 @@
                 <a:ea typeface="D2Coding" panose="020B0609020101020101" pitchFamily="49" charset="-127"/>
                 <a:cs typeface="Segoe UI Light" panose="020B0502040204020203" pitchFamily="34" charset="0"/>
               </a:rPr>
-              <a:t>Goals</a:t>
+              <a:t>Content</a:t>
             </a:r>
             <a:endParaRPr lang="ko-KR" altLang="en-US" sz="2800" cap="none" dirty="0">
               <a:solidFill>
@@ -6296,36 +6748,219 @@
           </a:p>
         </p:txBody>
       </p:sp>
-      <p:pic>
-        <p:nvPicPr>
-          <p:cNvPr id="8" name="그림 7">
+      <p:sp>
+        <p:nvSpPr>
+          <p:cNvPr id="5" name="TextBox 4">
             <a:extLst>
               <a:ext uri="{FF2B5EF4-FFF2-40B4-BE49-F238E27FC236}">
-                <a16:creationId xmlns:a16="http://schemas.microsoft.com/office/drawing/2014/main" id="{2740E9C1-65CC-1B4C-B42B-F3ADB0CD84ED}"/>
+                <a16:creationId xmlns:a16="http://schemas.microsoft.com/office/drawing/2014/main" id="{6917A9C4-19F2-2125-A082-AD5BF7876A6B}"/>
               </a:ext>
             </a:extLst>
           </p:cNvPr>
-          <p:cNvPicPr>
-            <a:picLocks noChangeAspect="1"/>
-          </p:cNvPicPr>
+          <p:cNvSpPr txBox="1"/>
           <p:nvPr/>
-        </p:nvPicPr>
-        <p:blipFill>
-          <a:blip r:embed="rId2"/>
-          <a:stretch>
-            <a:fillRect/>
-          </a:stretch>
-        </p:blipFill>
+        </p:nvSpPr>
         <p:spPr>
           <a:xfrm>
-            <a:off x="3725974" y="2038229"/>
-            <a:ext cx="6038378" cy="3543421"/>
+            <a:off x="2152650" y="1700921"/>
+            <a:ext cx="8858250" cy="4620304"/>
           </a:xfrm>
           <a:prstGeom prst="rect">
             <a:avLst/>
           </a:prstGeom>
+          <a:noFill/>
         </p:spPr>
-      </p:pic>
+        <p:txBody>
+          <a:bodyPr wrap="square">
+            <a:spAutoFit/>
+          </a:bodyPr>
+          <a:lstStyle/>
+          <a:p>
+            <a:pPr>
+              <a:lnSpc>
+                <a:spcPct val="150000"/>
+              </a:lnSpc>
+            </a:pPr>
+            <a:r>
+              <a:rPr lang="en-US" altLang="ko-KR" sz="2000" b="1" dirty="0">
+                <a:latin typeface="D2Coding" panose="020B0609020101020101" pitchFamily="49" charset="-127"/>
+                <a:ea typeface="D2Coding" panose="020B0609020101020101" pitchFamily="49" charset="-127"/>
+              </a:rPr>
+              <a:t>Using LangGraph to Add Memory to Your Chatbot .....</a:t>
+            </a:r>
+            <a:endParaRPr lang="en-US" altLang="ko-KR" sz="2000" dirty="0">
+              <a:latin typeface="D2Coding" panose="020B0609020101020101" pitchFamily="49" charset="-127"/>
+              <a:ea typeface="D2Coding" panose="020B0609020101020101" pitchFamily="49" charset="-127"/>
+            </a:endParaRPr>
+          </a:p>
+          <a:p>
+            <a:pPr marL="742950" lvl="1" indent="-285750">
+              <a:lnSpc>
+                <a:spcPct val="150000"/>
+              </a:lnSpc>
+              <a:buFont typeface="Wingdings" panose="05000000000000000000" pitchFamily="2" charset="2"/>
+              <a:buChar char="§"/>
+            </a:pPr>
+            <a:r>
+              <a:rPr lang="en-US" altLang="ko-KR" sz="2000" dirty="0">
+                <a:latin typeface="D2Coding" panose="020B0609020101020101" pitchFamily="49" charset="-127"/>
+                <a:ea typeface="D2Coding" panose="020B0609020101020101" pitchFamily="49" charset="-127"/>
+              </a:rPr>
+              <a:t>Building a Chatbot Memory System</a:t>
+            </a:r>
+          </a:p>
+          <a:p>
+            <a:pPr marL="742950" lvl="1" indent="-285750">
+              <a:lnSpc>
+                <a:spcPct val="150000"/>
+              </a:lnSpc>
+              <a:buFont typeface="Wingdings" panose="05000000000000000000" pitchFamily="2" charset="2"/>
+              <a:buChar char="§"/>
+            </a:pPr>
+            <a:r>
+              <a:rPr lang="en-US" altLang="ko-KR" sz="2000" dirty="0">
+                <a:latin typeface="D2Coding" panose="020B0609020101020101" pitchFamily="49" charset="-127"/>
+                <a:ea typeface="D2Coding" panose="020B0609020101020101" pitchFamily="49" charset="-127"/>
+              </a:rPr>
+              <a:t>Introducing LangGraph</a:t>
+            </a:r>
+          </a:p>
+          <a:p>
+            <a:pPr marL="742950" lvl="1" indent="-285750">
+              <a:lnSpc>
+                <a:spcPct val="150000"/>
+              </a:lnSpc>
+              <a:buFont typeface="Wingdings" panose="05000000000000000000" pitchFamily="2" charset="2"/>
+              <a:buChar char="§"/>
+            </a:pPr>
+            <a:r>
+              <a:rPr lang="en-US" altLang="ko-KR" sz="2000" dirty="0">
+                <a:latin typeface="D2Coding" panose="020B0609020101020101" pitchFamily="49" charset="-127"/>
+                <a:ea typeface="D2Coding" panose="020B0609020101020101" pitchFamily="49" charset="-127"/>
+              </a:rPr>
+              <a:t>Creating a </a:t>
+            </a:r>
+            <a:r>
+              <a:rPr lang="en-US" altLang="ko-KR" sz="2000" dirty="0" err="1">
+                <a:latin typeface="D2Coding" panose="020B0609020101020101" pitchFamily="49" charset="-127"/>
+                <a:ea typeface="D2Coding" panose="020B0609020101020101" pitchFamily="49" charset="-127"/>
+              </a:rPr>
+              <a:t>StateGraph</a:t>
+            </a:r>
+            <a:endParaRPr lang="en-US" altLang="ko-KR" sz="2000" dirty="0">
+              <a:latin typeface="D2Coding" panose="020B0609020101020101" pitchFamily="49" charset="-127"/>
+              <a:ea typeface="D2Coding" panose="020B0609020101020101" pitchFamily="49" charset="-127"/>
+            </a:endParaRPr>
+          </a:p>
+          <a:p>
+            <a:pPr marL="742950" lvl="1" indent="-285750">
+              <a:lnSpc>
+                <a:spcPct val="150000"/>
+              </a:lnSpc>
+              <a:buFont typeface="Wingdings" panose="05000000000000000000" pitchFamily="2" charset="2"/>
+              <a:buChar char="§"/>
+            </a:pPr>
+            <a:r>
+              <a:rPr lang="en-US" altLang="ko-KR" sz="2000" dirty="0">
+                <a:latin typeface="D2Coding" panose="020B0609020101020101" pitchFamily="49" charset="-127"/>
+                <a:ea typeface="D2Coding" panose="020B0609020101020101" pitchFamily="49" charset="-127"/>
+              </a:rPr>
+              <a:t>Adding Memory to </a:t>
+            </a:r>
+            <a:r>
+              <a:rPr lang="en-US" altLang="ko-KR" sz="2000" dirty="0" err="1">
+                <a:latin typeface="D2Coding" panose="020B0609020101020101" pitchFamily="49" charset="-127"/>
+                <a:ea typeface="D2Coding" panose="020B0609020101020101" pitchFamily="49" charset="-127"/>
+              </a:rPr>
+              <a:t>StateGraph</a:t>
+            </a:r>
+            <a:endParaRPr lang="en-US" altLang="ko-KR" sz="2000" dirty="0">
+              <a:latin typeface="D2Coding" panose="020B0609020101020101" pitchFamily="49" charset="-127"/>
+              <a:ea typeface="D2Coding" panose="020B0609020101020101" pitchFamily="49" charset="-127"/>
+            </a:endParaRPr>
+          </a:p>
+          <a:p>
+            <a:pPr marL="742950" lvl="1" indent="-285750">
+              <a:lnSpc>
+                <a:spcPct val="150000"/>
+              </a:lnSpc>
+              <a:buFont typeface="Wingdings" panose="05000000000000000000" pitchFamily="2" charset="2"/>
+              <a:buChar char="§"/>
+            </a:pPr>
+            <a:r>
+              <a:rPr lang="en-US" altLang="ko-KR" sz="2000" dirty="0">
+                <a:latin typeface="D2Coding" panose="020B0609020101020101" pitchFamily="49" charset="-127"/>
+                <a:ea typeface="D2Coding" panose="020B0609020101020101" pitchFamily="49" charset="-127"/>
+              </a:rPr>
+              <a:t>Modifying Chat History</a:t>
+            </a:r>
+          </a:p>
+          <a:p>
+            <a:pPr marL="1657350" lvl="3" indent="-285750">
+              <a:lnSpc>
+                <a:spcPct val="150000"/>
+              </a:lnSpc>
+              <a:buFont typeface="Wingdings" panose="05000000000000000000" pitchFamily="2" charset="2"/>
+              <a:buChar char="§"/>
+            </a:pPr>
+            <a:r>
+              <a:rPr lang="en-US" altLang="ko-KR" sz="2000" dirty="0">
+                <a:latin typeface="D2Coding" panose="020B0609020101020101" pitchFamily="49" charset="-127"/>
+                <a:ea typeface="D2Coding" panose="020B0609020101020101" pitchFamily="49" charset="-127"/>
+              </a:rPr>
+              <a:t>Trimming Messages</a:t>
+            </a:r>
+          </a:p>
+          <a:p>
+            <a:pPr marL="1657350" lvl="3" indent="-285750">
+              <a:lnSpc>
+                <a:spcPct val="150000"/>
+              </a:lnSpc>
+              <a:buFont typeface="Wingdings" panose="05000000000000000000" pitchFamily="2" charset="2"/>
+              <a:buChar char="§"/>
+            </a:pPr>
+            <a:r>
+              <a:rPr lang="en-US" altLang="ko-KR" sz="2000" dirty="0">
+                <a:latin typeface="D2Coding" panose="020B0609020101020101" pitchFamily="49" charset="-127"/>
+                <a:ea typeface="D2Coding" panose="020B0609020101020101" pitchFamily="49" charset="-127"/>
+              </a:rPr>
+              <a:t>Filtering Messages</a:t>
+            </a:r>
+          </a:p>
+          <a:p>
+            <a:pPr marL="1657350" lvl="3" indent="-285750">
+              <a:lnSpc>
+                <a:spcPct val="150000"/>
+              </a:lnSpc>
+              <a:buFont typeface="Wingdings" panose="05000000000000000000" pitchFamily="2" charset="2"/>
+              <a:buChar char="§"/>
+            </a:pPr>
+            <a:r>
+              <a:rPr lang="en-US" altLang="ko-KR" sz="2000" dirty="0">
+                <a:latin typeface="D2Coding" panose="020B0609020101020101" pitchFamily="49" charset="-127"/>
+                <a:ea typeface="D2Coding" panose="020B0609020101020101" pitchFamily="49" charset="-127"/>
+              </a:rPr>
+              <a:t>Merging Consecutive Messages</a:t>
+            </a:r>
+          </a:p>
+          <a:p>
+            <a:pPr marL="742950" lvl="1" indent="-285750">
+              <a:lnSpc>
+                <a:spcPct val="150000"/>
+              </a:lnSpc>
+              <a:buFont typeface="Wingdings" panose="05000000000000000000" pitchFamily="2" charset="2"/>
+              <a:buChar char="§"/>
+            </a:pPr>
+            <a:r>
+              <a:rPr lang="en-US" altLang="ko-KR" sz="2000" dirty="0">
+                <a:latin typeface="D2Coding" panose="020B0609020101020101" pitchFamily="49" charset="-127"/>
+                <a:ea typeface="D2Coding" panose="020B0609020101020101" pitchFamily="49" charset="-127"/>
+              </a:rPr>
+              <a:t>Summary</a:t>
+            </a:r>
+          </a:p>
+        </p:txBody>
+      </p:sp>
     </p:spTree>
     <p:extLst>
       <p:ext uri="{BB962C8B-B14F-4D97-AF65-F5344CB8AC3E}">
@@ -6494,7 +7129,7 @@
         <p:spPr>
           <a:xfrm>
             <a:off x="609600" y="1248422"/>
-            <a:ext cx="10972800" cy="4486485"/>
+            <a:ext cx="10972800" cy="1162498"/>
           </a:xfrm>
           <a:prstGeom prst="rect">
             <a:avLst/>
@@ -6646,6 +7281,37 @@
               <a:t>?</a:t>
             </a:r>
           </a:p>
+        </p:txBody>
+      </p:sp>
+      <p:sp>
+        <p:nvSpPr>
+          <p:cNvPr id="5" name="TextBox 4">
+            <a:extLst>
+              <a:ext uri="{FF2B5EF4-FFF2-40B4-BE49-F238E27FC236}">
+                <a16:creationId xmlns:a16="http://schemas.microsoft.com/office/drawing/2014/main" id="{3FA4267A-39C9-9345-D0B9-29222EFC2877}"/>
+              </a:ext>
+            </a:extLst>
+          </p:cNvPr>
+          <p:cNvSpPr txBox="1"/>
+          <p:nvPr/>
+        </p:nvSpPr>
+        <p:spPr>
+          <a:xfrm>
+            <a:off x="1238249" y="2876239"/>
+            <a:ext cx="9938803" cy="3007426"/>
+          </a:xfrm>
+          <a:prstGeom prst="rect">
+            <a:avLst/>
+          </a:prstGeom>
+          <a:solidFill>
+            <a:schemeClr val="tx1"/>
+          </a:solidFill>
+        </p:spPr>
+        <p:txBody>
+          <a:bodyPr wrap="square">
+            <a:spAutoFit/>
+          </a:bodyPr>
+          <a:lstStyle/>
           <a:p>
             <a:pPr marL="285750" indent="-285750">
               <a:lnSpc>
@@ -6654,21 +7320,11 @@
               <a:buFont typeface="Wingdings" panose="05000000000000000000" pitchFamily="2" charset="2"/>
               <a:buChar char="v"/>
             </a:pPr>
-            <a:endParaRPr lang="en-US" altLang="ko-KR" sz="1600" dirty="0">
-              <a:latin typeface="D2Coding" panose="020B0609020101020101" pitchFamily="49" charset="-127"/>
-              <a:ea typeface="D2Coding" panose="020B0609020101020101" pitchFamily="49" charset="-127"/>
-            </a:endParaRPr>
-          </a:p>
-          <a:p>
-            <a:pPr marL="285750" indent="-285750">
-              <a:lnSpc>
-                <a:spcPct val="150000"/>
-              </a:lnSpc>
-              <a:buFont typeface="Wingdings" panose="05000000000000000000" pitchFamily="2" charset="2"/>
-              <a:buChar char="v"/>
-            </a:pPr>
             <a:r>
               <a:rPr lang="ko-KR" altLang="en-US" sz="1600" b="1" dirty="0">
+                <a:solidFill>
+                  <a:schemeClr val="bg1"/>
+                </a:solidFill>
                 <a:latin typeface="D2Coding" panose="020B0609020101020101" pitchFamily="49" charset="-127"/>
                 <a:ea typeface="D2Coding" panose="020B0609020101020101" pitchFamily="49" charset="-127"/>
               </a:rPr>
@@ -6676,6 +7332,9 @@
             </a:r>
             <a:r>
               <a:rPr lang="en-US" altLang="ko-KR" sz="1600" b="1" dirty="0">
+                <a:solidFill>
+                  <a:schemeClr val="bg1"/>
+                </a:solidFill>
                 <a:latin typeface="D2Coding" panose="020B0609020101020101" pitchFamily="49" charset="-127"/>
                 <a:ea typeface="D2Coding" panose="020B0609020101020101" pitchFamily="49" charset="-127"/>
               </a:rPr>
@@ -6692,6 +7351,9 @@
             </a:pPr>
             <a:r>
               <a:rPr lang="ko-KR" altLang="en-US" sz="1600" dirty="0">
+                <a:solidFill>
+                  <a:schemeClr val="bg1"/>
+                </a:solidFill>
                 <a:latin typeface="D2Coding" panose="020B0609020101020101" pitchFamily="49" charset="-127"/>
                 <a:ea typeface="D2Coding" panose="020B0609020101020101" pitchFamily="49" charset="-127"/>
               </a:rPr>
@@ -6699,6 +7361,9 @@
             </a:r>
             <a:r>
               <a:rPr lang="en-US" altLang="ko-KR" sz="1600" dirty="0">
+                <a:solidFill>
+                  <a:schemeClr val="bg1"/>
+                </a:solidFill>
                 <a:latin typeface="D2Coding" panose="020B0609020101020101" pitchFamily="49" charset="-127"/>
                 <a:ea typeface="D2Coding" panose="020B0609020101020101" pitchFamily="49" charset="-127"/>
               </a:rPr>
@@ -6706,6 +7371,9 @@
             </a:r>
             <a:r>
               <a:rPr lang="ko-KR" altLang="en-US" sz="1600" dirty="0">
+                <a:solidFill>
+                  <a:schemeClr val="bg1"/>
+                </a:solidFill>
                 <a:latin typeface="D2Coding" panose="020B0609020101020101" pitchFamily="49" charset="-127"/>
                 <a:ea typeface="D2Coding" panose="020B0609020101020101" pitchFamily="49" charset="-127"/>
               </a:rPr>
@@ -6713,6 +7381,9 @@
             </a:r>
             <a:r>
               <a:rPr lang="en-US" altLang="ko-KR" sz="1600" dirty="0">
+                <a:solidFill>
+                  <a:schemeClr val="bg1"/>
+                </a:solidFill>
                 <a:latin typeface="D2Coding" panose="020B0609020101020101" pitchFamily="49" charset="-127"/>
                 <a:ea typeface="D2Coding" panose="020B0609020101020101" pitchFamily="49" charset="-127"/>
               </a:rPr>
@@ -6720,6 +7391,9 @@
             </a:r>
             <a:r>
               <a:rPr lang="ko-KR" altLang="en-US" sz="1600" dirty="0">
+                <a:solidFill>
+                  <a:schemeClr val="bg1"/>
+                </a:solidFill>
                 <a:latin typeface="D2Coding" panose="020B0609020101020101" pitchFamily="49" charset="-127"/>
                 <a:ea typeface="D2Coding" panose="020B0609020101020101" pitchFamily="49" charset="-127"/>
               </a:rPr>
@@ -6727,6 +7401,9 @@
             </a:r>
             <a:r>
               <a:rPr lang="en-US" altLang="ko-KR" sz="1600" dirty="0">
+                <a:solidFill>
+                  <a:schemeClr val="bg1"/>
+                </a:solidFill>
                 <a:latin typeface="D2Coding" panose="020B0609020101020101" pitchFamily="49" charset="-127"/>
                 <a:ea typeface="D2Coding" panose="020B0609020101020101" pitchFamily="49" charset="-127"/>
               </a:rPr>
@@ -6734,12 +7411,18 @@
             </a:r>
             <a:r>
               <a:rPr lang="ko-KR" altLang="en-US" sz="1600" dirty="0">
+                <a:solidFill>
+                  <a:schemeClr val="bg1"/>
+                </a:solidFill>
                 <a:latin typeface="D2Coding" panose="020B0609020101020101" pitchFamily="49" charset="-127"/>
                 <a:ea typeface="D2Coding" panose="020B0609020101020101" pitchFamily="49" charset="-127"/>
               </a:rPr>
               <a:t>하여야 하고</a:t>
             </a:r>
             <a:endParaRPr lang="en-US" altLang="ko-KR" sz="1600" dirty="0">
+              <a:solidFill>
+                <a:schemeClr val="bg1"/>
+              </a:solidFill>
               <a:latin typeface="D2Coding" panose="020B0609020101020101" pitchFamily="49" charset="-127"/>
               <a:ea typeface="D2Coding" panose="020B0609020101020101" pitchFamily="49" charset="-127"/>
             </a:endParaRPr>
@@ -6753,6 +7436,9 @@
               <a:buChar char="v"/>
             </a:pPr>
             <a:endParaRPr lang="en-US" altLang="ko-KR" sz="1600" dirty="0">
+              <a:solidFill>
+                <a:schemeClr val="bg1"/>
+              </a:solidFill>
               <a:latin typeface="D2Coding" panose="020B0609020101020101" pitchFamily="49" charset="-127"/>
               <a:ea typeface="D2Coding" panose="020B0609020101020101" pitchFamily="49" charset="-127"/>
             </a:endParaRPr>
@@ -6767,6 +7453,9 @@
             </a:pPr>
             <a:r>
               <a:rPr lang="ko-KR" altLang="en-US" sz="1600" b="1" dirty="0" err="1">
+                <a:solidFill>
+                  <a:schemeClr val="bg1"/>
+                </a:solidFill>
                 <a:latin typeface="D2Coding" panose="020B0609020101020101" pitchFamily="49" charset="-127"/>
                 <a:ea typeface="D2Coding" panose="020B0609020101020101" pitchFamily="49" charset="-127"/>
               </a:rPr>
@@ -6774,6 +7463,9 @@
             </a:r>
             <a:r>
               <a:rPr lang="ko-KR" altLang="en-US" sz="1600" b="1" dirty="0">
+                <a:solidFill>
+                  <a:schemeClr val="bg1"/>
+                </a:solidFill>
                 <a:latin typeface="D2Coding" panose="020B0609020101020101" pitchFamily="49" charset="-127"/>
                 <a:ea typeface="D2Coding" panose="020B0609020101020101" pitchFamily="49" charset="-127"/>
               </a:rPr>
@@ -6781,6 +7473,9 @@
             </a:r>
             <a:r>
               <a:rPr lang="en-US" altLang="ko-KR" sz="1600" b="1" dirty="0">
+                <a:solidFill>
+                  <a:schemeClr val="bg1"/>
+                </a:solidFill>
                 <a:latin typeface="D2Coding" panose="020B0609020101020101" pitchFamily="49" charset="-127"/>
                 <a:ea typeface="D2Coding" panose="020B0609020101020101" pitchFamily="49" charset="-127"/>
               </a:rPr>
@@ -6788,6 +7483,9 @@
             </a:r>
             <a:r>
               <a:rPr lang="en-US" altLang="ko-KR" sz="1600" b="1" dirty="0" err="1">
+                <a:solidFill>
+                  <a:schemeClr val="bg1"/>
+                </a:solidFill>
                 <a:latin typeface="D2Coding" panose="020B0609020101020101" pitchFamily="49" charset="-127"/>
                 <a:ea typeface="D2Coding" panose="020B0609020101020101" pitchFamily="49" charset="-127"/>
               </a:rPr>
@@ -6795,6 +7493,9 @@
             </a:r>
             <a:r>
               <a:rPr lang="en-US" altLang="ko-KR" sz="1600" b="1" dirty="0">
+                <a:solidFill>
+                  <a:schemeClr val="bg1"/>
+                </a:solidFill>
                 <a:latin typeface="D2Coding" panose="020B0609020101020101" pitchFamily="49" charset="-127"/>
                 <a:ea typeface="D2Coding" panose="020B0609020101020101" pitchFamily="49" charset="-127"/>
               </a:rPr>
@@ -6811,6 +7512,9 @@
             </a:pPr>
             <a:r>
               <a:rPr lang="ko-KR" altLang="en-US" sz="1600" dirty="0">
+                <a:solidFill>
+                  <a:schemeClr val="bg1"/>
+                </a:solidFill>
                 <a:latin typeface="D2Coding" panose="020B0609020101020101" pitchFamily="49" charset="-127"/>
                 <a:ea typeface="D2Coding" panose="020B0609020101020101" pitchFamily="49" charset="-127"/>
               </a:rPr>
@@ -6818,6 +7522,9 @@
             </a:r>
             <a:r>
               <a:rPr lang="en-US" altLang="ko-KR" sz="1600" dirty="0">
+                <a:solidFill>
+                  <a:schemeClr val="bg1"/>
+                </a:solidFill>
                 <a:latin typeface="D2Coding" panose="020B0609020101020101" pitchFamily="49" charset="-127"/>
                 <a:ea typeface="D2Coding" panose="020B0609020101020101" pitchFamily="49" charset="-127"/>
               </a:rPr>
@@ -6825,6 +7532,9 @@
             </a:r>
             <a:r>
               <a:rPr lang="ko-KR" altLang="en-US" sz="1600" dirty="0">
+                <a:solidFill>
+                  <a:schemeClr val="bg1"/>
+                </a:solidFill>
                 <a:latin typeface="D2Coding" panose="020B0609020101020101" pitchFamily="49" charset="-127"/>
                 <a:ea typeface="D2Coding" panose="020B0609020101020101" pitchFamily="49" charset="-127"/>
               </a:rPr>
@@ -6832,6 +7542,9 @@
             </a:r>
             <a:r>
               <a:rPr lang="en-US" altLang="ko-KR" sz="1600" dirty="0">
+                <a:solidFill>
+                  <a:schemeClr val="bg1"/>
+                </a:solidFill>
                 <a:latin typeface="D2Coding" panose="020B0609020101020101" pitchFamily="49" charset="-127"/>
                 <a:ea typeface="D2Coding" panose="020B0609020101020101" pitchFamily="49" charset="-127"/>
               </a:rPr>
@@ -6839,6 +7552,9 @@
             </a:r>
             <a:r>
               <a:rPr lang="ko-KR" altLang="en-US" sz="1600" dirty="0">
+                <a:solidFill>
+                  <a:schemeClr val="bg1"/>
+                </a:solidFill>
                 <a:latin typeface="D2Coding" panose="020B0609020101020101" pitchFamily="49" charset="-127"/>
                 <a:ea typeface="D2Coding" panose="020B0609020101020101" pitchFamily="49" charset="-127"/>
               </a:rPr>
@@ -6846,6 +7562,9 @@
             </a:r>
             <a:r>
               <a:rPr lang="en-US" altLang="ko-KR" sz="1600" dirty="0">
+                <a:solidFill>
+                  <a:schemeClr val="bg1"/>
+                </a:solidFill>
                 <a:latin typeface="D2Coding" panose="020B0609020101020101" pitchFamily="49" charset="-127"/>
                 <a:ea typeface="D2Coding" panose="020B0609020101020101" pitchFamily="49" charset="-127"/>
               </a:rPr>
@@ -6853,27 +7572,18 @@
             </a:r>
             <a:r>
               <a:rPr lang="ko-KR" altLang="en-US" sz="1600" dirty="0">
+                <a:solidFill>
+                  <a:schemeClr val="bg1"/>
+                </a:solidFill>
                 <a:latin typeface="D2Coding" panose="020B0609020101020101" pitchFamily="49" charset="-127"/>
                 <a:ea typeface="D2Coding" panose="020B0609020101020101" pitchFamily="49" charset="-127"/>
               </a:rPr>
               <a:t>를 데이터베이스나 메모리에 자동으로 저장하는 내장 기능이 필요함</a:t>
             </a:r>
-            <a:endParaRPr lang="en-US" altLang="ko-KR" sz="1600" dirty="0">
-              <a:latin typeface="D2Coding" panose="020B0609020101020101" pitchFamily="49" charset="-127"/>
-              <a:ea typeface="D2Coding" panose="020B0609020101020101" pitchFamily="49" charset="-127"/>
-            </a:endParaRPr>
-          </a:p>
-          <a:p>
-            <a:pPr marL="285750" indent="-285750">
-              <a:lnSpc>
-                <a:spcPct val="150000"/>
-              </a:lnSpc>
-              <a:buFont typeface="Wingdings" panose="05000000000000000000" pitchFamily="2" charset="2"/>
-              <a:buChar char="v"/>
-            </a:pPr>
-            <a:endParaRPr lang="ko-KR" altLang="en-US" sz="1600" dirty="0">
-              <a:latin typeface="D2Coding" panose="020B0609020101020101" pitchFamily="49" charset="-127"/>
-              <a:ea typeface="D2Coding" panose="020B0609020101020101" pitchFamily="49" charset="-127"/>
+            <a:endParaRPr lang="ko-KR" altLang="en-US" dirty="0">
+              <a:solidFill>
+                <a:schemeClr val="bg1"/>
+              </a:solidFill>
             </a:endParaRPr>
           </a:p>
         </p:txBody>
@@ -7017,6 +7727,11 @@
           <a:prstGeom prst="rect">
             <a:avLst/>
           </a:prstGeom>
+          <a:ln>
+            <a:solidFill>
+              <a:schemeClr val="tx1"/>
+            </a:solidFill>
+          </a:ln>
         </p:spPr>
       </p:pic>
       <p:sp>
@@ -7133,7 +7848,7 @@
         </p:nvSpPr>
         <p:spPr>
           <a:xfrm>
-            <a:off x="4743450" y="2416118"/>
+            <a:off x="4676775" y="2320868"/>
             <a:ext cx="4905375" cy="465320"/>
           </a:xfrm>
           <a:prstGeom prst="rect">
@@ -7142,6 +7857,11 @@
           <a:solidFill>
             <a:schemeClr val="bg1"/>
           </a:solidFill>
+          <a:ln>
+            <a:solidFill>
+              <a:schemeClr val="tx1"/>
+            </a:solidFill>
+          </a:ln>
         </p:spPr>
         <p:txBody>
           <a:bodyPr wrap="square">
@@ -7368,7 +8088,7 @@
         <p:spPr>
           <a:xfrm>
             <a:off x="485170" y="1248422"/>
-            <a:ext cx="11040080" cy="4117153"/>
+            <a:ext cx="11040080" cy="4671151"/>
           </a:xfrm>
           <a:prstGeom prst="rect">
             <a:avLst/>
@@ -7435,7 +8155,22 @@
                 <a:latin typeface="D2Coding" panose="020B0609020101020101" pitchFamily="49" charset="-127"/>
                 <a:ea typeface="D2Coding" panose="020B0609020101020101" pitchFamily="49" charset="-127"/>
               </a:rPr>
-              <a:t>) – LLM</a:t>
+              <a:t>) </a:t>
+            </a:r>
+            <a:r>
+              <a:rPr lang="ko-KR" altLang="en-US" sz="1600" dirty="0">
+                <a:latin typeface="D2Coding" panose="020B0609020101020101" pitchFamily="49" charset="-127"/>
+                <a:ea typeface="D2Coding" panose="020B0609020101020101" pitchFamily="49" charset="-127"/>
+                <a:sym typeface="Wingdings" panose="05000000000000000000" pitchFamily="2" charset="2"/>
+              </a:rPr>
+              <a:t></a:t>
+            </a:r>
+            <a:r>
+              <a:rPr lang="en-US" altLang="ko-KR" sz="1600" dirty="0">
+                <a:latin typeface="D2Coding" panose="020B0609020101020101" pitchFamily="49" charset="-127"/>
+                <a:ea typeface="D2Coding" panose="020B0609020101020101" pitchFamily="49" charset="-127"/>
+              </a:rPr>
+              <a:t> LLM</a:t>
             </a:r>
             <a:r>
               <a:rPr lang="ko-KR" altLang="en-US" sz="1600" dirty="0">
@@ -7514,124 +8249,151 @@
               <a:buChar char="v"/>
             </a:pPr>
             <a:r>
+              <a:rPr lang="en-US" altLang="ko-KR" sz="1600" b="1" dirty="0">
+                <a:latin typeface="D2Coding" panose="020B0609020101020101" pitchFamily="49" charset="-127"/>
+                <a:ea typeface="D2Coding" panose="020B0609020101020101" pitchFamily="49" charset="-127"/>
+              </a:rPr>
+              <a:t>LLM + </a:t>
+            </a:r>
+            <a:r>
+              <a:rPr lang="ko-KR" altLang="en-US" sz="1600" b="1" dirty="0">
+                <a:latin typeface="D2Coding" panose="020B0609020101020101" pitchFamily="49" charset="-127"/>
+                <a:ea typeface="D2Coding" panose="020B0609020101020101" pitchFamily="49" charset="-127"/>
+              </a:rPr>
+              <a:t>검색 엔진</a:t>
+            </a:r>
+            <a:r>
+              <a:rPr lang="en-US" altLang="ko-KR" sz="1600" b="1" dirty="0">
+                <a:latin typeface="D2Coding" panose="020B0609020101020101" pitchFamily="49" charset="-127"/>
+                <a:ea typeface="D2Coding" panose="020B0609020101020101" pitchFamily="49" charset="-127"/>
+              </a:rPr>
+              <a:t>(Tool Augmentation / RAG)</a:t>
+            </a:r>
+            <a:r>
               <a:rPr lang="en-US" altLang="ko-KR" sz="1600" dirty="0">
                 <a:latin typeface="D2Coding" panose="020B0609020101020101" pitchFamily="49" charset="-127"/>
                 <a:ea typeface="D2Coding" panose="020B0609020101020101" pitchFamily="49" charset="-127"/>
               </a:rPr>
-              <a:t>LLM + </a:t>
-            </a:r>
-            <a:r>
-              <a:rPr lang="ko-KR" altLang="en-US" sz="1600" dirty="0">
-                <a:latin typeface="D2Coding" panose="020B0609020101020101" pitchFamily="49" charset="-127"/>
-                <a:ea typeface="D2Coding" panose="020B0609020101020101" pitchFamily="49" charset="-127"/>
-              </a:rPr>
-              <a:t>검색 엔진</a:t>
-            </a:r>
-            <a:r>
-              <a:rPr lang="en-US" altLang="ko-KR" sz="1600" dirty="0">
-                <a:latin typeface="D2Coding" panose="020B0609020101020101" pitchFamily="49" charset="-127"/>
-                <a:ea typeface="D2Coding" panose="020B0609020101020101" pitchFamily="49" charset="-127"/>
-              </a:rPr>
-              <a:t>: LLM</a:t>
-            </a:r>
-            <a:r>
-              <a:rPr lang="ko-KR" altLang="en-US" sz="1600" dirty="0">
+              <a:t>: </a:t>
+            </a:r>
+          </a:p>
+          <a:p>
+            <a:pPr marL="1200150" lvl="2" indent="-285750">
+              <a:lnSpc>
+                <a:spcPct val="150000"/>
+              </a:lnSpc>
+              <a:buFont typeface="Wingdings" panose="05000000000000000000" pitchFamily="2" charset="2"/>
+              <a:buChar char="v"/>
+            </a:pPr>
+            <a:r>
+              <a:rPr lang="en-US" altLang="ko-KR" sz="1400" dirty="0">
+                <a:latin typeface="D2Coding" panose="020B0609020101020101" pitchFamily="49" charset="-127"/>
+                <a:ea typeface="D2Coding" panose="020B0609020101020101" pitchFamily="49" charset="-127"/>
+              </a:rPr>
+              <a:t>LLM</a:t>
+            </a:r>
+            <a:r>
+              <a:rPr lang="ko-KR" altLang="en-US" sz="1400" dirty="0">
                 <a:latin typeface="D2Coding" panose="020B0609020101020101" pitchFamily="49" charset="-127"/>
                 <a:ea typeface="D2Coding" panose="020B0609020101020101" pitchFamily="49" charset="-127"/>
               </a:rPr>
               <a:t>에게 </a:t>
             </a:r>
             <a:r>
-              <a:rPr lang="en-US" altLang="ko-KR" sz="1600" dirty="0">
+              <a:rPr lang="en-US" altLang="ko-KR" sz="1400" dirty="0">
                 <a:latin typeface="D2Coding" panose="020B0609020101020101" pitchFamily="49" charset="-127"/>
                 <a:ea typeface="D2Coding" panose="020B0609020101020101" pitchFamily="49" charset="-127"/>
               </a:rPr>
               <a:t>"</a:t>
             </a:r>
             <a:r>
-              <a:rPr lang="ko-KR" altLang="en-US" sz="1600" dirty="0">
+              <a:rPr lang="ko-KR" altLang="en-US" sz="1400" dirty="0">
                 <a:latin typeface="D2Coding" panose="020B0609020101020101" pitchFamily="49" charset="-127"/>
                 <a:ea typeface="D2Coding" panose="020B0609020101020101" pitchFamily="49" charset="-127"/>
               </a:rPr>
               <a:t>모르면 구글이나 검색 엔진에서 먼저 검색해 보고</a:t>
             </a:r>
             <a:r>
-              <a:rPr lang="en-US" altLang="ko-KR" sz="1600" dirty="0">
+              <a:rPr lang="en-US" altLang="ko-KR" sz="1400" dirty="0">
                 <a:latin typeface="D2Coding" panose="020B0609020101020101" pitchFamily="49" charset="-127"/>
                 <a:ea typeface="D2Coding" panose="020B0609020101020101" pitchFamily="49" charset="-127"/>
               </a:rPr>
               <a:t>, </a:t>
             </a:r>
             <a:r>
-              <a:rPr lang="ko-KR" altLang="en-US" sz="1600" dirty="0">
+              <a:rPr lang="ko-KR" altLang="en-US" sz="1400" dirty="0">
                 <a:latin typeface="D2Coding" panose="020B0609020101020101" pitchFamily="49" charset="-127"/>
                 <a:ea typeface="D2Coding" panose="020B0609020101020101" pitchFamily="49" charset="-127"/>
               </a:rPr>
               <a:t>그 결과를 토대로 답변해</a:t>
             </a:r>
             <a:r>
-              <a:rPr lang="en-US" altLang="ko-KR" sz="1600" dirty="0">
+              <a:rPr lang="en-US" altLang="ko-KR" sz="1400" dirty="0">
                 <a:latin typeface="D2Coding" panose="020B0609020101020101" pitchFamily="49" charset="-127"/>
                 <a:ea typeface="D2Coding" panose="020B0609020101020101" pitchFamily="49" charset="-127"/>
               </a:rPr>
               <a:t>!"</a:t>
             </a:r>
             <a:r>
-              <a:rPr lang="ko-KR" altLang="en-US" sz="1600" dirty="0">
+              <a:rPr lang="ko-KR" altLang="en-US" sz="1400" dirty="0">
                 <a:latin typeface="D2Coding" panose="020B0609020101020101" pitchFamily="49" charset="-127"/>
                 <a:ea typeface="D2Coding" panose="020B0609020101020101" pitchFamily="49" charset="-127"/>
               </a:rPr>
               <a:t>라고 지시하는 구조</a:t>
             </a:r>
             <a:r>
-              <a:rPr lang="en-US" altLang="ko-KR" sz="1600" dirty="0">
+              <a:rPr lang="en-US" altLang="ko-KR" sz="1400" dirty="0">
                 <a:latin typeface="D2Coding" panose="020B0609020101020101" pitchFamily="49" charset="-127"/>
                 <a:ea typeface="D2Coding" panose="020B0609020101020101" pitchFamily="49" charset="-127"/>
               </a:rPr>
               <a:t>(Perplexity</a:t>
             </a:r>
             <a:r>
-              <a:rPr lang="ko-KR" altLang="en-US" sz="1600" dirty="0">
+              <a:rPr lang="ko-KR" altLang="en-US" sz="1400" dirty="0">
                 <a:latin typeface="D2Coding" panose="020B0609020101020101" pitchFamily="49" charset="-127"/>
                 <a:ea typeface="D2Coding" panose="020B0609020101020101" pitchFamily="49" charset="-127"/>
               </a:rPr>
               <a:t>나 </a:t>
             </a:r>
             <a:r>
-              <a:rPr lang="en-US" altLang="ko-KR" sz="1600" dirty="0">
+              <a:rPr lang="en-US" altLang="ko-KR" sz="1400" dirty="0">
                 <a:latin typeface="D2Coding" panose="020B0609020101020101" pitchFamily="49" charset="-127"/>
                 <a:ea typeface="D2Coding" panose="020B0609020101020101" pitchFamily="49" charset="-127"/>
               </a:rPr>
               <a:t>Arc Search </a:t>
             </a:r>
             <a:r>
-              <a:rPr lang="ko-KR" altLang="en-US" sz="1600" dirty="0">
+              <a:rPr lang="ko-KR" altLang="en-US" sz="1400" dirty="0">
                 <a:latin typeface="D2Coding" panose="020B0609020101020101" pitchFamily="49" charset="-127"/>
                 <a:ea typeface="D2Coding" panose="020B0609020101020101" pitchFamily="49" charset="-127"/>
               </a:rPr>
               <a:t>같은 혁신적인 </a:t>
             </a:r>
             <a:r>
-              <a:rPr lang="en-US" altLang="ko-KR" sz="1600" dirty="0">
+              <a:rPr lang="en-US" altLang="ko-KR" sz="1400" dirty="0">
                 <a:latin typeface="D2Coding" panose="020B0609020101020101" pitchFamily="49" charset="-127"/>
                 <a:ea typeface="D2Coding" panose="020B0609020101020101" pitchFamily="49" charset="-127"/>
               </a:rPr>
               <a:t>AI </a:t>
             </a:r>
             <a:r>
-              <a:rPr lang="ko-KR" altLang="en-US" sz="1600" dirty="0">
+              <a:rPr lang="ko-KR" altLang="en-US" sz="1400" dirty="0">
                 <a:latin typeface="D2Coding" panose="020B0609020101020101" pitchFamily="49" charset="-127"/>
                 <a:ea typeface="D2Coding" panose="020B0609020101020101" pitchFamily="49" charset="-127"/>
               </a:rPr>
               <a:t>검색 서비스의 기반 기술</a:t>
             </a:r>
             <a:r>
-              <a:rPr lang="en-US" altLang="ko-KR" sz="1600" dirty="0">
+              <a:rPr lang="en-US" altLang="ko-KR" sz="1400" dirty="0">
                 <a:latin typeface="D2Coding" panose="020B0609020101020101" pitchFamily="49" charset="-127"/>
                 <a:ea typeface="D2Coding" panose="020B0609020101020101" pitchFamily="49" charset="-127"/>
               </a:rPr>
               <a:t>)</a:t>
             </a:r>
+            <a:endParaRPr lang="en-US" altLang="ko-KR" sz="1600" dirty="0">
+              <a:latin typeface="D2Coding" panose="020B0609020101020101" pitchFamily="49" charset="-127"/>
+              <a:ea typeface="D2Coding" panose="020B0609020101020101" pitchFamily="49" charset="-127"/>
+            </a:endParaRPr>
           </a:p>
           <a:p>
             <a:pPr marL="742950" lvl="1" indent="-285750">
@@ -7655,98 +8417,118 @@
               <a:buChar char="v"/>
             </a:pPr>
             <a:r>
-              <a:rPr lang="en-US" altLang="ko-KR" sz="1600" dirty="0">
+              <a:rPr lang="en-US" altLang="ko-KR" sz="1600" b="1" dirty="0">
                 <a:latin typeface="D2Coding" panose="020B0609020101020101" pitchFamily="49" charset="-127"/>
                 <a:ea typeface="D2Coding" panose="020B0609020101020101" pitchFamily="49" charset="-127"/>
               </a:rPr>
               <a:t>LLM + </a:t>
             </a:r>
             <a:r>
-              <a:rPr lang="ko-KR" altLang="en-US" sz="1600" dirty="0">
+              <a:rPr lang="ko-KR" altLang="en-US" sz="1600" b="1" dirty="0">
                 <a:latin typeface="D2Coding" panose="020B0609020101020101" pitchFamily="49" charset="-127"/>
                 <a:ea typeface="D2Coding" panose="020B0609020101020101" pitchFamily="49" charset="-127"/>
               </a:rPr>
               <a:t>또 다른 </a:t>
             </a:r>
             <a:r>
-              <a:rPr lang="en-US" altLang="ko-KR" sz="1600" dirty="0">
+              <a:rPr lang="en-US" altLang="ko-KR" sz="1600" b="1" dirty="0">
                 <a:latin typeface="D2Coding" panose="020B0609020101020101" pitchFamily="49" charset="-127"/>
                 <a:ea typeface="D2Coding" panose="020B0609020101020101" pitchFamily="49" charset="-127"/>
               </a:rPr>
               <a:t>LLM </a:t>
             </a:r>
             <a:r>
-              <a:rPr lang="ko-KR" altLang="en-US" sz="1600" dirty="0">
+              <a:rPr lang="ko-KR" altLang="en-US" sz="1600" b="1" dirty="0">
                 <a:latin typeface="D2Coding" panose="020B0609020101020101" pitchFamily="49" charset="-127"/>
                 <a:ea typeface="D2Coding" panose="020B0609020101020101" pitchFamily="49" charset="-127"/>
               </a:rPr>
               <a:t>프롬프트</a:t>
             </a:r>
             <a:r>
-              <a:rPr lang="en-US" altLang="ko-KR" sz="1600" dirty="0">
+              <a:rPr lang="en-US" altLang="ko-KR" sz="1600" b="1" dirty="0">
+                <a:latin typeface="D2Coding" panose="020B0609020101020101" pitchFamily="49" charset="-127"/>
+                <a:ea typeface="D2Coding" panose="020B0609020101020101" pitchFamily="49" charset="-127"/>
+              </a:rPr>
+              <a:t>(</a:t>
+            </a:r>
+            <a:r>
+              <a:rPr lang="en-US" altLang="ko-KR" sz="1600" b="1" dirty="0"/>
+              <a:t>Multi-Agent / Role Prompting)</a:t>
+            </a:r>
+            <a:r>
+              <a:rPr lang="en-US" altLang="ko-KR" sz="1600" b="1" dirty="0">
                 <a:latin typeface="D2Coding" panose="020B0609020101020101" pitchFamily="49" charset="-127"/>
                 <a:ea typeface="D2Coding" panose="020B0609020101020101" pitchFamily="49" charset="-127"/>
               </a:rPr>
               <a:t>: </a:t>
             </a:r>
-            <a:r>
-              <a:rPr lang="ko-KR" altLang="en-US" sz="1600" dirty="0">
+          </a:p>
+          <a:p>
+            <a:pPr marL="1200150" lvl="2" indent="-285750">
+              <a:lnSpc>
+                <a:spcPct val="150000"/>
+              </a:lnSpc>
+              <a:buFont typeface="Wingdings" panose="05000000000000000000" pitchFamily="2" charset="2"/>
+              <a:buChar char="v"/>
+            </a:pPr>
+            <a:r>
+              <a:rPr lang="ko-KR" altLang="en-US" sz="1400" dirty="0">
                 <a:latin typeface="D2Coding" panose="020B0609020101020101" pitchFamily="49" charset="-127"/>
                 <a:ea typeface="D2Coding" panose="020B0609020101020101" pitchFamily="49" charset="-127"/>
               </a:rPr>
               <a:t>하나의 거대한 프롬프트로 모든 걸 해결하는 게 아니라</a:t>
             </a:r>
             <a:r>
-              <a:rPr lang="en-US" altLang="ko-KR" sz="1600" dirty="0">
+              <a:rPr lang="en-US" altLang="ko-KR" sz="1400" dirty="0">
                 <a:latin typeface="D2Coding" panose="020B0609020101020101" pitchFamily="49" charset="-127"/>
                 <a:ea typeface="D2Coding" panose="020B0609020101020101" pitchFamily="49" charset="-127"/>
               </a:rPr>
               <a:t>, '</a:t>
             </a:r>
             <a:r>
-              <a:rPr lang="ko-KR" altLang="en-US" sz="1600" dirty="0">
+              <a:rPr lang="ko-KR" altLang="en-US" sz="1400" dirty="0">
                 <a:latin typeface="D2Coding" panose="020B0609020101020101" pitchFamily="49" charset="-127"/>
                 <a:ea typeface="D2Coding" panose="020B0609020101020101" pitchFamily="49" charset="-127"/>
               </a:rPr>
               <a:t>기획 담당 프롬프트</a:t>
             </a:r>
             <a:r>
-              <a:rPr lang="en-US" altLang="ko-KR" sz="1600" dirty="0">
+              <a:rPr lang="en-US" altLang="ko-KR" sz="1400" dirty="0">
                 <a:latin typeface="D2Coding" panose="020B0609020101020101" pitchFamily="49" charset="-127"/>
                 <a:ea typeface="D2Coding" panose="020B0609020101020101" pitchFamily="49" charset="-127"/>
               </a:rPr>
               <a:t>', '</a:t>
             </a:r>
             <a:r>
-              <a:rPr lang="ko-KR" altLang="en-US" sz="1600" dirty="0">
+              <a:rPr lang="ko-KR" altLang="en-US" sz="1400" dirty="0">
                 <a:latin typeface="D2Coding" panose="020B0609020101020101" pitchFamily="49" charset="-127"/>
                 <a:ea typeface="D2Coding" panose="020B0609020101020101" pitchFamily="49" charset="-127"/>
               </a:rPr>
               <a:t>코드 작성 담당 프롬프트</a:t>
             </a:r>
             <a:r>
-              <a:rPr lang="en-US" altLang="ko-KR" sz="1600" dirty="0">
+              <a:rPr lang="en-US" altLang="ko-KR" sz="1400" dirty="0">
                 <a:latin typeface="D2Coding" panose="020B0609020101020101" pitchFamily="49" charset="-127"/>
                 <a:ea typeface="D2Coding" panose="020B0609020101020101" pitchFamily="49" charset="-127"/>
               </a:rPr>
               <a:t>', '</a:t>
             </a:r>
             <a:r>
-              <a:rPr lang="ko-KR" altLang="en-US" sz="1600" dirty="0">
+              <a:rPr lang="ko-KR" altLang="en-US" sz="1400" dirty="0">
                 <a:latin typeface="D2Coding" panose="020B0609020101020101" pitchFamily="49" charset="-127"/>
                 <a:ea typeface="D2Coding" panose="020B0609020101020101" pitchFamily="49" charset="-127"/>
               </a:rPr>
               <a:t>검토 담당 프롬프트</a:t>
             </a:r>
             <a:r>
-              <a:rPr lang="en-US" altLang="ko-KR" sz="1600" dirty="0">
+              <a:rPr lang="en-US" altLang="ko-KR" sz="1400" dirty="0">
                 <a:latin typeface="D2Coding" panose="020B0609020101020101" pitchFamily="49" charset="-127"/>
                 <a:ea typeface="D2Coding" panose="020B0609020101020101" pitchFamily="49" charset="-127"/>
               </a:rPr>
               <a:t>'</a:t>
             </a:r>
             <a:r>
-              <a:rPr lang="ko-KR" altLang="en-US" sz="1600" dirty="0">
+              <a:rPr lang="ko-KR" altLang="en-US" sz="1400" dirty="0">
                 <a:latin typeface="D2Coding" panose="020B0609020101020101" pitchFamily="49" charset="-127"/>
                 <a:ea typeface="D2Coding" panose="020B0609020101020101" pitchFamily="49" charset="-127"/>
               </a:rPr>
@@ -7927,14 +8709,388 @@
         </p:blipFill>
         <p:spPr>
           <a:xfrm>
-            <a:off x="1504633" y="2142975"/>
+            <a:off x="1771333" y="2899357"/>
             <a:ext cx="7315834" cy="3467400"/>
           </a:xfrm>
           <a:prstGeom prst="rect">
             <a:avLst/>
           </a:prstGeom>
+          <a:ln>
+            <a:solidFill>
+              <a:schemeClr val="tx1"/>
+            </a:solidFill>
+          </a:ln>
         </p:spPr>
       </p:pic>
+      <p:sp>
+        <p:nvSpPr>
+          <p:cNvPr id="8" name="설명선: 굽은 선 7">
+            <a:extLst>
+              <a:ext uri="{FF2B5EF4-FFF2-40B4-BE49-F238E27FC236}">
+                <a16:creationId xmlns:a16="http://schemas.microsoft.com/office/drawing/2014/main" id="{57A56424-C86F-FBDF-686F-0639D22A238A}"/>
+              </a:ext>
+            </a:extLst>
+          </p:cNvPr>
+          <p:cNvSpPr/>
+          <p:nvPr/>
+        </p:nvSpPr>
+        <p:spPr>
+          <a:xfrm>
+            <a:off x="3767137" y="1626538"/>
+            <a:ext cx="3324225" cy="727842"/>
+          </a:xfrm>
+          <a:prstGeom prst="borderCallout2">
+            <a:avLst>
+              <a:gd name="adj1" fmla="val 18750"/>
+              <a:gd name="adj2" fmla="val -8333"/>
+              <a:gd name="adj3" fmla="val 18750"/>
+              <a:gd name="adj4" fmla="val -16667"/>
+              <a:gd name="adj5" fmla="val 204106"/>
+              <a:gd name="adj6" fmla="val -9418"/>
+            </a:avLst>
+          </a:prstGeom>
+          <a:solidFill>
+            <a:schemeClr val="tx1"/>
+          </a:solidFill>
+          <a:ln>
+            <a:headEnd type="none" w="med" len="med"/>
+            <a:tailEnd type="triangle" w="med" len="med"/>
+          </a:ln>
+        </p:spPr>
+        <p:style>
+          <a:lnRef idx="2">
+            <a:schemeClr val="accent1">
+              <a:shade val="15000"/>
+            </a:schemeClr>
+          </a:lnRef>
+          <a:fillRef idx="1">
+            <a:schemeClr val="accent1"/>
+          </a:fillRef>
+          <a:effectRef idx="0">
+            <a:schemeClr val="accent1"/>
+          </a:effectRef>
+          <a:fontRef idx="minor">
+            <a:schemeClr val="lt1"/>
+          </a:fontRef>
+        </p:style>
+        <p:txBody>
+          <a:bodyPr rtlCol="0" anchor="ctr"/>
+          <a:lstStyle/>
+          <a:p>
+            <a:pPr algn="ctr"/>
+            <a:r>
+              <a:rPr lang="en-US" altLang="ko-KR" sz="1400" b="1" dirty="0">
+                <a:solidFill>
+                  <a:schemeClr val="bg1"/>
+                </a:solidFill>
+                <a:latin typeface="D2Coding" panose="020B0609020101020101" pitchFamily="49" charset="-127"/>
+                <a:ea typeface="D2Coding" panose="020B0609020101020101" pitchFamily="49" charset="-127"/>
+              </a:rPr>
+              <a:t>LLM </a:t>
+            </a:r>
+            <a:r>
+              <a:rPr lang="ko-KR" altLang="en-US" sz="1400" b="1" dirty="0">
+                <a:solidFill>
+                  <a:schemeClr val="bg1"/>
+                </a:solidFill>
+                <a:latin typeface="D2Coding" panose="020B0609020101020101" pitchFamily="49" charset="-127"/>
+                <a:ea typeface="D2Coding" panose="020B0609020101020101" pitchFamily="49" charset="-127"/>
+              </a:rPr>
+              <a:t>단 하나만</a:t>
+            </a:r>
+            <a:r>
+              <a:rPr lang="ko-KR" altLang="en-US" sz="1400" dirty="0">
+                <a:solidFill>
+                  <a:schemeClr val="bg1"/>
+                </a:solidFill>
+                <a:latin typeface="D2Coding" panose="020B0609020101020101" pitchFamily="49" charset="-127"/>
+                <a:ea typeface="D2Coding" panose="020B0609020101020101" pitchFamily="49" charset="-127"/>
+              </a:rPr>
+              <a:t> 받아서 자체 지식으로 답변</a:t>
+            </a:r>
+            <a:r>
+              <a:rPr lang="en-US" altLang="ko-KR" sz="1400" dirty="0">
+                <a:solidFill>
+                  <a:schemeClr val="bg1"/>
+                </a:solidFill>
+                <a:latin typeface="D2Coding" panose="020B0609020101020101" pitchFamily="49" charset="-127"/>
+                <a:ea typeface="D2Coding" panose="020B0609020101020101" pitchFamily="49" charset="-127"/>
+              </a:rPr>
+              <a:t>(Output)</a:t>
+            </a:r>
+            <a:r>
+              <a:rPr lang="ko-KR" altLang="en-US" sz="1400" dirty="0">
+                <a:solidFill>
+                  <a:schemeClr val="bg1"/>
+                </a:solidFill>
+                <a:latin typeface="D2Coding" panose="020B0609020101020101" pitchFamily="49" charset="-127"/>
+                <a:ea typeface="D2Coding" panose="020B0609020101020101" pitchFamily="49" charset="-127"/>
+              </a:rPr>
+              <a:t>을 바로 생성</a:t>
+            </a:r>
+          </a:p>
+        </p:txBody>
+      </p:sp>
+      <p:sp>
+        <p:nvSpPr>
+          <p:cNvPr id="10" name="설명선: 굽은 선 9">
+            <a:extLst>
+              <a:ext uri="{FF2B5EF4-FFF2-40B4-BE49-F238E27FC236}">
+                <a16:creationId xmlns:a16="http://schemas.microsoft.com/office/drawing/2014/main" id="{E6DD066C-CFAC-3900-11C5-6842997F9441}"/>
+              </a:ext>
+            </a:extLst>
+          </p:cNvPr>
+          <p:cNvSpPr/>
+          <p:nvPr/>
+        </p:nvSpPr>
+        <p:spPr>
+          <a:xfrm>
+            <a:off x="8048625" y="2207563"/>
+            <a:ext cx="3414178" cy="1011887"/>
+          </a:xfrm>
+          <a:prstGeom prst="borderCallout2">
+            <a:avLst>
+              <a:gd name="adj1" fmla="val 18750"/>
+              <a:gd name="adj2" fmla="val -8333"/>
+              <a:gd name="adj3" fmla="val 18750"/>
+              <a:gd name="adj4" fmla="val -16667"/>
+              <a:gd name="adj5" fmla="val 106852"/>
+              <a:gd name="adj6" fmla="val -55036"/>
+            </a:avLst>
+          </a:prstGeom>
+          <a:solidFill>
+            <a:schemeClr val="tx1"/>
+          </a:solidFill>
+          <a:ln>
+            <a:headEnd type="none" w="med" len="med"/>
+            <a:tailEnd type="triangle" w="med" len="med"/>
+          </a:ln>
+        </p:spPr>
+        <p:style>
+          <a:lnRef idx="2">
+            <a:schemeClr val="accent1">
+              <a:shade val="15000"/>
+            </a:schemeClr>
+          </a:lnRef>
+          <a:fillRef idx="1">
+            <a:schemeClr val="accent1"/>
+          </a:fillRef>
+          <a:effectRef idx="0">
+            <a:schemeClr val="accent1"/>
+          </a:effectRef>
+          <a:fontRef idx="minor">
+            <a:schemeClr val="lt1"/>
+          </a:fontRef>
+        </p:style>
+        <p:txBody>
+          <a:bodyPr rtlCol="0" anchor="ctr"/>
+          <a:lstStyle/>
+          <a:p>
+            <a:pPr algn="ctr"/>
+            <a:r>
+              <a:rPr lang="ko-KR" altLang="ko-KR" sz="1400" dirty="0">
+                <a:solidFill>
+                  <a:schemeClr val="bg1"/>
+                </a:solidFill>
+                <a:latin typeface="D2Coding" panose="020B0609020101020101" pitchFamily="49" charset="-127"/>
+                <a:ea typeface="D2Coding" panose="020B0609020101020101" pitchFamily="49" charset="-127"/>
+              </a:rPr>
+              <a:t>LLM 혼자 처리하지 않고, 검색 도구</a:t>
+            </a:r>
+            <a:r>
+              <a:rPr lang="ko-KR" altLang="en-US" sz="1400" dirty="0">
+                <a:solidFill>
+                  <a:schemeClr val="bg1"/>
+                </a:solidFill>
+                <a:latin typeface="D2Coding" panose="020B0609020101020101" pitchFamily="49" charset="-127"/>
+                <a:ea typeface="D2Coding" panose="020B0609020101020101" pitchFamily="49" charset="-127"/>
+              </a:rPr>
+              <a:t>　</a:t>
+            </a:r>
+            <a:r>
+              <a:rPr lang="ko-KR" altLang="ko-KR" sz="1400" dirty="0">
+                <a:solidFill>
+                  <a:schemeClr val="bg1"/>
+                </a:solidFill>
+                <a:latin typeface="D2Coding" panose="020B0609020101020101" pitchFamily="49" charset="-127"/>
+                <a:ea typeface="D2Coding" panose="020B0609020101020101" pitchFamily="49" charset="-127"/>
+              </a:rPr>
+              <a:t>(</a:t>
+            </a:r>
+            <a:r>
+              <a:rPr lang="ko-KR" altLang="ko-KR" sz="1400" dirty="0" err="1">
+                <a:solidFill>
+                  <a:schemeClr val="bg1"/>
+                </a:solidFill>
+                <a:latin typeface="D2Coding" panose="020B0609020101020101" pitchFamily="49" charset="-127"/>
+                <a:ea typeface="D2Coding" panose="020B0609020101020101" pitchFamily="49" charset="-127"/>
+              </a:rPr>
+              <a:t>Searcher</a:t>
+            </a:r>
+            <a:r>
+              <a:rPr lang="ko-KR" altLang="ko-KR" sz="1400" dirty="0">
+                <a:solidFill>
+                  <a:schemeClr val="bg1"/>
+                </a:solidFill>
+                <a:latin typeface="D2Coding" panose="020B0609020101020101" pitchFamily="49" charset="-127"/>
+                <a:ea typeface="D2Coding" panose="020B0609020101020101" pitchFamily="49" charset="-127"/>
+              </a:rPr>
+              <a:t>)라는 별도의 주체</a:t>
+            </a:r>
+            <a:r>
+              <a:rPr lang="ko-KR" altLang="en-US" sz="1400" dirty="0">
+                <a:solidFill>
+                  <a:schemeClr val="bg1"/>
+                </a:solidFill>
+                <a:latin typeface="D2Coding" panose="020B0609020101020101" pitchFamily="49" charset="-127"/>
+                <a:ea typeface="D2Coding" panose="020B0609020101020101" pitchFamily="49" charset="-127"/>
+              </a:rPr>
+              <a:t>　</a:t>
+            </a:r>
+            <a:r>
+              <a:rPr lang="ko-KR" altLang="ko-KR" sz="1400" dirty="0">
+                <a:solidFill>
+                  <a:schemeClr val="bg1"/>
+                </a:solidFill>
+                <a:latin typeface="D2Coding" panose="020B0609020101020101" pitchFamily="49" charset="-127"/>
+                <a:ea typeface="D2Coding" panose="020B0609020101020101" pitchFamily="49" charset="-127"/>
+              </a:rPr>
+              <a:t>(</a:t>
+            </a:r>
+            <a:r>
+              <a:rPr lang="ko-KR" altLang="ko-KR" sz="1400" dirty="0" err="1">
+                <a:solidFill>
+                  <a:schemeClr val="bg1"/>
+                </a:solidFill>
+                <a:latin typeface="D2Coding" panose="020B0609020101020101" pitchFamily="49" charset="-127"/>
+                <a:ea typeface="D2Coding" panose="020B0609020101020101" pitchFamily="49" charset="-127"/>
+              </a:rPr>
+              <a:t>Actor</a:t>
+            </a:r>
+            <a:r>
+              <a:rPr lang="ko-KR" altLang="ko-KR" sz="1400" dirty="0">
+                <a:solidFill>
+                  <a:schemeClr val="bg1"/>
+                </a:solidFill>
+                <a:latin typeface="D2Coding" panose="020B0609020101020101" pitchFamily="49" charset="-127"/>
+                <a:ea typeface="D2Coding" panose="020B0609020101020101" pitchFamily="49" charset="-127"/>
+              </a:rPr>
+              <a:t>/Tool)와 양방향</a:t>
+            </a:r>
+            <a:r>
+              <a:rPr lang="ko-KR" altLang="en-US" sz="1400" dirty="0">
+                <a:solidFill>
+                  <a:schemeClr val="bg1"/>
+                </a:solidFill>
+                <a:latin typeface="D2Coding" panose="020B0609020101020101" pitchFamily="49" charset="-127"/>
+                <a:ea typeface="D2Coding" panose="020B0609020101020101" pitchFamily="49" charset="-127"/>
+              </a:rPr>
+              <a:t>　</a:t>
+            </a:r>
+            <a:r>
+              <a:rPr lang="ko-KR" altLang="ko-KR" sz="1400" dirty="0">
+                <a:solidFill>
+                  <a:schemeClr val="bg1"/>
+                </a:solidFill>
+                <a:latin typeface="D2Coding" panose="020B0609020101020101" pitchFamily="49" charset="-127"/>
+                <a:ea typeface="D2Coding" panose="020B0609020101020101" pitchFamily="49" charset="-127"/>
+              </a:rPr>
+              <a:t>(LLM</a:t>
+            </a:r>
+            <a:r>
+              <a:rPr lang="ko-KR" altLang="en-US" sz="1400" dirty="0">
+                <a:solidFill>
+                  <a:schemeClr val="bg1"/>
+                </a:solidFill>
+                <a:latin typeface="D2Coding" panose="020B0609020101020101" pitchFamily="49" charset="-127"/>
+                <a:ea typeface="D2Coding" panose="020B0609020101020101" pitchFamily="49" charset="-127"/>
+              </a:rPr>
+              <a:t>：　</a:t>
+            </a:r>
+            <a:r>
+              <a:rPr lang="ko-KR" altLang="ko-KR" sz="1400" dirty="0" err="1">
+                <a:solidFill>
+                  <a:schemeClr val="bg1"/>
+                </a:solidFill>
+                <a:latin typeface="D2Coding" panose="020B0609020101020101" pitchFamily="49" charset="-127"/>
+                <a:ea typeface="D2Coding" panose="020B0609020101020101" pitchFamily="49" charset="-127"/>
+              </a:rPr>
+              <a:t>Searcher</a:t>
+            </a:r>
+            <a:r>
+              <a:rPr lang="ko-KR" altLang="ko-KR" sz="1400" dirty="0">
+                <a:solidFill>
+                  <a:schemeClr val="bg1"/>
+                </a:solidFill>
+                <a:latin typeface="D2Coding" panose="020B0609020101020101" pitchFamily="49" charset="-127"/>
+                <a:ea typeface="D2Coding" panose="020B0609020101020101" pitchFamily="49" charset="-127"/>
+              </a:rPr>
+              <a:t>)</a:t>
+            </a:r>
+            <a:r>
+              <a:rPr lang="ko-KR" altLang="ko-KR" sz="1400" dirty="0" err="1">
+                <a:solidFill>
+                  <a:schemeClr val="bg1"/>
+                </a:solidFill>
+                <a:latin typeface="D2Coding" panose="020B0609020101020101" pitchFamily="49" charset="-127"/>
+                <a:ea typeface="D2Coding" panose="020B0609020101020101" pitchFamily="49" charset="-127"/>
+              </a:rPr>
+              <a:t>으로</a:t>
+            </a:r>
+            <a:r>
+              <a:rPr lang="ko-KR" altLang="ko-KR" sz="1400" dirty="0">
+                <a:solidFill>
+                  <a:schemeClr val="bg1"/>
+                </a:solidFill>
+                <a:latin typeface="D2Coding" panose="020B0609020101020101" pitchFamily="49" charset="-127"/>
+                <a:ea typeface="D2Coding" panose="020B0609020101020101" pitchFamily="49" charset="-127"/>
+              </a:rPr>
+              <a:t> 통신하며 협업</a:t>
+            </a:r>
+          </a:p>
+        </p:txBody>
+      </p:sp>
+      <p:cxnSp>
+        <p:nvCxnSpPr>
+          <p:cNvPr id="12" name="직선 연결선 11">
+            <a:extLst>
+              <a:ext uri="{FF2B5EF4-FFF2-40B4-BE49-F238E27FC236}">
+                <a16:creationId xmlns:a16="http://schemas.microsoft.com/office/drawing/2014/main" id="{09273B3B-7926-13A0-62A0-7F4E00C14596}"/>
+              </a:ext>
+            </a:extLst>
+          </p:cNvPr>
+          <p:cNvCxnSpPr>
+            <a:cxnSpLocks/>
+          </p:cNvCxnSpPr>
+          <p:nvPr/>
+        </p:nvCxnSpPr>
+        <p:spPr>
+          <a:xfrm>
+            <a:off x="4724400" y="2971800"/>
+            <a:ext cx="0" cy="3067050"/>
+          </a:xfrm>
+          <a:prstGeom prst="line">
+            <a:avLst/>
+          </a:prstGeom>
+          <a:ln w="19050">
+            <a:prstDash val="solid"/>
+          </a:ln>
+        </p:spPr>
+        <p:style>
+          <a:lnRef idx="1">
+            <a:schemeClr val="dk1"/>
+          </a:lnRef>
+          <a:fillRef idx="0">
+            <a:schemeClr val="dk1"/>
+          </a:fillRef>
+          <a:effectRef idx="0">
+            <a:schemeClr val="dk1"/>
+          </a:effectRef>
+          <a:fontRef idx="minor">
+            <a:schemeClr val="tx1"/>
+          </a:fontRef>
+        </p:style>
+      </p:cxnSp>
     </p:spTree>
     <p:extLst>
       <p:ext uri="{BB962C8B-B14F-4D97-AF65-F5344CB8AC3E}">
@@ -8031,7 +9187,33 @@
                 <a:ea typeface="D2Coding" panose="020B0609020101020101" pitchFamily="49" charset="-127"/>
                 <a:cs typeface="Segoe UI Light" panose="020B0502040204020203" pitchFamily="34" charset="0"/>
               </a:rPr>
-              <a:t>Introducing LangGraph</a:t>
+              <a:t>Agentic</a:t>
+            </a:r>
+            <a:r>
+              <a:rPr lang="ko-KR" altLang="en-US" sz="2800" cap="none" dirty="0">
+                <a:solidFill>
+                  <a:schemeClr val="bg2">
+                    <a:lumMod val="25000"/>
+                  </a:schemeClr>
+                </a:solidFill>
+                <a:latin typeface="D2Coding" panose="020B0609020101020101" pitchFamily="49" charset="-127"/>
+                <a:ea typeface="D2Coding" panose="020B0609020101020101" pitchFamily="49" charset="-127"/>
+                <a:cs typeface="Segoe UI Light" panose="020B0502040204020203" pitchFamily="34" charset="0"/>
+              </a:rPr>
+              <a:t> </a:t>
+            </a:r>
+            <a:r>
+              <a:rPr lang="en-US" altLang="ko-KR" sz="2800" cap="none" dirty="0">
+                <a:solidFill>
+                  <a:schemeClr val="bg2">
+                    <a:lumMod val="25000"/>
+                  </a:schemeClr>
+                </a:solidFill>
+                <a:latin typeface="D2Coding" panose="020B0609020101020101" pitchFamily="49" charset="-127"/>
+                <a:ea typeface="D2Coding" panose="020B0609020101020101" pitchFamily="49" charset="-127"/>
+                <a:cs typeface="Segoe UI Light" panose="020B0502040204020203" pitchFamily="34" charset="0"/>
+              </a:rPr>
+              <a:t>Loop</a:t>
             </a:r>
             <a:endParaRPr lang="ko-KR" altLang="en-US" sz="2800" cap="none" dirty="0">
               <a:solidFill>
@@ -8099,19 +9281,41 @@
         </p:nvSpPr>
         <p:spPr>
           <a:xfrm>
-            <a:off x="6362700" y="1602063"/>
-            <a:ext cx="5343525" cy="4031873"/>
+            <a:off x="6343650" y="2800350"/>
+            <a:ext cx="5343525" cy="3046988"/>
           </a:xfrm>
           <a:prstGeom prst="rect">
             <a:avLst/>
           </a:prstGeom>
           <a:noFill/>
+          <a:ln>
+            <a:solidFill>
+              <a:schemeClr val="tx1"/>
+            </a:solidFill>
+          </a:ln>
         </p:spPr>
         <p:txBody>
           <a:bodyPr wrap="square">
             <a:spAutoFit/>
           </a:bodyPr>
           <a:lstStyle/>
+          <a:p>
+            <a:pPr marL="342900" indent="-342900">
+              <a:buFont typeface="+mj-lt"/>
+              <a:buAutoNum type="arabicPeriod"/>
+            </a:pPr>
+            <a:r>
+              <a:rPr lang="ko-KR" altLang="en-US" sz="1600" dirty="0">
+                <a:latin typeface="D2Coding" panose="020B0609020101020101" pitchFamily="49" charset="-127"/>
+                <a:ea typeface="D2Coding" panose="020B0609020101020101" pitchFamily="49" charset="-127"/>
+              </a:rPr>
+              <a:t>단순한 LLM 모델 하나만 사용</a:t>
+            </a:r>
+            <a:endParaRPr lang="en-US" altLang="ko-KR" sz="1600" dirty="0">
+              <a:latin typeface="D2Coding" panose="020B0609020101020101" pitchFamily="49" charset="-127"/>
+              <a:ea typeface="D2Coding" panose="020B0609020101020101" pitchFamily="49" charset="-127"/>
+            </a:endParaRPr>
+          </a:p>
           <a:p>
             <a:pPr marL="342900" indent="-342900">
               <a:buFont typeface="+mj-lt"/>
@@ -8127,14 +9331,7 @@
               <a:buFont typeface="+mj-lt"/>
               <a:buAutoNum type="arabicPeriod"/>
             </a:pPr>
-            <a:r>
-              <a:rPr lang="ko-KR" altLang="en-US" sz="1600" dirty="0">
-                <a:latin typeface="D2Coding" panose="020B0609020101020101" pitchFamily="49" charset="-127"/>
-                <a:ea typeface="D2Coding" panose="020B0609020101020101" pitchFamily="49" charset="-127"/>
-              </a:rPr>
-              <a:t>단순한 LLM 모델 하나만 사용</a:t>
-            </a:r>
-            <a:endParaRPr lang="en-US" altLang="ko-KR" sz="1600" dirty="0">
+            <a:endParaRPr lang="ko-KR" altLang="en-US" sz="1600" dirty="0">
               <a:latin typeface="D2Coding" panose="020B0609020101020101" pitchFamily="49" charset="-127"/>
               <a:ea typeface="D2Coding" panose="020B0609020101020101" pitchFamily="49" charset="-127"/>
             </a:endParaRPr>
@@ -8144,6 +9341,48 @@
               <a:buFont typeface="+mj-lt"/>
               <a:buAutoNum type="arabicPeriod"/>
             </a:pPr>
+            <a:r>
+              <a:rPr lang="en-US" altLang="ko-KR" sz="1600" dirty="0">
+                <a:latin typeface="D2Coding" panose="020B0609020101020101" pitchFamily="49" charset="-127"/>
+                <a:ea typeface="D2Coding" panose="020B0609020101020101" pitchFamily="49" charset="-127"/>
+              </a:rPr>
+              <a:t>LLM</a:t>
+            </a:r>
+            <a:r>
+              <a:rPr lang="ko-KR" altLang="en-US" sz="1600" dirty="0">
+                <a:latin typeface="D2Coding" panose="020B0609020101020101" pitchFamily="49" charset="-127"/>
+                <a:ea typeface="D2Coding" panose="020B0609020101020101" pitchFamily="49" charset="-127"/>
+              </a:rPr>
+              <a:t> </a:t>
+            </a:r>
+            <a:r>
+              <a:rPr lang="en-US" altLang="ko-KR" sz="1600" dirty="0">
+                <a:latin typeface="D2Coding" panose="020B0609020101020101" pitchFamily="49" charset="-127"/>
+                <a:ea typeface="D2Coding" panose="020B0609020101020101" pitchFamily="49" charset="-127"/>
+              </a:rPr>
+              <a:t>+</a:t>
+            </a:r>
+            <a:r>
+              <a:rPr lang="ko-KR" altLang="en-US" sz="1600" dirty="0">
+                <a:latin typeface="D2Coding" panose="020B0609020101020101" pitchFamily="49" charset="-127"/>
+                <a:ea typeface="D2Coding" panose="020B0609020101020101" pitchFamily="49" charset="-127"/>
+              </a:rPr>
+              <a:t> 프롬프트(</a:t>
+            </a:r>
+            <a:r>
+              <a:rPr lang="ko-KR" altLang="en-US" sz="1600" dirty="0" err="1">
+                <a:latin typeface="D2Coding" panose="020B0609020101020101" pitchFamily="49" charset="-127"/>
+                <a:ea typeface="D2Coding" panose="020B0609020101020101" pitchFamily="49" charset="-127"/>
+              </a:rPr>
+              <a:t>ChatPromptTemplate</a:t>
+            </a:r>
+            <a:r>
+              <a:rPr lang="ko-KR" altLang="en-US" sz="1600" dirty="0">
+                <a:latin typeface="D2Coding" panose="020B0609020101020101" pitchFamily="49" charset="-127"/>
+                <a:ea typeface="D2Coding" panose="020B0609020101020101" pitchFamily="49" charset="-127"/>
+              </a:rPr>
+              <a:t>)를 결합</a:t>
+            </a:r>
             <a:endParaRPr lang="en-US" altLang="ko-KR" sz="1600" dirty="0">
               <a:latin typeface="D2Coding" panose="020B0609020101020101" pitchFamily="49" charset="-127"/>
               <a:ea typeface="D2Coding" panose="020B0609020101020101" pitchFamily="49" charset="-127"/>
@@ -8179,121 +9418,29 @@
                 <a:latin typeface="D2Coding" panose="020B0609020101020101" pitchFamily="49" charset="-127"/>
                 <a:ea typeface="D2Coding" panose="020B0609020101020101" pitchFamily="49" charset="-127"/>
               </a:rPr>
-              <a:t>LLM</a:t>
+              <a:t>LLM + </a:t>
             </a:r>
             <a:r>
               <a:rPr lang="ko-KR" altLang="en-US" sz="1600" dirty="0">
                 <a:latin typeface="D2Coding" panose="020B0609020101020101" pitchFamily="49" charset="-127"/>
                 <a:ea typeface="D2Coding" panose="020B0609020101020101" pitchFamily="49" charset="-127"/>
               </a:rPr>
-              <a:t> </a:t>
-            </a:r>
-            <a:r>
-              <a:rPr lang="en-US" altLang="ko-KR" sz="1600" dirty="0">
-                <a:latin typeface="D2Coding" panose="020B0609020101020101" pitchFamily="49" charset="-127"/>
-                <a:ea typeface="D2Coding" panose="020B0609020101020101" pitchFamily="49" charset="-127"/>
-              </a:rPr>
-              <a:t>+</a:t>
+              <a:t>과거를 기억하도록 메모리(</a:t>
+            </a:r>
+            <a:r>
+              <a:rPr lang="ko-KR" altLang="en-US" sz="1600" dirty="0" err="1">
+                <a:latin typeface="D2Coding" panose="020B0609020101020101" pitchFamily="49" charset="-127"/>
+                <a:ea typeface="D2Coding" panose="020B0609020101020101" pitchFamily="49" charset="-127"/>
+              </a:rPr>
+              <a:t>ChatMessageHistory</a:t>
             </a:r>
             <a:r>
               <a:rPr lang="ko-KR" altLang="en-US" sz="1600" dirty="0">
                 <a:latin typeface="D2Coding" panose="020B0609020101020101" pitchFamily="49" charset="-127"/>
                 <a:ea typeface="D2Coding" panose="020B0609020101020101" pitchFamily="49" charset="-127"/>
               </a:rPr>
-              <a:t> 프롬프트(</a:t>
-            </a:r>
-            <a:r>
-              <a:rPr lang="ko-KR" altLang="en-US" sz="1600" dirty="0" err="1">
-                <a:latin typeface="D2Coding" panose="020B0609020101020101" pitchFamily="49" charset="-127"/>
-                <a:ea typeface="D2Coding" panose="020B0609020101020101" pitchFamily="49" charset="-127"/>
-              </a:rPr>
-              <a:t>ChatPromptTemplate</a:t>
-            </a:r>
-            <a:r>
-              <a:rPr lang="ko-KR" altLang="en-US" sz="1600" dirty="0">
-                <a:latin typeface="D2Coding" panose="020B0609020101020101" pitchFamily="49" charset="-127"/>
-                <a:ea typeface="D2Coding" panose="020B0609020101020101" pitchFamily="49" charset="-127"/>
-              </a:rPr>
-              <a:t>)를 결합</a:t>
-            </a:r>
-            <a:endParaRPr lang="en-US" altLang="ko-KR" sz="1600" dirty="0">
-              <a:latin typeface="D2Coding" panose="020B0609020101020101" pitchFamily="49" charset="-127"/>
-              <a:ea typeface="D2Coding" panose="020B0609020101020101" pitchFamily="49" charset="-127"/>
-            </a:endParaRPr>
-          </a:p>
-          <a:p>
-            <a:pPr marL="342900" indent="-342900">
-              <a:buFont typeface="+mj-lt"/>
-              <a:buAutoNum type="arabicPeriod"/>
-            </a:pPr>
-            <a:endParaRPr lang="en-US" altLang="ko-KR" sz="1600" dirty="0">
-              <a:latin typeface="D2Coding" panose="020B0609020101020101" pitchFamily="49" charset="-127"/>
-              <a:ea typeface="D2Coding" panose="020B0609020101020101" pitchFamily="49" charset="-127"/>
-            </a:endParaRPr>
-          </a:p>
-          <a:p>
-            <a:pPr marL="342900" indent="-342900">
-              <a:buFont typeface="+mj-lt"/>
-              <a:buAutoNum type="arabicPeriod"/>
-            </a:pPr>
-            <a:endParaRPr lang="ko-KR" altLang="en-US" sz="1600" dirty="0">
-              <a:latin typeface="D2Coding" panose="020B0609020101020101" pitchFamily="49" charset="-127"/>
-              <a:ea typeface="D2Coding" panose="020B0609020101020101" pitchFamily="49" charset="-127"/>
-            </a:endParaRPr>
-          </a:p>
-          <a:p>
-            <a:pPr marL="342900" indent="-342900">
-              <a:buFont typeface="+mj-lt"/>
-              <a:buAutoNum type="arabicPeriod"/>
-            </a:pPr>
-            <a:endParaRPr lang="ko-KR" altLang="en-US" sz="1600" dirty="0">
-              <a:latin typeface="D2Coding" panose="020B0609020101020101" pitchFamily="49" charset="-127"/>
-              <a:ea typeface="D2Coding" panose="020B0609020101020101" pitchFamily="49" charset="-127"/>
-            </a:endParaRPr>
-          </a:p>
-          <a:p>
-            <a:pPr marL="342900" indent="-342900">
-              <a:buFont typeface="+mj-lt"/>
-              <a:buAutoNum type="arabicPeriod"/>
-            </a:pPr>
-            <a:r>
-              <a:rPr lang="en-US" altLang="ko-KR" sz="1600" dirty="0">
-                <a:latin typeface="D2Coding" panose="020B0609020101020101" pitchFamily="49" charset="-127"/>
-                <a:ea typeface="D2Coding" panose="020B0609020101020101" pitchFamily="49" charset="-127"/>
-              </a:rPr>
-              <a:t>LLM + </a:t>
-            </a:r>
-            <a:r>
-              <a:rPr lang="ko-KR" altLang="en-US" sz="1600" dirty="0">
-                <a:latin typeface="D2Coding" panose="020B0609020101020101" pitchFamily="49" charset="-127"/>
-                <a:ea typeface="D2Coding" panose="020B0609020101020101" pitchFamily="49" charset="-127"/>
-              </a:rPr>
-              <a:t>과거를 기억하도록 메모리(</a:t>
-            </a:r>
-            <a:r>
-              <a:rPr lang="ko-KR" altLang="en-US" sz="1600" dirty="0" err="1">
-                <a:latin typeface="D2Coding" panose="020B0609020101020101" pitchFamily="49" charset="-127"/>
-                <a:ea typeface="D2Coding" panose="020B0609020101020101" pitchFamily="49" charset="-127"/>
-              </a:rPr>
-              <a:t>ChatMessageHistory</a:t>
-            </a:r>
-            <a:r>
-              <a:rPr lang="ko-KR" altLang="en-US" sz="1600" dirty="0">
-                <a:latin typeface="D2Coding" panose="020B0609020101020101" pitchFamily="49" charset="-127"/>
-                <a:ea typeface="D2Coding" panose="020B0609020101020101" pitchFamily="49" charset="-127"/>
-              </a:rPr>
               <a:t>) 빌딩 블록을 조합</a:t>
             </a:r>
-            <a:endParaRPr lang="en-US" altLang="ko-KR" sz="1600" dirty="0">
-              <a:latin typeface="D2Coding" panose="020B0609020101020101" pitchFamily="49" charset="-127"/>
-              <a:ea typeface="D2Coding" panose="020B0609020101020101" pitchFamily="49" charset="-127"/>
-            </a:endParaRPr>
-          </a:p>
-          <a:p>
-            <a:pPr marL="342900" indent="-342900">
-              <a:buFont typeface="+mj-lt"/>
-              <a:buAutoNum type="arabicPeriod"/>
-            </a:pPr>
             <a:endParaRPr lang="en-US" altLang="ko-KR" sz="1600" dirty="0">
               <a:latin typeface="D2Coding" panose="020B0609020101020101" pitchFamily="49" charset="-127"/>
               <a:ea typeface="D2Coding" panose="020B0609020101020101" pitchFamily="49" charset="-127"/>
@@ -8433,12 +9580,17 @@
         </p:blipFill>
         <p:spPr>
           <a:xfrm>
-            <a:off x="590233" y="1687788"/>
-            <a:ext cx="5772467" cy="4040727"/>
+            <a:off x="656909" y="2795348"/>
+            <a:ext cx="5115242" cy="3580669"/>
           </a:xfrm>
           <a:prstGeom prst="rect">
             <a:avLst/>
           </a:prstGeom>
+          <a:ln>
+            <a:solidFill>
+              <a:schemeClr val="tx1"/>
+            </a:solidFill>
+          </a:ln>
         </p:spPr>
       </p:pic>
       <p:cxnSp>
@@ -8455,7 +9607,7 @@
         </p:nvCxnSpPr>
         <p:spPr>
           <a:xfrm>
-            <a:off x="8401050" y="2238375"/>
+            <a:off x="10382250" y="3048000"/>
             <a:ext cx="0" cy="476250"/>
           </a:xfrm>
           <a:prstGeom prst="straightConnector1">
@@ -8494,7 +9646,7 @@
         </p:nvCxnSpPr>
         <p:spPr>
           <a:xfrm>
-            <a:off x="8401050" y="3267075"/>
+            <a:off x="10382250" y="4000500"/>
             <a:ext cx="0" cy="476250"/>
           </a:xfrm>
           <a:prstGeom prst="straightConnector1">
@@ -8533,7 +9685,7 @@
         </p:nvCxnSpPr>
         <p:spPr>
           <a:xfrm>
-            <a:off x="8401050" y="4514850"/>
+            <a:off x="10382250" y="4857750"/>
             <a:ext cx="0" cy="476250"/>
           </a:xfrm>
           <a:prstGeom prst="straightConnector1">
@@ -8558,6 +9710,415 @@
           </a:fontRef>
         </p:style>
       </p:cxnSp>
+      <p:sp>
+        <p:nvSpPr>
+          <p:cNvPr id="5" name="TextBox 4">
+            <a:extLst>
+              <a:ext uri="{FF2B5EF4-FFF2-40B4-BE49-F238E27FC236}">
+                <a16:creationId xmlns:a16="http://schemas.microsoft.com/office/drawing/2014/main" id="{1A12C1CA-7187-5AA3-3601-73ABA298D583}"/>
+              </a:ext>
+            </a:extLst>
+          </p:cNvPr>
+          <p:cNvSpPr txBox="1"/>
+          <p:nvPr/>
+        </p:nvSpPr>
+        <p:spPr>
+          <a:xfrm>
+            <a:off x="590232" y="1210576"/>
+            <a:ext cx="11268393" cy="1350498"/>
+          </a:xfrm>
+          <a:prstGeom prst="rect">
+            <a:avLst/>
+          </a:prstGeom>
+          <a:noFill/>
+        </p:spPr>
+        <p:txBody>
+          <a:bodyPr wrap="square">
+            <a:spAutoFit/>
+          </a:bodyPr>
+          <a:lstStyle/>
+          <a:p>
+            <a:pPr lvl="0" eaLnBrk="0" fontAlgn="base" hangingPunct="0">
+              <a:lnSpc>
+                <a:spcPct val="150000"/>
+              </a:lnSpc>
+              <a:spcBef>
+                <a:spcPct val="0"/>
+              </a:spcBef>
+              <a:spcAft>
+                <a:spcPct val="0"/>
+              </a:spcAft>
+            </a:pPr>
+            <a:r>
+              <a:rPr lang="ko-KR" altLang="ko-KR" sz="1400" dirty="0">
+                <a:latin typeface="D2Coding" panose="020B0609020101020101" pitchFamily="49" charset="-127"/>
+                <a:ea typeface="D2Coding" panose="020B0609020101020101" pitchFamily="49" charset="-127"/>
+              </a:rPr>
+              <a:t>사용자</a:t>
+            </a:r>
+            <a:r>
+              <a:rPr lang="en-US" altLang="ko-KR" sz="1400" dirty="0">
+                <a:latin typeface="D2Coding" panose="020B0609020101020101" pitchFamily="49" charset="-127"/>
+                <a:ea typeface="D2Coding" panose="020B0609020101020101" pitchFamily="49" charset="-127"/>
+              </a:rPr>
+              <a:t> prompt </a:t>
+            </a:r>
+            <a:r>
+              <a:rPr lang="ko-KR" altLang="ko-KR" sz="1400" dirty="0" err="1">
+                <a:latin typeface="D2Coding" panose="020B0609020101020101" pitchFamily="49" charset="-127"/>
+                <a:ea typeface="D2Coding" panose="020B0609020101020101" pitchFamily="49" charset="-127"/>
+              </a:rPr>
+              <a:t>Input</a:t>
+            </a:r>
+            <a:r>
+              <a:rPr lang="en-US" altLang="ko-KR" sz="1400" dirty="0">
+                <a:latin typeface="D2Coding" panose="020B0609020101020101" pitchFamily="49" charset="-127"/>
+                <a:ea typeface="D2Coding" panose="020B0609020101020101" pitchFamily="49" charset="-127"/>
+              </a:rPr>
+              <a:t> </a:t>
+            </a:r>
+            <a:r>
+              <a:rPr lang="en-US" altLang="ko-KR" sz="1400" dirty="0">
+                <a:latin typeface="D2Coding" panose="020B0609020101020101" pitchFamily="49" charset="-127"/>
+                <a:ea typeface="D2Coding" panose="020B0609020101020101" pitchFamily="49" charset="-127"/>
+                <a:sym typeface="Wingdings" panose="05000000000000000000" pitchFamily="2" charset="2"/>
+              </a:rPr>
+              <a:t> </a:t>
+            </a:r>
+            <a:r>
+              <a:rPr lang="ko-KR" altLang="ko-KR" sz="1400" dirty="0">
+                <a:latin typeface="D2Coding" panose="020B0609020101020101" pitchFamily="49" charset="-127"/>
+                <a:ea typeface="D2Coding" panose="020B0609020101020101" pitchFamily="49" charset="-127"/>
+              </a:rPr>
+              <a:t>LLM(1): 질문 분석</a:t>
+            </a:r>
+            <a:r>
+              <a:rPr lang="en-US" altLang="ko-KR" sz="1400" dirty="0">
+                <a:latin typeface="D2Coding" panose="020B0609020101020101" pitchFamily="49" charset="-127"/>
+                <a:ea typeface="D2Coding" panose="020B0609020101020101" pitchFamily="49" charset="-127"/>
+              </a:rPr>
+              <a:t>/</a:t>
+            </a:r>
+            <a:r>
+              <a:rPr lang="ko-KR" altLang="ko-KR" sz="1400" dirty="0">
+                <a:latin typeface="D2Coding" panose="020B0609020101020101" pitchFamily="49" charset="-127"/>
+                <a:ea typeface="D2Coding" panose="020B0609020101020101" pitchFamily="49" charset="-127"/>
+              </a:rPr>
+              <a:t>스스로 답변할 수 없다고 판단하여 </a:t>
+            </a:r>
+            <a:r>
+              <a:rPr lang="ko-KR" altLang="ko-KR" sz="1400" dirty="0" err="1">
+                <a:latin typeface="D2Coding" panose="020B0609020101020101" pitchFamily="49" charset="-127"/>
+                <a:ea typeface="D2Coding" panose="020B0609020101020101" pitchFamily="49" charset="-127"/>
+              </a:rPr>
+              <a:t>Searcher</a:t>
+            </a:r>
+            <a:r>
+              <a:rPr lang="ko-KR" altLang="ko-KR" sz="1400" dirty="0">
+                <a:latin typeface="D2Coding" panose="020B0609020101020101" pitchFamily="49" charset="-127"/>
+                <a:ea typeface="D2Coding" panose="020B0609020101020101" pitchFamily="49" charset="-127"/>
+              </a:rPr>
+              <a:t>(1)에 필요한 키워드로 검색 요청</a:t>
+            </a:r>
+            <a:r>
+              <a:rPr lang="en-US" altLang="ko-KR" sz="1400" dirty="0">
+                <a:latin typeface="D2Coding" panose="020B0609020101020101" pitchFamily="49" charset="-127"/>
+                <a:ea typeface="D2Coding" panose="020B0609020101020101" pitchFamily="49" charset="-127"/>
+              </a:rPr>
+              <a:t> </a:t>
+            </a:r>
+            <a:r>
+              <a:rPr lang="en-US" altLang="ko-KR" sz="1400" dirty="0">
+                <a:latin typeface="D2Coding" panose="020B0609020101020101" pitchFamily="49" charset="-127"/>
+                <a:ea typeface="D2Coding" panose="020B0609020101020101" pitchFamily="49" charset="-127"/>
+                <a:sym typeface="Wingdings" panose="05000000000000000000" pitchFamily="2" charset="2"/>
+              </a:rPr>
+              <a:t> </a:t>
+            </a:r>
+            <a:r>
+              <a:rPr lang="ko-KR" altLang="ko-KR" sz="1400" dirty="0" err="1">
+                <a:latin typeface="D2Coding" panose="020B0609020101020101" pitchFamily="49" charset="-127"/>
+                <a:ea typeface="D2Coding" panose="020B0609020101020101" pitchFamily="49" charset="-127"/>
+              </a:rPr>
+              <a:t>Searcher</a:t>
+            </a:r>
+            <a:r>
+              <a:rPr lang="ko-KR" altLang="ko-KR" sz="1400" dirty="0">
+                <a:latin typeface="D2Coding" panose="020B0609020101020101" pitchFamily="49" charset="-127"/>
+                <a:ea typeface="D2Coding" panose="020B0609020101020101" pitchFamily="49" charset="-127"/>
+              </a:rPr>
+              <a:t>(1): 외</a:t>
+            </a:r>
+            <a:r>
+              <a:rPr lang="ko-KR" altLang="en-US" sz="1400" dirty="0">
+                <a:latin typeface="D2Coding" panose="020B0609020101020101" pitchFamily="49" charset="-127"/>
+                <a:ea typeface="D2Coding" panose="020B0609020101020101" pitchFamily="49" charset="-127"/>
+              </a:rPr>
+              <a:t>부에서</a:t>
+            </a:r>
+            <a:r>
+              <a:rPr lang="en-US" altLang="ko-KR" sz="1400" dirty="0">
+                <a:latin typeface="D2Coding" panose="020B0609020101020101" pitchFamily="49" charset="-127"/>
+                <a:ea typeface="D2Coding" panose="020B0609020101020101" pitchFamily="49" charset="-127"/>
+              </a:rPr>
+              <a:t> </a:t>
+            </a:r>
+            <a:r>
+              <a:rPr lang="ko-KR" altLang="ko-KR" sz="1400" dirty="0">
+                <a:latin typeface="D2Coding" panose="020B0609020101020101" pitchFamily="49" charset="-127"/>
+                <a:ea typeface="D2Coding" panose="020B0609020101020101" pitchFamily="49" charset="-127"/>
+              </a:rPr>
+              <a:t>정보를 찾아 </a:t>
+            </a:r>
+            <a:r>
+              <a:rPr lang="ko-KR" altLang="ko-KR" sz="1400" dirty="0" err="1">
+                <a:latin typeface="D2Coding" panose="020B0609020101020101" pitchFamily="49" charset="-127"/>
+                <a:ea typeface="D2Coding" panose="020B0609020101020101" pitchFamily="49" charset="-127"/>
+              </a:rPr>
+              <a:t>LLM에</a:t>
+            </a:r>
+            <a:r>
+              <a:rPr lang="ko-KR" altLang="ko-KR" sz="1400" dirty="0">
+                <a:latin typeface="D2Coding" panose="020B0609020101020101" pitchFamily="49" charset="-127"/>
+                <a:ea typeface="D2Coding" panose="020B0609020101020101" pitchFamily="49" charset="-127"/>
+              </a:rPr>
+              <a:t> 전달</a:t>
+            </a:r>
+            <a:r>
+              <a:rPr lang="en-US" altLang="ko-KR" sz="1400" dirty="0">
+                <a:latin typeface="D2Coding" panose="020B0609020101020101" pitchFamily="49" charset="-127"/>
+                <a:ea typeface="D2Coding" panose="020B0609020101020101" pitchFamily="49" charset="-127"/>
+              </a:rPr>
+              <a:t> </a:t>
+            </a:r>
+            <a:r>
+              <a:rPr lang="en-US" altLang="ko-KR" sz="1400" dirty="0">
+                <a:latin typeface="D2Coding" panose="020B0609020101020101" pitchFamily="49" charset="-127"/>
+                <a:ea typeface="D2Coding" panose="020B0609020101020101" pitchFamily="49" charset="-127"/>
+                <a:sym typeface="Wingdings" panose="05000000000000000000" pitchFamily="2" charset="2"/>
+              </a:rPr>
+              <a:t> </a:t>
+            </a:r>
+            <a:r>
+              <a:rPr lang="ko-KR" altLang="ko-KR" sz="1400" dirty="0">
+                <a:latin typeface="D2Coding" panose="020B0609020101020101" pitchFamily="49" charset="-127"/>
+                <a:ea typeface="D2Coding" panose="020B0609020101020101" pitchFamily="49" charset="-127"/>
+              </a:rPr>
+              <a:t>LLM(2): 전달받은 1차 검색 결과 "이 정보만으로는 부족하니 한 번 더 </a:t>
+            </a:r>
+            <a:r>
+              <a:rPr lang="ko-KR" altLang="en-US" sz="1400" dirty="0">
+                <a:latin typeface="D2Coding" panose="020B0609020101020101" pitchFamily="49" charset="-127"/>
+                <a:ea typeface="D2Coding" panose="020B0609020101020101" pitchFamily="49" charset="-127"/>
+              </a:rPr>
+              <a:t>검색</a:t>
+            </a:r>
+            <a:r>
+              <a:rPr lang="ko-KR" altLang="ko-KR" sz="1400" dirty="0">
+                <a:latin typeface="D2Coding" panose="020B0609020101020101" pitchFamily="49" charset="-127"/>
+                <a:ea typeface="D2Coding" panose="020B0609020101020101" pitchFamily="49" charset="-127"/>
+              </a:rPr>
+              <a:t>“</a:t>
+            </a:r>
+            <a:r>
+              <a:rPr lang="en-US" altLang="ko-KR" sz="1400" dirty="0">
+                <a:latin typeface="D2Coding" panose="020B0609020101020101" pitchFamily="49" charset="-127"/>
+                <a:ea typeface="D2Coding" panose="020B0609020101020101" pitchFamily="49" charset="-127"/>
+              </a:rPr>
+              <a:t> </a:t>
+            </a:r>
+            <a:r>
+              <a:rPr lang="ko-KR" altLang="ko-KR" sz="1400" dirty="0">
+                <a:latin typeface="D2Coding" panose="020B0609020101020101" pitchFamily="49" charset="-127"/>
+                <a:ea typeface="D2Coding" panose="020B0609020101020101" pitchFamily="49" charset="-127"/>
+              </a:rPr>
+              <a:t>판단하여 </a:t>
+            </a:r>
+            <a:r>
+              <a:rPr lang="ko-KR" altLang="ko-KR" sz="1400" dirty="0" err="1">
+                <a:latin typeface="D2Coding" panose="020B0609020101020101" pitchFamily="49" charset="-127"/>
+                <a:ea typeface="D2Coding" panose="020B0609020101020101" pitchFamily="49" charset="-127"/>
+              </a:rPr>
+              <a:t>Searcher</a:t>
+            </a:r>
+            <a:r>
+              <a:rPr lang="ko-KR" altLang="ko-KR" sz="1400" dirty="0">
+                <a:latin typeface="D2Coding" panose="020B0609020101020101" pitchFamily="49" charset="-127"/>
+                <a:ea typeface="D2Coding" panose="020B0609020101020101" pitchFamily="49" charset="-127"/>
+              </a:rPr>
+              <a:t>(2)를 </a:t>
+            </a:r>
+            <a:r>
+              <a:rPr lang="ko-KR" altLang="en-US" sz="1400" dirty="0">
+                <a:latin typeface="D2Coding" panose="020B0609020101020101" pitchFamily="49" charset="-127"/>
+                <a:ea typeface="D2Coding" panose="020B0609020101020101" pitchFamily="49" charset="-127"/>
+              </a:rPr>
+              <a:t>재</a:t>
+            </a:r>
+            <a:r>
+              <a:rPr lang="ko-KR" altLang="ko-KR" sz="1400" dirty="0">
+                <a:latin typeface="D2Coding" panose="020B0609020101020101" pitchFamily="49" charset="-127"/>
+                <a:ea typeface="D2Coding" panose="020B0609020101020101" pitchFamily="49" charset="-127"/>
+              </a:rPr>
+              <a:t> </a:t>
+            </a:r>
+            <a:r>
+              <a:rPr lang="ko-KR" altLang="en-US" sz="1400" dirty="0">
+                <a:latin typeface="D2Coding" panose="020B0609020101020101" pitchFamily="49" charset="-127"/>
+                <a:ea typeface="D2Coding" panose="020B0609020101020101" pitchFamily="49" charset="-127"/>
+              </a:rPr>
+              <a:t>호출 </a:t>
+            </a:r>
+            <a:r>
+              <a:rPr lang="en-US" altLang="ko-KR" sz="1400" dirty="0">
+                <a:latin typeface="D2Coding" panose="020B0609020101020101" pitchFamily="49" charset="-127"/>
+                <a:ea typeface="D2Coding" panose="020B0609020101020101" pitchFamily="49" charset="-127"/>
+                <a:sym typeface="Wingdings" panose="05000000000000000000" pitchFamily="2" charset="2"/>
+              </a:rPr>
+              <a:t> </a:t>
+            </a:r>
+            <a:r>
+              <a:rPr lang="ko-KR" altLang="ko-KR" sz="1400" dirty="0" err="1">
+                <a:latin typeface="D2Coding" panose="020B0609020101020101" pitchFamily="49" charset="-127"/>
+                <a:ea typeface="D2Coding" panose="020B0609020101020101" pitchFamily="49" charset="-127"/>
+              </a:rPr>
+              <a:t>Searcher</a:t>
+            </a:r>
+            <a:r>
+              <a:rPr lang="ko-KR" altLang="ko-KR" sz="1400" dirty="0">
+                <a:latin typeface="D2Coding" panose="020B0609020101020101" pitchFamily="49" charset="-127"/>
+                <a:ea typeface="D2Coding" panose="020B0609020101020101" pitchFamily="49" charset="-127"/>
+              </a:rPr>
+              <a:t>(2): 추가 정보</a:t>
+            </a:r>
+            <a:r>
+              <a:rPr lang="en-US" altLang="ko-KR" sz="1400" dirty="0">
+                <a:latin typeface="D2Coding" panose="020B0609020101020101" pitchFamily="49" charset="-127"/>
+                <a:ea typeface="D2Coding" panose="020B0609020101020101" pitchFamily="49" charset="-127"/>
+              </a:rPr>
+              <a:t> </a:t>
+            </a:r>
+            <a:r>
+              <a:rPr lang="ko-KR" altLang="en-US" sz="1400" dirty="0">
+                <a:latin typeface="D2Coding" panose="020B0609020101020101" pitchFamily="49" charset="-127"/>
+                <a:ea typeface="D2Coding" panose="020B0609020101020101" pitchFamily="49" charset="-127"/>
+              </a:rPr>
+              <a:t>검색</a:t>
+            </a:r>
+            <a:r>
+              <a:rPr lang="en-US" altLang="ko-KR" sz="1400" dirty="0">
+                <a:latin typeface="D2Coding" panose="020B0609020101020101" pitchFamily="49" charset="-127"/>
+                <a:ea typeface="D2Coding" panose="020B0609020101020101" pitchFamily="49" charset="-127"/>
+              </a:rPr>
+              <a:t>/</a:t>
+            </a:r>
+            <a:r>
+              <a:rPr lang="ko-KR" altLang="ko-KR" sz="1400" dirty="0">
+                <a:latin typeface="D2Coding" panose="020B0609020101020101" pitchFamily="49" charset="-127"/>
+                <a:ea typeface="D2Coding" panose="020B0609020101020101" pitchFamily="49" charset="-127"/>
+              </a:rPr>
+              <a:t>다시 </a:t>
+            </a:r>
+            <a:r>
+              <a:rPr lang="ko-KR" altLang="ko-KR" sz="1400" dirty="0" err="1">
+                <a:latin typeface="D2Coding" panose="020B0609020101020101" pitchFamily="49" charset="-127"/>
+                <a:ea typeface="D2Coding" panose="020B0609020101020101" pitchFamily="49" charset="-127"/>
+              </a:rPr>
+              <a:t>LLM에</a:t>
+            </a:r>
+            <a:r>
+              <a:rPr lang="ko-KR" altLang="ko-KR" sz="1400" dirty="0">
+                <a:latin typeface="D2Coding" panose="020B0609020101020101" pitchFamily="49" charset="-127"/>
+                <a:ea typeface="D2Coding" panose="020B0609020101020101" pitchFamily="49" charset="-127"/>
+              </a:rPr>
+              <a:t> 제공</a:t>
+            </a:r>
+            <a:r>
+              <a:rPr lang="en-US" altLang="ko-KR" sz="1400" dirty="0">
+                <a:latin typeface="D2Coding" panose="020B0609020101020101" pitchFamily="49" charset="-127"/>
+                <a:ea typeface="D2Coding" panose="020B0609020101020101" pitchFamily="49" charset="-127"/>
+              </a:rPr>
+              <a:t> </a:t>
+            </a:r>
+            <a:r>
+              <a:rPr lang="en-US" altLang="ko-KR" sz="1400" dirty="0">
+                <a:latin typeface="D2Coding" panose="020B0609020101020101" pitchFamily="49" charset="-127"/>
+                <a:ea typeface="D2Coding" panose="020B0609020101020101" pitchFamily="49" charset="-127"/>
+                <a:sym typeface="Wingdings" panose="05000000000000000000" pitchFamily="2" charset="2"/>
+              </a:rPr>
+              <a:t> </a:t>
+            </a:r>
+            <a:r>
+              <a:rPr lang="ko-KR" altLang="ko-KR" sz="1400" dirty="0">
+                <a:latin typeface="D2Coding" panose="020B0609020101020101" pitchFamily="49" charset="-127"/>
+                <a:ea typeface="D2Coding" panose="020B0609020101020101" pitchFamily="49" charset="-127"/>
+              </a:rPr>
+              <a:t>LLM(3): 수집된 전체 정보를 정리하여 최종 </a:t>
+            </a:r>
+            <a:r>
+              <a:rPr lang="ko-KR" altLang="en-US" sz="1400" dirty="0" err="1">
+                <a:latin typeface="D2Coding" panose="020B0609020101020101" pitchFamily="49" charset="-127"/>
+                <a:ea typeface="D2Coding" panose="020B0609020101020101" pitchFamily="49" charset="-127"/>
+              </a:rPr>
+              <a:t>최종</a:t>
+            </a:r>
+            <a:r>
+              <a:rPr lang="ko-KR" altLang="en-US" sz="1400" dirty="0">
+                <a:latin typeface="D2Coding" panose="020B0609020101020101" pitchFamily="49" charset="-127"/>
+                <a:ea typeface="D2Coding" panose="020B0609020101020101" pitchFamily="49" charset="-127"/>
+              </a:rPr>
+              <a:t> </a:t>
+            </a:r>
+            <a:r>
+              <a:rPr lang="ko-KR" altLang="ko-KR" sz="1400" dirty="0">
+                <a:latin typeface="D2Coding" panose="020B0609020101020101" pitchFamily="49" charset="-127"/>
+                <a:ea typeface="D2Coding" panose="020B0609020101020101" pitchFamily="49" charset="-127"/>
+              </a:rPr>
+              <a:t>답변을 생성</a:t>
+            </a:r>
+            <a:r>
+              <a:rPr lang="en-US" altLang="ko-KR" sz="1400" dirty="0">
+                <a:latin typeface="D2Coding" panose="020B0609020101020101" pitchFamily="49" charset="-127"/>
+                <a:ea typeface="D2Coding" panose="020B0609020101020101" pitchFamily="49" charset="-127"/>
+              </a:rPr>
+              <a:t> </a:t>
+            </a:r>
+            <a:r>
+              <a:rPr lang="en-US" altLang="ko-KR" sz="1400" dirty="0">
+                <a:latin typeface="D2Coding" panose="020B0609020101020101" pitchFamily="49" charset="-127"/>
+                <a:ea typeface="D2Coding" panose="020B0609020101020101" pitchFamily="49" charset="-127"/>
+                <a:sym typeface="Wingdings" panose="05000000000000000000" pitchFamily="2" charset="2"/>
+              </a:rPr>
+              <a:t> </a:t>
+            </a:r>
+            <a:r>
+              <a:rPr lang="ko-KR" altLang="ko-KR" sz="1400" dirty="0">
+                <a:latin typeface="D2Coding" panose="020B0609020101020101" pitchFamily="49" charset="-127"/>
+                <a:ea typeface="D2Coding" panose="020B0609020101020101" pitchFamily="49" charset="-127"/>
+              </a:rPr>
+              <a:t>사용자에게 </a:t>
+            </a:r>
+            <a:r>
+              <a:rPr lang="en-US" altLang="ko-KR" sz="1400" dirty="0">
+                <a:latin typeface="D2Coding" panose="020B0609020101020101" pitchFamily="49" charset="-127"/>
+                <a:ea typeface="D2Coding" panose="020B0609020101020101" pitchFamily="49" charset="-127"/>
+              </a:rPr>
+              <a:t>Output</a:t>
+            </a:r>
+            <a:r>
+              <a:rPr lang="ko-KR" altLang="ko-KR" sz="1400" dirty="0">
+                <a:latin typeface="D2Coding" panose="020B0609020101020101" pitchFamily="49" charset="-127"/>
+                <a:ea typeface="D2Coding" panose="020B0609020101020101" pitchFamily="49" charset="-127"/>
+              </a:rPr>
+              <a:t>를 반환 </a:t>
+            </a:r>
+            <a:endParaRPr lang="ko-KR" altLang="en-US" sz="1400" dirty="0">
+              <a:latin typeface="D2Coding" panose="020B0609020101020101" pitchFamily="49" charset="-127"/>
+              <a:ea typeface="D2Coding" panose="020B0609020101020101" pitchFamily="49" charset="-127"/>
+            </a:endParaRPr>
+          </a:p>
+        </p:txBody>
+      </p:sp>
     </p:spTree>
     <p:extLst>
       <p:ext uri="{BB962C8B-B14F-4D97-AF65-F5344CB8AC3E}">
@@ -8916,7 +10477,7 @@
                 <a:latin typeface="D2Coding" panose="020B0609020101020101" pitchFamily="49" charset="-127"/>
                 <a:ea typeface="D2Coding" panose="020B0609020101020101" pitchFamily="49" charset="-127"/>
               </a:rPr>
-              <a:t>(State)＇</a:t>
+              <a:t>(State)’</a:t>
             </a:r>
             <a:r>
               <a:rPr lang="ko-KR" altLang="en-US" sz="1400" dirty="0">
@@ -8987,132 +10548,6 @@
               <a:t>Workflow Architecture</a:t>
             </a:r>
             <a:endParaRPr lang="ko-KR" altLang="en-US" sz="1400" dirty="0">
-              <a:latin typeface="D2Coding" panose="020B0609020101020101" pitchFamily="49" charset="-127"/>
-              <a:ea typeface="D2Coding" panose="020B0609020101020101" pitchFamily="49" charset="-127"/>
-            </a:endParaRPr>
-          </a:p>
-        </p:txBody>
-      </p:sp>
-      <p:sp>
-        <p:nvSpPr>
-          <p:cNvPr id="9" name="TextBox 8">
-            <a:extLst>
-              <a:ext uri="{FF2B5EF4-FFF2-40B4-BE49-F238E27FC236}">
-                <a16:creationId xmlns:a16="http://schemas.microsoft.com/office/drawing/2014/main" id="{ED0DC966-5850-80AC-157B-52AEE7FB0F77}"/>
-              </a:ext>
-            </a:extLst>
-          </p:cNvPr>
-          <p:cNvSpPr txBox="1"/>
-          <p:nvPr/>
-        </p:nvSpPr>
-        <p:spPr>
-          <a:xfrm>
-            <a:off x="6886573" y="1938037"/>
-            <a:ext cx="904875" cy="338554"/>
-          </a:xfrm>
-          <a:prstGeom prst="rect">
-            <a:avLst/>
-          </a:prstGeom>
-          <a:noFill/>
-        </p:spPr>
-        <p:txBody>
-          <a:bodyPr wrap="square">
-            <a:spAutoFit/>
-          </a:bodyPr>
-          <a:lstStyle/>
-          <a:p>
-            <a:r>
-              <a:rPr lang="en-US" altLang="ko-KR" sz="1600" b="1" i="1" dirty="0">
-                <a:latin typeface="D2Coding" panose="020B0609020101020101" pitchFamily="49" charset="-127"/>
-                <a:ea typeface="D2Coding" panose="020B0609020101020101" pitchFamily="49" charset="-127"/>
-              </a:rPr>
-              <a:t>State</a:t>
-            </a:r>
-            <a:endParaRPr lang="ko-KR" altLang="en-US" sz="1600" b="1" i="1" dirty="0">
-              <a:latin typeface="D2Coding" panose="020B0609020101020101" pitchFamily="49" charset="-127"/>
-              <a:ea typeface="D2Coding" panose="020B0609020101020101" pitchFamily="49" charset="-127"/>
-            </a:endParaRPr>
-          </a:p>
-        </p:txBody>
-      </p:sp>
-      <p:sp>
-        <p:nvSpPr>
-          <p:cNvPr id="10" name="TextBox 9">
-            <a:extLst>
-              <a:ext uri="{FF2B5EF4-FFF2-40B4-BE49-F238E27FC236}">
-                <a16:creationId xmlns:a16="http://schemas.microsoft.com/office/drawing/2014/main" id="{830A80DC-2ED2-15DC-4C6C-DBBB057BD161}"/>
-              </a:ext>
-            </a:extLst>
-          </p:cNvPr>
-          <p:cNvSpPr txBox="1"/>
-          <p:nvPr/>
-        </p:nvSpPr>
-        <p:spPr>
-          <a:xfrm>
-            <a:off x="5838825" y="2434947"/>
-            <a:ext cx="904875" cy="338554"/>
-          </a:xfrm>
-          <a:prstGeom prst="rect">
-            <a:avLst/>
-          </a:prstGeom>
-          <a:noFill/>
-        </p:spPr>
-        <p:txBody>
-          <a:bodyPr wrap="square">
-            <a:spAutoFit/>
-          </a:bodyPr>
-          <a:lstStyle/>
-          <a:p>
-            <a:r>
-              <a:rPr lang="en-US" altLang="ko-KR" sz="1600" b="1" i="1" dirty="0">
-                <a:latin typeface="D2Coding" panose="020B0609020101020101" pitchFamily="49" charset="-127"/>
-                <a:ea typeface="D2Coding" panose="020B0609020101020101" pitchFamily="49" charset="-127"/>
-              </a:rPr>
-              <a:t>Nodes</a:t>
-            </a:r>
-            <a:endParaRPr lang="ko-KR" altLang="en-US" sz="1600" b="1" i="1" dirty="0">
-              <a:latin typeface="D2Coding" panose="020B0609020101020101" pitchFamily="49" charset="-127"/>
-              <a:ea typeface="D2Coding" panose="020B0609020101020101" pitchFamily="49" charset="-127"/>
-            </a:endParaRPr>
-          </a:p>
-        </p:txBody>
-      </p:sp>
-      <p:sp>
-        <p:nvSpPr>
-          <p:cNvPr id="13" name="TextBox 12">
-            <a:extLst>
-              <a:ext uri="{FF2B5EF4-FFF2-40B4-BE49-F238E27FC236}">
-                <a16:creationId xmlns:a16="http://schemas.microsoft.com/office/drawing/2014/main" id="{CBA3384B-11C4-9E88-D86B-4AA39B1F63D5}"/>
-              </a:ext>
-            </a:extLst>
-          </p:cNvPr>
-          <p:cNvSpPr txBox="1"/>
-          <p:nvPr/>
-        </p:nvSpPr>
-        <p:spPr>
-          <a:xfrm>
-            <a:off x="6886574" y="2434947"/>
-            <a:ext cx="904875" cy="338554"/>
-          </a:xfrm>
-          <a:prstGeom prst="rect">
-            <a:avLst/>
-          </a:prstGeom>
-          <a:noFill/>
-        </p:spPr>
-        <p:txBody>
-          <a:bodyPr wrap="square">
-            <a:spAutoFit/>
-          </a:bodyPr>
-          <a:lstStyle/>
-          <a:p>
-            <a:r>
-              <a:rPr lang="en-US" altLang="ko-KR" sz="1600" b="1" i="1" dirty="0">
-                <a:latin typeface="D2Coding" panose="020B0609020101020101" pitchFamily="49" charset="-127"/>
-                <a:ea typeface="D2Coding" panose="020B0609020101020101" pitchFamily="49" charset="-127"/>
-              </a:rPr>
-              <a:t>Edges</a:t>
-            </a:r>
-            <a:endParaRPr lang="ko-KR" altLang="en-US" sz="1600" b="1" i="1" dirty="0">
               <a:latin typeface="D2Coding" panose="020B0609020101020101" pitchFamily="49" charset="-127"/>
               <a:ea typeface="D2Coding" panose="020B0609020101020101" pitchFamily="49" charset="-127"/>
             </a:endParaRPr>
@@ -9737,7 +11172,7 @@
         </p:nvSpPr>
         <p:spPr>
           <a:xfrm>
-            <a:off x="1281573" y="4265994"/>
+            <a:off x="569827" y="4649733"/>
             <a:ext cx="904875" cy="338554"/>
           </a:xfrm>
           <a:prstGeom prst="rect">
@@ -9775,8 +11210,8 @@
         </p:nvSpPr>
         <p:spPr>
           <a:xfrm>
-            <a:off x="1800698" y="4739271"/>
-            <a:ext cx="7457602" cy="1351973"/>
+            <a:off x="1810222" y="4739271"/>
+            <a:ext cx="8781577" cy="1351973"/>
           </a:xfrm>
           <a:prstGeom prst="rect">
             <a:avLst/>
@@ -9981,17 +11416,6 @@
               </a:rPr>
               <a:t>함수</a:t>
             </a:r>
-            <a:r>
-              <a:rPr lang="en-US" altLang="ko-KR" sz="1400" dirty="0">
-                <a:latin typeface="D2Coding" panose="020B0609020101020101" pitchFamily="49" charset="-127"/>
-                <a:ea typeface="D2Coding" panose="020B0609020101020101" pitchFamily="49" charset="-127"/>
-              </a:rPr>
-              <a:t>)</a:t>
-            </a:r>
-            <a:endParaRPr lang="ko-KR" altLang="en-US" sz="1400" dirty="0">
-              <a:latin typeface="D2Coding" panose="020B0609020101020101" pitchFamily="49" charset="-127"/>
-              <a:ea typeface="D2Coding" panose="020B0609020101020101" pitchFamily="49" charset="-127"/>
-            </a:endParaRPr>
           </a:p>
         </p:txBody>
       </p:sp>
@@ -10017,12 +11441,17 @@
         </p:blipFill>
         <p:spPr>
           <a:xfrm>
-            <a:off x="1281573" y="4649733"/>
+            <a:off x="1291098" y="4649733"/>
             <a:ext cx="519125" cy="545082"/>
           </a:xfrm>
           <a:prstGeom prst="rect">
             <a:avLst/>
           </a:prstGeom>
+          <a:ln>
+            <a:solidFill>
+              <a:schemeClr val="tx1"/>
+            </a:solidFill>
+          </a:ln>
         </p:spPr>
       </p:pic>
     </p:spTree>
